--- a/docs/Evolution_LATAM_Plan_Crecimiento_2027.pptx
+++ b/docs/Evolution_LATAM_Plan_Crecimiento_2027.pptx
@@ -18,9 +18,11 @@
     <p:sldId id="266" r:id="rId12"/>
     <p:sldId id="267" r:id="rId13"/>
     <p:sldId id="268" r:id="rId14"/>
+    <p:sldId id="269" r:id="rId15"/>
+    <p:sldId id="270" r:id="rId16"/>
   </p:sldIdLst>
   <p:notesMasterIdLst>
-    <p:notesMasterId r:id="rId15"/>
+    <p:notesMasterId r:id="rId17"/>
   </p:notesMasterIdLst>
   <p:sldSz cx="12192000" cy="6858000"/>
   <p:notesSz cx="6858000" cy="12192000"/>
@@ -119,45 +121,51 @@
   <p:extLst>
     <p:ext uri="{521415D9-36F7-43E2-AB2F-B90AF26B5E84}">
       <p14:sectionLst xmlns:p14="http://schemas.microsoft.com/office/powerpoint/2010/main">
-        <p14:section name="Resumen" id="{413f40f7-5b83-e8e5-384b-e87803cc59cc}">
+        <p14:section name="Resumen" id="{92b99464-bac7-c93a-7fe9-5a5bb5aaacfb}">
           <p14:sldIdLst>
             <p14:sldId id="256"/>
             <p14:sldId id="257"/>
           </p14:sldIdLst>
         </p14:section>
-        <p14:section name="Proyección 2027" id="{9ba2619c-3822-42f9-9c1a-5104c813a1a9}">
+        <p14:section name="Proyección 2027" id="{83992c29-e5ad-67b5-ce65-677146339dc7}">
           <p14:sldIdLst>
             <p14:sldId id="258"/>
             <p14:sldId id="259"/>
           </p14:sldIdLst>
         </p14:section>
-        <p14:section name="Oportunidades" id="{64f447aa-ba25-7235-a359-051f08d131eb}">
+        <p14:section name="Oportunidades" id="{14d1c696-f05a-9052-843e-da56e840e2a4}">
           <p14:sldIdLst>
             <p14:sldId id="260"/>
             <p14:sldId id="261"/>
           </p14:sldIdLst>
         </p14:section>
-        <p14:section name="México" id="{78ec3466-7692-fd62-5bc2-6a6985f9ebc0}">
+        <p14:section name="México" id="{ad002c04-3e2c-fd34-1208-f5a01fa404fc}">
           <p14:sldIdLst>
             <p14:sldId id="262"/>
           </p14:sldIdLst>
         </p14:section>
-        <p14:section name="Nuevos clientes y upselling" id="{b92ae493-6bd5-836d-deff-8750bf204047}">
+        <p14:section name="Nuevos clientes y upselling" id="{5d50d878-c98b-21b6-ea3f-9dd17f8b7ef9}">
           <p14:sldIdLst>
             <p14:sldId id="263"/>
             <p14:sldId id="264"/>
           </p14:sldIdLst>
         </p14:section>
-        <p14:section name="Activación" id="{c32aec77-343b-57aa-341d-e4c4227f48d3}">
+        <p14:section name="Activación" id="{beac1bd7-ad21-3dec-cbd3-3057053235c3}">
           <p14:sldIdLst>
             <p14:sldId id="265"/>
             <p14:sldId id="266"/>
           </p14:sldIdLst>
         </p14:section>
-        <p14:section name="Plan de acción" id="{982a241a-cebf-91db-fd25-e475ea373ef3}">
+        <p14:section name="SBC Lisbon 2026" id="{299e42a1-0823-8764-dea2-c6b91366f141}">
           <p14:sldIdLst>
             <p14:sldId id="267"/>
             <p14:sldId id="268"/>
+          </p14:sldIdLst>
+        </p14:section>
+        <p14:section name="Plan de acción" id="{912f8bab-089f-fb5f-9240-bb8071f81576}">
+          <p14:sldIdLst>
+            <p14:sldId id="269"/>
+            <p14:sldId id="270"/>
           </p14:sldIdLst>
         </p14:section>
       </p14:sectionLst>
@@ -288,13 +296,13 @@
                   <c:v>2.11</c:v>
                 </c:pt>
                 <c:pt idx="1">
-                  <c:v>3.32</c:v>
+                  <c:v>3.39</c:v>
                 </c:pt>
                 <c:pt idx="2">
-                  <c:v>4.7</c:v>
+                  <c:v>4.79</c:v>
                 </c:pt>
                 <c:pt idx="3">
-                  <c:v>6.36</c:v>
+                  <c:v>6.5</c:v>
                 </c:pt>
               </c:numCache>
             </c:numRef>
@@ -378,13 +386,13 @@
                   <c:v>0</c:v>
                 </c:pt>
                 <c:pt idx="1">
-                  <c:v>3.3</c:v>
+                  <c:v>2.7</c:v>
                 </c:pt>
                 <c:pt idx="2">
-                  <c:v>4.95</c:v>
+                  <c:v>4.05</c:v>
                 </c:pt>
                 <c:pt idx="3">
-                  <c:v>6.6</c:v>
+                  <c:v>5.4</c:v>
                 </c:pt>
               </c:numCache>
             </c:numRef>
@@ -613,9 +621,9 @@
           </c:dLbls>
           <c:cat>
             <c:multiLvlStrRef>
-              <c:f>Sheet1!$A$2:$A$12</c:f>
+              <c:f>Sheet1!$A$2:$A$13</c:f>
               <c:multiLvlStrCache>
-                <c:ptCount val="11"/>
+                <c:ptCount val="12"/>
                 <c:lvl>
                   <c:pt idx="0">
                     <c:v>Rep. Dominicana</c:v>
@@ -627,27 +635,30 @@
                     <c:v>Trickless + Quartzplay</c:v>
                   </c:pt>
                   <c:pt idx="3">
+                    <c:v>SBC Lisbon (nuevos + upsell)</c:v>
+                  </c:pt>
+                  <c:pt idx="4">
                     <c:v>Grupo Cirsa / Sportium</c:v>
                   </c:pt>
-                  <c:pt idx="4">
+                  <c:pt idx="5">
                     <c:v>Grupo Distra (PE)</c:v>
                   </c:pt>
-                  <c:pt idx="5">
+                  <c:pt idx="6">
                     <c:v>Bahamas (+100%)</c:v>
                   </c:pt>
-                  <c:pt idx="6">
+                  <c:pt idx="7">
                     <c:v>Resto pipeline</c:v>
                   </c:pt>
-                  <c:pt idx="7">
+                  <c:pt idx="8">
                     <c:v>México (tier estratégico + nuevos)</c:v>
                   </c:pt>
-                  <c:pt idx="8">
+                  <c:pt idx="9">
                     <c:v>Same-store cuentas live</c:v>
                   </c:pt>
-                  <c:pt idx="9">
+                  <c:pt idx="10">
                     <c:v>Grupo Royal (VE)</c:v>
                   </c:pt>
-                  <c:pt idx="10">
+                  <c:pt idx="11">
                     <c:v>Grupo Ganamos (AR)</c:v>
                   </c:pt>
                 </c:lvl>
@@ -656,10 +667,10 @@
           </c:cat>
           <c:val>
             <c:numRef>
-              <c:f>Sheet1!$B$2:$B$12</c:f>
+              <c:f>Sheet1!$B$2:$B$13</c:f>
               <c:numCache>
                 <c:formatCode>General</c:formatCode>
-                <c:ptCount val="11"/>
+                <c:ptCount val="12"/>
                 <c:pt idx="0">
                   <c:v>25</c:v>
                 </c:pt>
@@ -670,28 +681,31 @@
                   <c:v>48</c:v>
                 </c:pt>
                 <c:pt idx="3">
+                  <c:v>88</c:v>
+                </c:pt>
+                <c:pt idx="4">
                   <c:v>139</c:v>
                 </c:pt>
-                <c:pt idx="4">
+                <c:pt idx="5">
                   <c:v>260</c:v>
                 </c:pt>
-                <c:pt idx="5">
+                <c:pt idx="6">
                   <c:v>266</c:v>
                 </c:pt>
-                <c:pt idx="6">
+                <c:pt idx="7">
                   <c:v>271</c:v>
                 </c:pt>
-                <c:pt idx="7">
+                <c:pt idx="8">
                   <c:v>358</c:v>
                 </c:pt>
-                <c:pt idx="8">
+                <c:pt idx="9">
                   <c:v>369</c:v>
                 </c:pt>
-                <c:pt idx="9">
+                <c:pt idx="10">
                   <c:v>808</c:v>
                 </c:pt>
-                <c:pt idx="10">
-                  <c:v>4950</c:v>
+                <c:pt idx="11">
+                  <c:v>4050</c:v>
                 </c:pt>
               </c:numCache>
             </c:numRef>
@@ -772,7 +786,7 @@
         <c:axId val="2094734552"/>
         <c:scaling>
           <c:orientation val="minMax"/>
-          <c:max val="5800"/>
+          <c:max val="4800"/>
         </c:scaling>
         <c:delete val="1"/>
         <c:axPos val="b"/>
@@ -2197,7 +2211,7 @@
           <a:p>
             <a:r>
               <a:rPr lang="en-US" dirty="0"/>
-              <a:t/>
+              <a:t>Fuente: meeting notes SBC Lisbon 2026. Ninguna de estas oportunidades tenía valor en las notas; se asignaron valores estándar para sumarlas al plan.</a:t>
             </a:r>
             <a:endParaRPr lang="en-US" dirty="0"/>
           </a:p>
@@ -2285,7 +2299,7 @@
           <a:p>
             <a:r>
               <a:rPr lang="en-US" dirty="0"/>
-              <a:t>Con estas confirmaciones se cierra la proyección final y se actualiza Hot_Leads.</a:t>
+              <a:t>Tracker completo con responsable y estado en la pestaña Action items SBC Lisbon del Excel.</a:t>
             </a:r>
             <a:endParaRPr lang="en-US" dirty="0"/>
           </a:p>
@@ -2309,6 +2323,182 @@
             <a:fld id="{F7021451-1387-4CA6-816F-3879F97B5CBC}" type="slidenum">
               <a:rPr lang="en-US"/>
               <a:t>13</a:t>
+            </a:fld>
+            <a:endParaRPr lang="en-US"/>
+          </a:p>
+        </p:txBody>
+      </p:sp>
+    </p:spTree>
+    <p:extLst>
+      <p:ext uri="{BB962C8B-B14F-4D97-AF65-F5344CB8AC3E}">
+        <p14:creationId xmlns:p14="http://schemas.microsoft.com/office/powerpoint/2010/main" val="1024086991"/>
+      </p:ext>
+    </p:extLst>
+  </p:cSld>
+  <p:clrMapOvr>
+    <a:masterClrMapping/>
+  </p:clrMapOvr>
+</p:notes>
+</file>
+
+<file path=ppt/notesSlides/notesSlide14.xml><?xml version="1.0" encoding="utf-8"?>
+<p:notes xmlns:a="http://schemas.openxmlformats.org/drawingml/2006/main" xmlns:r="http://schemas.openxmlformats.org/officeDocument/2006/relationships" xmlns:p="http://schemas.openxmlformats.org/presentationml/2006/main">
+  <p:cSld>
+    <p:spTree>
+      <p:nvGrpSpPr>
+        <p:cNvPr id="1" name=""/>
+        <p:cNvGrpSpPr/>
+        <p:nvPr/>
+      </p:nvGrpSpPr>
+      <p:grpSpPr>
+        <a:xfrm>
+          <a:off x="0" y="0"/>
+          <a:ext cx="0" cy="0"/>
+          <a:chOff x="0" y="0"/>
+          <a:chExt cx="0" cy="0"/>
+        </a:xfrm>
+      </p:grpSpPr>
+      <p:sp>
+        <p:nvSpPr>
+          <p:cNvPr id="2" name="Slide Image Placeholder 1"/>
+          <p:cNvSpPr>
+            <a:spLocks noGrp="1" noRot="1" noChangeAspect="1"/>
+          </p:cNvSpPr>
+          <p:nvPr>
+            <p:ph type="sldImg"/>
+          </p:nvPr>
+        </p:nvSpPr>
+        <p:spPr/>
+      </p:sp>
+      <p:sp>
+        <p:nvSpPr>
+          <p:cNvPr id="3" name="Notes Placeholder 2"/>
+          <p:cNvSpPr>
+            <a:spLocks noGrp="1"/>
+          </p:cNvSpPr>
+          <p:nvPr>
+            <p:ph type="body" idx="1"/>
+          </p:nvPr>
+        </p:nvSpPr>
+        <p:spPr/>
+        <p:txBody>
+          <a:bodyPr/>
+          <a:lstStyle/>
+          <a:p>
+            <a:r>
+              <a:rPr lang="en-US" dirty="0"/>
+              <a:t/>
+            </a:r>
+            <a:endParaRPr lang="en-US" dirty="0"/>
+          </a:p>
+        </p:txBody>
+      </p:sp>
+      <p:sp>
+        <p:nvSpPr>
+          <p:cNvPr id="4" name="Slide Number Placeholder 3"/>
+          <p:cNvSpPr>
+            <a:spLocks noGrp="1"/>
+          </p:cNvSpPr>
+          <p:nvPr>
+            <p:ph type="sldNum" sz="quarter" idx="10"/>
+          </p:nvPr>
+        </p:nvSpPr>
+        <p:spPr/>
+        <p:txBody>
+          <a:bodyPr/>
+          <a:lstStyle/>
+          <a:p>
+            <a:fld id="{F7021451-1387-4CA6-816F-3879F97B5CBC}" type="slidenum">
+              <a:rPr lang="en-US"/>
+              <a:t>14</a:t>
+            </a:fld>
+            <a:endParaRPr lang="en-US"/>
+          </a:p>
+        </p:txBody>
+      </p:sp>
+    </p:spTree>
+    <p:extLst>
+      <p:ext uri="{BB962C8B-B14F-4D97-AF65-F5344CB8AC3E}">
+        <p14:creationId xmlns:p14="http://schemas.microsoft.com/office/powerpoint/2010/main" val="1024086991"/>
+      </p:ext>
+    </p:extLst>
+  </p:cSld>
+  <p:clrMapOvr>
+    <a:masterClrMapping/>
+  </p:clrMapOvr>
+</p:notes>
+</file>
+
+<file path=ppt/notesSlides/notesSlide15.xml><?xml version="1.0" encoding="utf-8"?>
+<p:notes xmlns:a="http://schemas.openxmlformats.org/drawingml/2006/main" xmlns:r="http://schemas.openxmlformats.org/officeDocument/2006/relationships" xmlns:p="http://schemas.openxmlformats.org/presentationml/2006/main">
+  <p:cSld>
+    <p:spTree>
+      <p:nvGrpSpPr>
+        <p:cNvPr id="1" name=""/>
+        <p:cNvGrpSpPr/>
+        <p:nvPr/>
+      </p:nvGrpSpPr>
+      <p:grpSpPr>
+        <a:xfrm>
+          <a:off x="0" y="0"/>
+          <a:ext cx="0" cy="0"/>
+          <a:chOff x="0" y="0"/>
+          <a:chExt cx="0" cy="0"/>
+        </a:xfrm>
+      </p:grpSpPr>
+      <p:sp>
+        <p:nvSpPr>
+          <p:cNvPr id="2" name="Slide Image Placeholder 1"/>
+          <p:cNvSpPr>
+            <a:spLocks noGrp="1" noRot="1" noChangeAspect="1"/>
+          </p:cNvSpPr>
+          <p:nvPr>
+            <p:ph type="sldImg"/>
+          </p:nvPr>
+        </p:nvSpPr>
+        <p:spPr/>
+      </p:sp>
+      <p:sp>
+        <p:nvSpPr>
+          <p:cNvPr id="3" name="Notes Placeholder 2"/>
+          <p:cNvSpPr>
+            <a:spLocks noGrp="1"/>
+          </p:cNvSpPr>
+          <p:nvPr>
+            <p:ph type="body" idx="1"/>
+          </p:nvPr>
+        </p:nvSpPr>
+        <p:spPr/>
+        <p:txBody>
+          <a:bodyPr/>
+          <a:lstStyle/>
+          <a:p>
+            <a:r>
+              <a:rPr lang="en-US" dirty="0"/>
+              <a:t>Con estas confirmaciones se cierra la proyección final y se actualiza Hot_Leads.</a:t>
+            </a:r>
+            <a:endParaRPr lang="en-US" dirty="0"/>
+          </a:p>
+        </p:txBody>
+      </p:sp>
+      <p:sp>
+        <p:nvSpPr>
+          <p:cNvPr id="4" name="Slide Number Placeholder 3"/>
+          <p:cNvSpPr>
+            <a:spLocks noGrp="1"/>
+          </p:cNvSpPr>
+          <p:nvPr>
+            <p:ph type="sldNum" sz="quarter" idx="10"/>
+          </p:nvPr>
+        </p:nvSpPr>
+        <p:spPr/>
+        <p:txBody>
+          <a:bodyPr/>
+          <a:lstStyle/>
+          <a:p>
+            <a:fld id="{F7021451-1387-4CA6-816F-3879F97B5CBC}" type="slidenum">
+              <a:rPr lang="en-US"/>
+              <a:t>15</a:t>
             </a:fld>
             <a:endParaRPr lang="en-US"/>
           </a:p>
@@ -7486,49 +7676,3817 @@
                   <a:schemeClr val="tx2"/>
                 </a:solidFill>
               </a:rPr>
-              <a:t>Plan de acción 2027 por trimestre</a:t>
+              <a:t>SBC Lisbon: 12 oportunidades nuevas suman €365K al plan</a:t>
             </a:r>
             <a:endParaRPr lang="en-US" sz="3000" dirty="0"/>
           </a:p>
         </p:txBody>
       </p:sp>
-      <p:sp>
-        <p:nvSpPr>
-          <p:cNvPr id="3" name="q0"/>
-          <p:cNvSpPr/>
-          <p:nvPr/>
-        </p:nvSpPr>
-        <p:spPr>
-          <a:xfrm>
-            <a:off x="548640" y="1325880"/>
-            <a:ext cx="3520440" cy="4892040"/>
-          </a:xfrm>
-          <a:prstGeom prst="roundRect">
-            <a:avLst>
-              <a:gd name="adj" fmla="val 2078"/>
-            </a:avLst>
-          </a:prstGeom>
-          <a:solidFill>
-            <a:schemeClr val="tx2"/>
-          </a:solidFill>
-          <a:ln w="12700">
-            <a:solidFill>
-              <a:schemeClr val="tx2"/>
-            </a:solidFill>
-            <a:prstDash val="solid"/>
-          </a:ln>
-        </p:spPr>
-      </p:sp>
-      <p:sp>
-        <p:nvSpPr>
-          <p:cNvPr id="4" name="Text 2"/>
+      <p:graphicFrame>
+        <p:nvGraphicFramePr>
+          <p:cNvPr id="13" name="Table 0"/>
+          <p:cNvGraphicFramePr>
+            <a:graphicFrameLocks noGrp="1"/>
+          </p:cNvGraphicFramePr>
+          <p:nvPr>
+            <p:extLst>
+              <p:ext uri="{D42A27DB-BD31-4B8C-83A1-F6EECF244321}">
+                <p14:modId xmlns:p14="http://schemas.microsoft.com/office/powerpoint/2010/main" val="1579011935"/>
+              </p:ext>
+            </p:extLst>
+          </p:nvPr>
+        </p:nvGraphicFramePr>
+        <p:xfrm>
+          <a:off x="548640" y="1234440"/>
+          <a:ext cx="11064240" cy="914400"/>
+        </p:xfrm>
+        <a:graphic>
+          <a:graphicData uri="http://schemas.openxmlformats.org/drawingml/2006/table">
+            <a:tbl>
+              <a:tblPr/>
+              <a:tblGrid>
+                <a:gridCol w="2651760"/>
+                <a:gridCol w="1554480"/>
+                <a:gridCol w="1371600"/>
+                <a:gridCol w="1097280"/>
+                <a:gridCol w="4389120"/>
+              </a:tblGrid>
+              <a:tr h="420624">
+                <a:tc>
+                  <a:txBody>
+                    <a:bodyPr/>
+                    <a:lstStyle/>
+                    <a:p>
+                      <a:pPr indent="0" marL="0">
+                        <a:buNone/>
+                      </a:pPr>
+                      <a:r>
+                        <a:rPr lang="en-US" sz="1300" b="1" dirty="0">
+                          <a:solidFill>
+                            <a:srgbClr val="FFFFFF"/>
+                          </a:solidFill>
+                          <a:latin typeface="Calibri" pitchFamily="34" charset="0"/>
+                          <a:ea typeface="Calibri" pitchFamily="34" charset="-122"/>
+                          <a:cs typeface="Calibri" pitchFamily="34" charset="-120"/>
+                        </a:rPr>
+                        <a:t>Cuenta</a:t>
+                      </a:r>
+                      <a:endParaRPr lang="en-US" sz="1300" dirty="0">
+                        <a:latin typeface="Calibri" charset="0"/>
+                        <a:ea typeface="Calibri" charset="0"/>
+                        <a:cs typeface="Calibri" charset="0"/>
+                      </a:endParaRPr>
+                    </a:p>
+                  </a:txBody>
+                  <a:tcPr marL="54864" marR="54864" marT="54864" marB="54864" anchor="ctr">
+                    <a:lnL w="6350" cap="flat" cmpd="sng" algn="ctr">
+                      <a:solidFill>
+                        <a:srgbClr val="D9E2DD"/>
+                      </a:solidFill>
+                      <a:prstDash val="solid"/>
+                      <a:round/>
+                      <a:headEnd type="none" w="med" len="med"/>
+                      <a:tailEnd type="none" w="med" len="med"/>
+                    </a:lnL>
+                    <a:lnR w="6350" cap="flat" cmpd="sng" algn="ctr">
+                      <a:solidFill>
+                        <a:srgbClr val="D9E2DD"/>
+                      </a:solidFill>
+                      <a:prstDash val="solid"/>
+                      <a:round/>
+                      <a:headEnd type="none" w="med" len="med"/>
+                      <a:tailEnd type="none" w="med" len="med"/>
+                    </a:lnR>
+                    <a:lnT w="6350" cap="flat" cmpd="sng" algn="ctr">
+                      <a:solidFill>
+                        <a:srgbClr val="D9E2DD"/>
+                      </a:solidFill>
+                      <a:prstDash val="solid"/>
+                      <a:round/>
+                      <a:headEnd type="none" w="med" len="med"/>
+                      <a:tailEnd type="none" w="med" len="med"/>
+                    </a:lnT>
+                    <a:lnB w="6350" cap="flat" cmpd="sng" algn="ctr">
+                      <a:solidFill>
+                        <a:srgbClr val="D9E2DD"/>
+                      </a:solidFill>
+                      <a:prstDash val="solid"/>
+                      <a:round/>
+                      <a:headEnd type="none" w="med" len="med"/>
+                      <a:tailEnd type="none" w="med" len="med"/>
+                    </a:lnB>
+                    <a:solidFill>
+                      <a:srgbClr val="0E3B2E"/>
+                    </a:solidFill>
+                  </a:tcPr>
+                </a:tc>
+                <a:tc>
+                  <a:txBody>
+                    <a:bodyPr/>
+                    <a:lstStyle/>
+                    <a:p>
+                      <a:pPr indent="0" marL="0">
+                        <a:buNone/>
+                      </a:pPr>
+                      <a:r>
+                        <a:rPr lang="en-US" sz="1300" b="1" dirty="0">
+                          <a:solidFill>
+                            <a:srgbClr val="FFFFFF"/>
+                          </a:solidFill>
+                          <a:latin typeface="Calibri" pitchFamily="34" charset="0"/>
+                          <a:ea typeface="Calibri" pitchFamily="34" charset="-122"/>
+                          <a:cs typeface="Calibri" pitchFamily="34" charset="-120"/>
+                        </a:rPr>
+                        <a:t>Mercado</a:t>
+                      </a:r>
+                      <a:endParaRPr lang="en-US" sz="1300" dirty="0">
+                        <a:latin typeface="Calibri" charset="0"/>
+                        <a:ea typeface="Calibri" charset="0"/>
+                        <a:cs typeface="Calibri" charset="0"/>
+                      </a:endParaRPr>
+                    </a:p>
+                  </a:txBody>
+                  <a:tcPr marL="54864" marR="54864" marT="54864" marB="54864" anchor="ctr">
+                    <a:lnL w="6350" cap="flat" cmpd="sng" algn="ctr">
+                      <a:solidFill>
+                        <a:srgbClr val="D9E2DD"/>
+                      </a:solidFill>
+                      <a:prstDash val="solid"/>
+                      <a:round/>
+                      <a:headEnd type="none" w="med" len="med"/>
+                      <a:tailEnd type="none" w="med" len="med"/>
+                    </a:lnL>
+                    <a:lnR w="6350" cap="flat" cmpd="sng" algn="ctr">
+                      <a:solidFill>
+                        <a:srgbClr val="D9E2DD"/>
+                      </a:solidFill>
+                      <a:prstDash val="solid"/>
+                      <a:round/>
+                      <a:headEnd type="none" w="med" len="med"/>
+                      <a:tailEnd type="none" w="med" len="med"/>
+                    </a:lnR>
+                    <a:lnT w="6350" cap="flat" cmpd="sng" algn="ctr">
+                      <a:solidFill>
+                        <a:srgbClr val="D9E2DD"/>
+                      </a:solidFill>
+                      <a:prstDash val="solid"/>
+                      <a:round/>
+                      <a:headEnd type="none" w="med" len="med"/>
+                      <a:tailEnd type="none" w="med" len="med"/>
+                    </a:lnT>
+                    <a:lnB w="6350" cap="flat" cmpd="sng" algn="ctr">
+                      <a:solidFill>
+                        <a:srgbClr val="D9E2DD"/>
+                      </a:solidFill>
+                      <a:prstDash val="solid"/>
+                      <a:round/>
+                      <a:headEnd type="none" w="med" len="med"/>
+                      <a:tailEnd type="none" w="med" len="med"/>
+                    </a:lnB>
+                    <a:solidFill>
+                      <a:srgbClr val="0E3B2E"/>
+                    </a:solidFill>
+                  </a:tcPr>
+                </a:tc>
+                <a:tc>
+                  <a:txBody>
+                    <a:bodyPr/>
+                    <a:lstStyle/>
+                    <a:p>
+                      <a:pPr indent="0" marL="0">
+                        <a:buNone/>
+                      </a:pPr>
+                      <a:r>
+                        <a:rPr lang="en-US" sz="1300" b="1" dirty="0">
+                          <a:solidFill>
+                            <a:srgbClr val="FFFFFF"/>
+                          </a:solidFill>
+                          <a:latin typeface="Calibri" pitchFamily="34" charset="0"/>
+                          <a:ea typeface="Calibri" pitchFamily="34" charset="-122"/>
+                          <a:cs typeface="Calibri" pitchFamily="34" charset="-120"/>
+                        </a:rPr>
+                        <a:t>Tipo</a:t>
+                      </a:r>
+                      <a:endParaRPr lang="en-US" sz="1300" dirty="0">
+                        <a:latin typeface="Calibri" charset="0"/>
+                        <a:ea typeface="Calibri" charset="0"/>
+                        <a:cs typeface="Calibri" charset="0"/>
+                      </a:endParaRPr>
+                    </a:p>
+                  </a:txBody>
+                  <a:tcPr marL="54864" marR="54864" marT="54864" marB="54864" anchor="ctr">
+                    <a:lnL w="6350" cap="flat" cmpd="sng" algn="ctr">
+                      <a:solidFill>
+                        <a:srgbClr val="D9E2DD"/>
+                      </a:solidFill>
+                      <a:prstDash val="solid"/>
+                      <a:round/>
+                      <a:headEnd type="none" w="med" len="med"/>
+                      <a:tailEnd type="none" w="med" len="med"/>
+                    </a:lnL>
+                    <a:lnR w="6350" cap="flat" cmpd="sng" algn="ctr">
+                      <a:solidFill>
+                        <a:srgbClr val="D9E2DD"/>
+                      </a:solidFill>
+                      <a:prstDash val="solid"/>
+                      <a:round/>
+                      <a:headEnd type="none" w="med" len="med"/>
+                      <a:tailEnd type="none" w="med" len="med"/>
+                    </a:lnR>
+                    <a:lnT w="6350" cap="flat" cmpd="sng" algn="ctr">
+                      <a:solidFill>
+                        <a:srgbClr val="D9E2DD"/>
+                      </a:solidFill>
+                      <a:prstDash val="solid"/>
+                      <a:round/>
+                      <a:headEnd type="none" w="med" len="med"/>
+                      <a:tailEnd type="none" w="med" len="med"/>
+                    </a:lnT>
+                    <a:lnB w="6350" cap="flat" cmpd="sng" algn="ctr">
+                      <a:solidFill>
+                        <a:srgbClr val="D9E2DD"/>
+                      </a:solidFill>
+                      <a:prstDash val="solid"/>
+                      <a:round/>
+                      <a:headEnd type="none" w="med" len="med"/>
+                      <a:tailEnd type="none" w="med" len="med"/>
+                    </a:lnB>
+                    <a:solidFill>
+                      <a:srgbClr val="0E3B2E"/>
+                    </a:solidFill>
+                  </a:tcPr>
+                </a:tc>
+                <a:tc>
+                  <a:txBody>
+                    <a:bodyPr/>
+                    <a:lstStyle/>
+                    <a:p>
+                      <a:pPr indent="0" marL="0">
+                        <a:buNone/>
+                      </a:pPr>
+                      <a:r>
+                        <a:rPr lang="en-US" sz="1300" b="1" dirty="0">
+                          <a:solidFill>
+                            <a:srgbClr val="FFFFFF"/>
+                          </a:solidFill>
+                          <a:latin typeface="Calibri" pitchFamily="34" charset="0"/>
+                          <a:ea typeface="Calibri" pitchFamily="34" charset="-122"/>
+                          <a:cs typeface="Calibri" pitchFamily="34" charset="-120"/>
+                        </a:rPr>
+                        <a:t>Valor est.</a:t>
+                      </a:r>
+                      <a:endParaRPr lang="en-US" sz="1300" dirty="0">
+                        <a:latin typeface="Calibri" charset="0"/>
+                        <a:ea typeface="Calibri" charset="0"/>
+                        <a:cs typeface="Calibri" charset="0"/>
+                      </a:endParaRPr>
+                    </a:p>
+                  </a:txBody>
+                  <a:tcPr marL="54864" marR="54864" marT="54864" marB="54864" anchor="ctr">
+                    <a:lnL w="6350" cap="flat" cmpd="sng" algn="ctr">
+                      <a:solidFill>
+                        <a:srgbClr val="D9E2DD"/>
+                      </a:solidFill>
+                      <a:prstDash val="solid"/>
+                      <a:round/>
+                      <a:headEnd type="none" w="med" len="med"/>
+                      <a:tailEnd type="none" w="med" len="med"/>
+                    </a:lnL>
+                    <a:lnR w="6350" cap="flat" cmpd="sng" algn="ctr">
+                      <a:solidFill>
+                        <a:srgbClr val="D9E2DD"/>
+                      </a:solidFill>
+                      <a:prstDash val="solid"/>
+                      <a:round/>
+                      <a:headEnd type="none" w="med" len="med"/>
+                      <a:tailEnd type="none" w="med" len="med"/>
+                    </a:lnR>
+                    <a:lnT w="6350" cap="flat" cmpd="sng" algn="ctr">
+                      <a:solidFill>
+                        <a:srgbClr val="D9E2DD"/>
+                      </a:solidFill>
+                      <a:prstDash val="solid"/>
+                      <a:round/>
+                      <a:headEnd type="none" w="med" len="med"/>
+                      <a:tailEnd type="none" w="med" len="med"/>
+                    </a:lnT>
+                    <a:lnB w="6350" cap="flat" cmpd="sng" algn="ctr">
+                      <a:solidFill>
+                        <a:srgbClr val="D9E2DD"/>
+                      </a:solidFill>
+                      <a:prstDash val="solid"/>
+                      <a:round/>
+                      <a:headEnd type="none" w="med" len="med"/>
+                      <a:tailEnd type="none" w="med" len="med"/>
+                    </a:lnB>
+                    <a:solidFill>
+                      <a:srgbClr val="0E3B2E"/>
+                    </a:solidFill>
+                  </a:tcPr>
+                </a:tc>
+                <a:tc>
+                  <a:txBody>
+                    <a:bodyPr/>
+                    <a:lstStyle/>
+                    <a:p>
+                      <a:pPr indent="0" marL="0">
+                        <a:buNone/>
+                      </a:pPr>
+                      <a:r>
+                        <a:rPr lang="en-US" sz="1300" b="1" dirty="0">
+                          <a:solidFill>
+                            <a:srgbClr val="FFFFFF"/>
+                          </a:solidFill>
+                          <a:latin typeface="Calibri" pitchFamily="34" charset="0"/>
+                          <a:ea typeface="Calibri" pitchFamily="34" charset="-122"/>
+                          <a:cs typeface="Calibri" pitchFamily="34" charset="-120"/>
+                        </a:rPr>
+                        <a:t>Situación</a:t>
+                      </a:r>
+                      <a:endParaRPr lang="en-US" sz="1300" dirty="0">
+                        <a:latin typeface="Calibri" charset="0"/>
+                        <a:ea typeface="Calibri" charset="0"/>
+                        <a:cs typeface="Calibri" charset="0"/>
+                      </a:endParaRPr>
+                    </a:p>
+                  </a:txBody>
+                  <a:tcPr marL="54864" marR="54864" marT="54864" marB="54864" anchor="ctr">
+                    <a:lnL w="6350" cap="flat" cmpd="sng" algn="ctr">
+                      <a:solidFill>
+                        <a:srgbClr val="D9E2DD"/>
+                      </a:solidFill>
+                      <a:prstDash val="solid"/>
+                      <a:round/>
+                      <a:headEnd type="none" w="med" len="med"/>
+                      <a:tailEnd type="none" w="med" len="med"/>
+                    </a:lnL>
+                    <a:lnR w="6350" cap="flat" cmpd="sng" algn="ctr">
+                      <a:solidFill>
+                        <a:srgbClr val="D9E2DD"/>
+                      </a:solidFill>
+                      <a:prstDash val="solid"/>
+                      <a:round/>
+                      <a:headEnd type="none" w="med" len="med"/>
+                      <a:tailEnd type="none" w="med" len="med"/>
+                    </a:lnR>
+                    <a:lnT w="6350" cap="flat" cmpd="sng" algn="ctr">
+                      <a:solidFill>
+                        <a:srgbClr val="D9E2DD"/>
+                      </a:solidFill>
+                      <a:prstDash val="solid"/>
+                      <a:round/>
+                      <a:headEnd type="none" w="med" len="med"/>
+                      <a:tailEnd type="none" w="med" len="med"/>
+                    </a:lnT>
+                    <a:lnB w="6350" cap="flat" cmpd="sng" algn="ctr">
+                      <a:solidFill>
+                        <a:srgbClr val="D9E2DD"/>
+                      </a:solidFill>
+                      <a:prstDash val="solid"/>
+                      <a:round/>
+                      <a:headEnd type="none" w="med" len="med"/>
+                      <a:tailEnd type="none" w="med" len="med"/>
+                    </a:lnB>
+                    <a:solidFill>
+                      <a:srgbClr val="0E3B2E"/>
+                    </a:solidFill>
+                  </a:tcPr>
+                </a:tc>
+              </a:tr>
+              <a:tr h="420624">
+                <a:tc>
+                  <a:txBody>
+                    <a:bodyPr/>
+                    <a:lstStyle/>
+                    <a:p>
+                      <a:pPr indent="0" marL="0">
+                        <a:buNone/>
+                      </a:pPr>
+                      <a:r>
+                        <a:rPr lang="en-US" sz="1300" dirty="0">
+                          <a:solidFill>
+                            <a:srgbClr val="1D2420"/>
+                          </a:solidFill>
+                          <a:latin typeface="Calibri" pitchFamily="34" charset="0"/>
+                          <a:ea typeface="Calibri" pitchFamily="34" charset="-122"/>
+                          <a:cs typeface="Calibri" pitchFamily="34" charset="-120"/>
+                        </a:rPr>
+                        <a:t>Zenit</a:t>
+                      </a:r>
+                      <a:endParaRPr lang="en-US" sz="1300" dirty="0">
+                        <a:latin typeface="Calibri" charset="0"/>
+                        <a:ea typeface="Calibri" charset="0"/>
+                        <a:cs typeface="Calibri" charset="0"/>
+                      </a:endParaRPr>
+                    </a:p>
+                  </a:txBody>
+                  <a:tcPr marL="54864" marR="54864" marT="54864" marB="54864" anchor="ctr">
+                    <a:lnL w="6350" cap="flat" cmpd="sng" algn="ctr">
+                      <a:solidFill>
+                        <a:srgbClr val="D9E2DD"/>
+                      </a:solidFill>
+                      <a:prstDash val="solid"/>
+                      <a:round/>
+                      <a:headEnd type="none" w="med" len="med"/>
+                      <a:tailEnd type="none" w="med" len="med"/>
+                    </a:lnL>
+                    <a:lnR w="6350" cap="flat" cmpd="sng" algn="ctr">
+                      <a:solidFill>
+                        <a:srgbClr val="D9E2DD"/>
+                      </a:solidFill>
+                      <a:prstDash val="solid"/>
+                      <a:round/>
+                      <a:headEnd type="none" w="med" len="med"/>
+                      <a:tailEnd type="none" w="med" len="med"/>
+                    </a:lnR>
+                    <a:lnT w="6350" cap="flat" cmpd="sng" algn="ctr">
+                      <a:solidFill>
+                        <a:srgbClr val="D9E2DD"/>
+                      </a:solidFill>
+                      <a:prstDash val="solid"/>
+                      <a:round/>
+                      <a:headEnd type="none" w="med" len="med"/>
+                      <a:tailEnd type="none" w="med" len="med"/>
+                    </a:lnT>
+                    <a:lnB w="6350" cap="flat" cmpd="sng" algn="ctr">
+                      <a:solidFill>
+                        <a:srgbClr val="D9E2DD"/>
+                      </a:solidFill>
+                      <a:prstDash val="solid"/>
+                      <a:round/>
+                      <a:headEnd type="none" w="med" len="med"/>
+                      <a:tailEnd type="none" w="med" len="med"/>
+                    </a:lnB>
+                    <a:solidFill>
+                      <a:srgbClr val="FFFFFF"/>
+                    </a:solidFill>
+                  </a:tcPr>
+                </a:tc>
+                <a:tc>
+                  <a:txBody>
+                    <a:bodyPr/>
+                    <a:lstStyle/>
+                    <a:p>
+                      <a:pPr indent="0" marL="0">
+                        <a:buNone/>
+                      </a:pPr>
+                      <a:r>
+                        <a:rPr lang="en-US" sz="1300" dirty="0">
+                          <a:solidFill>
+                            <a:srgbClr val="1D2420"/>
+                          </a:solidFill>
+                          <a:latin typeface="Calibri" pitchFamily="34" charset="0"/>
+                          <a:ea typeface="Calibri" pitchFamily="34" charset="-122"/>
+                          <a:cs typeface="Calibri" pitchFamily="34" charset="-120"/>
+                        </a:rPr>
+                        <a:t>LATAM</a:t>
+                      </a:r>
+                      <a:endParaRPr lang="en-US" sz="1300" dirty="0">
+                        <a:latin typeface="Calibri" charset="0"/>
+                        <a:ea typeface="Calibri" charset="0"/>
+                        <a:cs typeface="Calibri" charset="0"/>
+                      </a:endParaRPr>
+                    </a:p>
+                  </a:txBody>
+                  <a:tcPr marL="54864" marR="54864" marT="54864" marB="54864" anchor="ctr">
+                    <a:lnL w="6350" cap="flat" cmpd="sng" algn="ctr">
+                      <a:solidFill>
+                        <a:srgbClr val="D9E2DD"/>
+                      </a:solidFill>
+                      <a:prstDash val="solid"/>
+                      <a:round/>
+                      <a:headEnd type="none" w="med" len="med"/>
+                      <a:tailEnd type="none" w="med" len="med"/>
+                    </a:lnL>
+                    <a:lnR w="6350" cap="flat" cmpd="sng" algn="ctr">
+                      <a:solidFill>
+                        <a:srgbClr val="D9E2DD"/>
+                      </a:solidFill>
+                      <a:prstDash val="solid"/>
+                      <a:round/>
+                      <a:headEnd type="none" w="med" len="med"/>
+                      <a:tailEnd type="none" w="med" len="med"/>
+                    </a:lnR>
+                    <a:lnT w="6350" cap="flat" cmpd="sng" algn="ctr">
+                      <a:solidFill>
+                        <a:srgbClr val="D9E2DD"/>
+                      </a:solidFill>
+                      <a:prstDash val="solid"/>
+                      <a:round/>
+                      <a:headEnd type="none" w="med" len="med"/>
+                      <a:tailEnd type="none" w="med" len="med"/>
+                    </a:lnT>
+                    <a:lnB w="6350" cap="flat" cmpd="sng" algn="ctr">
+                      <a:solidFill>
+                        <a:srgbClr val="D9E2DD"/>
+                      </a:solidFill>
+                      <a:prstDash val="solid"/>
+                      <a:round/>
+                      <a:headEnd type="none" w="med" len="med"/>
+                      <a:tailEnd type="none" w="med" len="med"/>
+                    </a:lnB>
+                    <a:solidFill>
+                      <a:srgbClr val="FFFFFF"/>
+                    </a:solidFill>
+                  </a:tcPr>
+                </a:tc>
+                <a:tc>
+                  <a:txBody>
+                    <a:bodyPr/>
+                    <a:lstStyle/>
+                    <a:p>
+                      <a:pPr indent="0" marL="0">
+                        <a:buNone/>
+                      </a:pPr>
+                      <a:r>
+                        <a:rPr lang="en-US" sz="1300" dirty="0">
+                          <a:solidFill>
+                            <a:srgbClr val="1D2420"/>
+                          </a:solidFill>
+                          <a:latin typeface="Calibri" pitchFamily="34" charset="0"/>
+                          <a:ea typeface="Calibri" pitchFamily="34" charset="-122"/>
+                          <a:cs typeface="Calibri" pitchFamily="34" charset="-120"/>
+                        </a:rPr>
+                        <a:t>Nuevo logo</a:t>
+                      </a:r>
+                      <a:endParaRPr lang="en-US" sz="1300" dirty="0">
+                        <a:latin typeface="Calibri" charset="0"/>
+                        <a:ea typeface="Calibri" charset="0"/>
+                        <a:cs typeface="Calibri" charset="0"/>
+                      </a:endParaRPr>
+                    </a:p>
+                  </a:txBody>
+                  <a:tcPr marL="54864" marR="54864" marT="54864" marB="54864" anchor="ctr">
+                    <a:lnL w="6350" cap="flat" cmpd="sng" algn="ctr">
+                      <a:solidFill>
+                        <a:srgbClr val="D9E2DD"/>
+                      </a:solidFill>
+                      <a:prstDash val="solid"/>
+                      <a:round/>
+                      <a:headEnd type="none" w="med" len="med"/>
+                      <a:tailEnd type="none" w="med" len="med"/>
+                    </a:lnL>
+                    <a:lnR w="6350" cap="flat" cmpd="sng" algn="ctr">
+                      <a:solidFill>
+                        <a:srgbClr val="D9E2DD"/>
+                      </a:solidFill>
+                      <a:prstDash val="solid"/>
+                      <a:round/>
+                      <a:headEnd type="none" w="med" len="med"/>
+                      <a:tailEnd type="none" w="med" len="med"/>
+                    </a:lnR>
+                    <a:lnT w="6350" cap="flat" cmpd="sng" algn="ctr">
+                      <a:solidFill>
+                        <a:srgbClr val="D9E2DD"/>
+                      </a:solidFill>
+                      <a:prstDash val="solid"/>
+                      <a:round/>
+                      <a:headEnd type="none" w="med" len="med"/>
+                      <a:tailEnd type="none" w="med" len="med"/>
+                    </a:lnT>
+                    <a:lnB w="6350" cap="flat" cmpd="sng" algn="ctr">
+                      <a:solidFill>
+                        <a:srgbClr val="D9E2DD"/>
+                      </a:solidFill>
+                      <a:prstDash val="solid"/>
+                      <a:round/>
+                      <a:headEnd type="none" w="med" len="med"/>
+                      <a:tailEnd type="none" w="med" len="med"/>
+                    </a:lnB>
+                    <a:solidFill>
+                      <a:srgbClr val="FFFFFF"/>
+                    </a:solidFill>
+                  </a:tcPr>
+                </a:tc>
+                <a:tc>
+                  <a:txBody>
+                    <a:bodyPr/>
+                    <a:lstStyle/>
+                    <a:p>
+                      <a:pPr indent="0" marL="0">
+                        <a:buNone/>
+                      </a:pPr>
+                      <a:r>
+                        <a:rPr lang="en-US" sz="1300" dirty="0">
+                          <a:solidFill>
+                            <a:srgbClr val="1D2420"/>
+                          </a:solidFill>
+                          <a:latin typeface="Calibri" pitchFamily="34" charset="0"/>
+                          <a:ea typeface="Calibri" pitchFamily="34" charset="-122"/>
+                          <a:cs typeface="Calibri" pitchFamily="34" charset="-120"/>
+                        </a:rPr>
+                        <a:t>$50K</a:t>
+                      </a:r>
+                      <a:endParaRPr lang="en-US" sz="1300" dirty="0">
+                        <a:latin typeface="Calibri" charset="0"/>
+                        <a:ea typeface="Calibri" charset="0"/>
+                        <a:cs typeface="Calibri" charset="0"/>
+                      </a:endParaRPr>
+                    </a:p>
+                  </a:txBody>
+                  <a:tcPr marL="54864" marR="54864" marT="54864" marB="54864" anchor="ctr">
+                    <a:lnL w="6350" cap="flat" cmpd="sng" algn="ctr">
+                      <a:solidFill>
+                        <a:srgbClr val="D9E2DD"/>
+                      </a:solidFill>
+                      <a:prstDash val="solid"/>
+                      <a:round/>
+                      <a:headEnd type="none" w="med" len="med"/>
+                      <a:tailEnd type="none" w="med" len="med"/>
+                    </a:lnL>
+                    <a:lnR w="6350" cap="flat" cmpd="sng" algn="ctr">
+                      <a:solidFill>
+                        <a:srgbClr val="D9E2DD"/>
+                      </a:solidFill>
+                      <a:prstDash val="solid"/>
+                      <a:round/>
+                      <a:headEnd type="none" w="med" len="med"/>
+                      <a:tailEnd type="none" w="med" len="med"/>
+                    </a:lnR>
+                    <a:lnT w="6350" cap="flat" cmpd="sng" algn="ctr">
+                      <a:solidFill>
+                        <a:srgbClr val="D9E2DD"/>
+                      </a:solidFill>
+                      <a:prstDash val="solid"/>
+                      <a:round/>
+                      <a:headEnd type="none" w="med" len="med"/>
+                      <a:tailEnd type="none" w="med" len="med"/>
+                    </a:lnT>
+                    <a:lnB w="6350" cap="flat" cmpd="sng" algn="ctr">
+                      <a:solidFill>
+                        <a:srgbClr val="D9E2DD"/>
+                      </a:solidFill>
+                      <a:prstDash val="solid"/>
+                      <a:round/>
+                      <a:headEnd type="none" w="med" len="med"/>
+                      <a:tailEnd type="none" w="med" len="med"/>
+                    </a:lnB>
+                    <a:solidFill>
+                      <a:srgbClr val="FFFFFF"/>
+                    </a:solidFill>
+                  </a:tcPr>
+                </a:tc>
+                <a:tc>
+                  <a:txBody>
+                    <a:bodyPr/>
+                    <a:lstStyle/>
+                    <a:p>
+                      <a:pPr indent="0" marL="0">
+                        <a:buNone/>
+                      </a:pPr>
+                      <a:r>
+                        <a:rPr lang="en-US" sz="1300" dirty="0">
+                          <a:solidFill>
+                            <a:srgbClr val="1D2420"/>
+                          </a:solidFill>
+                          <a:latin typeface="Calibri" pitchFamily="34" charset="0"/>
+                          <a:ea typeface="Calibri" pitchFamily="34" charset="-122"/>
+                          <a:cs typeface="Calibri" pitchFamily="34" charset="-120"/>
+                        </a:rPr>
+                        <a:t>Busca acuerdo directo para expandirse en LATAM</a:t>
+                      </a:r>
+                      <a:endParaRPr lang="en-US" sz="1300" dirty="0">
+                        <a:latin typeface="Calibri" charset="0"/>
+                        <a:ea typeface="Calibri" charset="0"/>
+                        <a:cs typeface="Calibri" charset="0"/>
+                      </a:endParaRPr>
+                    </a:p>
+                  </a:txBody>
+                  <a:tcPr marL="54864" marR="54864" marT="54864" marB="54864" anchor="ctr">
+                    <a:lnL w="6350" cap="flat" cmpd="sng" algn="ctr">
+                      <a:solidFill>
+                        <a:srgbClr val="D9E2DD"/>
+                      </a:solidFill>
+                      <a:prstDash val="solid"/>
+                      <a:round/>
+                      <a:headEnd type="none" w="med" len="med"/>
+                      <a:tailEnd type="none" w="med" len="med"/>
+                    </a:lnL>
+                    <a:lnR w="6350" cap="flat" cmpd="sng" algn="ctr">
+                      <a:solidFill>
+                        <a:srgbClr val="D9E2DD"/>
+                      </a:solidFill>
+                      <a:prstDash val="solid"/>
+                      <a:round/>
+                      <a:headEnd type="none" w="med" len="med"/>
+                      <a:tailEnd type="none" w="med" len="med"/>
+                    </a:lnR>
+                    <a:lnT w="6350" cap="flat" cmpd="sng" algn="ctr">
+                      <a:solidFill>
+                        <a:srgbClr val="D9E2DD"/>
+                      </a:solidFill>
+                      <a:prstDash val="solid"/>
+                      <a:round/>
+                      <a:headEnd type="none" w="med" len="med"/>
+                      <a:tailEnd type="none" w="med" len="med"/>
+                    </a:lnT>
+                    <a:lnB w="6350" cap="flat" cmpd="sng" algn="ctr">
+                      <a:solidFill>
+                        <a:srgbClr val="D9E2DD"/>
+                      </a:solidFill>
+                      <a:prstDash val="solid"/>
+                      <a:round/>
+                      <a:headEnd type="none" w="med" len="med"/>
+                      <a:tailEnd type="none" w="med" len="med"/>
+                    </a:lnB>
+                    <a:solidFill>
+                      <a:srgbClr val="FFFFFF"/>
+                    </a:solidFill>
+                  </a:tcPr>
+                </a:tc>
+              </a:tr>
+              <a:tr h="420624">
+                <a:tc>
+                  <a:txBody>
+                    <a:bodyPr/>
+                    <a:lstStyle/>
+                    <a:p>
+                      <a:pPr indent="0" marL="0">
+                        <a:buNone/>
+                      </a:pPr>
+                      <a:r>
+                        <a:rPr lang="en-US" sz="1300" dirty="0">
+                          <a:solidFill>
+                            <a:srgbClr val="1D2420"/>
+                          </a:solidFill>
+                          <a:latin typeface="Calibri" pitchFamily="34" charset="0"/>
+                          <a:ea typeface="Calibri" pitchFamily="34" charset="-122"/>
+                          <a:cs typeface="Calibri" pitchFamily="34" charset="-120"/>
+                        </a:rPr>
+                        <a:t>Betstarters</a:t>
+                      </a:r>
+                      <a:endParaRPr lang="en-US" sz="1300" dirty="0">
+                        <a:latin typeface="Calibri" charset="0"/>
+                        <a:ea typeface="Calibri" charset="0"/>
+                        <a:cs typeface="Calibri" charset="0"/>
+                      </a:endParaRPr>
+                    </a:p>
+                  </a:txBody>
+                  <a:tcPr marL="54864" marR="54864" marT="54864" marB="54864" anchor="ctr">
+                    <a:lnL w="6350" cap="flat" cmpd="sng" algn="ctr">
+                      <a:solidFill>
+                        <a:srgbClr val="D9E2DD"/>
+                      </a:solidFill>
+                      <a:prstDash val="solid"/>
+                      <a:round/>
+                      <a:headEnd type="none" w="med" len="med"/>
+                      <a:tailEnd type="none" w="med" len="med"/>
+                    </a:lnL>
+                    <a:lnR w="6350" cap="flat" cmpd="sng" algn="ctr">
+                      <a:solidFill>
+                        <a:srgbClr val="D9E2DD"/>
+                      </a:solidFill>
+                      <a:prstDash val="solid"/>
+                      <a:round/>
+                      <a:headEnd type="none" w="med" len="med"/>
+                      <a:tailEnd type="none" w="med" len="med"/>
+                    </a:lnR>
+                    <a:lnT w="6350" cap="flat" cmpd="sng" algn="ctr">
+                      <a:solidFill>
+                        <a:srgbClr val="D9E2DD"/>
+                      </a:solidFill>
+                      <a:prstDash val="solid"/>
+                      <a:round/>
+                      <a:headEnd type="none" w="med" len="med"/>
+                      <a:tailEnd type="none" w="med" len="med"/>
+                    </a:lnT>
+                    <a:lnB w="6350" cap="flat" cmpd="sng" algn="ctr">
+                      <a:solidFill>
+                        <a:srgbClr val="D9E2DD"/>
+                      </a:solidFill>
+                      <a:prstDash val="solid"/>
+                      <a:round/>
+                      <a:headEnd type="none" w="med" len="med"/>
+                      <a:tailEnd type="none" w="med" len="med"/>
+                    </a:lnB>
+                    <a:solidFill>
+                      <a:srgbClr val="FFFFFF"/>
+                    </a:solidFill>
+                  </a:tcPr>
+                </a:tc>
+                <a:tc>
+                  <a:txBody>
+                    <a:bodyPr/>
+                    <a:lstStyle/>
+                    <a:p>
+                      <a:pPr indent="0" marL="0">
+                        <a:buNone/>
+                      </a:pPr>
+                      <a:r>
+                        <a:rPr lang="en-US" sz="1300" dirty="0">
+                          <a:solidFill>
+                            <a:srgbClr val="1D2420"/>
+                          </a:solidFill>
+                          <a:latin typeface="Calibri" pitchFamily="34" charset="0"/>
+                          <a:ea typeface="Calibri" pitchFamily="34" charset="-122"/>
+                          <a:cs typeface="Calibri" pitchFamily="34" charset="-120"/>
+                        </a:rPr>
+                        <a:t>LATAM</a:t>
+                      </a:r>
+                      <a:endParaRPr lang="en-US" sz="1300" dirty="0">
+                        <a:latin typeface="Calibri" charset="0"/>
+                        <a:ea typeface="Calibri" charset="0"/>
+                        <a:cs typeface="Calibri" charset="0"/>
+                      </a:endParaRPr>
+                    </a:p>
+                  </a:txBody>
+                  <a:tcPr marL="54864" marR="54864" marT="54864" marB="54864" anchor="ctr">
+                    <a:lnL w="6350" cap="flat" cmpd="sng" algn="ctr">
+                      <a:solidFill>
+                        <a:srgbClr val="D9E2DD"/>
+                      </a:solidFill>
+                      <a:prstDash val="solid"/>
+                      <a:round/>
+                      <a:headEnd type="none" w="med" len="med"/>
+                      <a:tailEnd type="none" w="med" len="med"/>
+                    </a:lnL>
+                    <a:lnR w="6350" cap="flat" cmpd="sng" algn="ctr">
+                      <a:solidFill>
+                        <a:srgbClr val="D9E2DD"/>
+                      </a:solidFill>
+                      <a:prstDash val="solid"/>
+                      <a:round/>
+                      <a:headEnd type="none" w="med" len="med"/>
+                      <a:tailEnd type="none" w="med" len="med"/>
+                    </a:lnR>
+                    <a:lnT w="6350" cap="flat" cmpd="sng" algn="ctr">
+                      <a:solidFill>
+                        <a:srgbClr val="D9E2DD"/>
+                      </a:solidFill>
+                      <a:prstDash val="solid"/>
+                      <a:round/>
+                      <a:headEnd type="none" w="med" len="med"/>
+                      <a:tailEnd type="none" w="med" len="med"/>
+                    </a:lnT>
+                    <a:lnB w="6350" cap="flat" cmpd="sng" algn="ctr">
+                      <a:solidFill>
+                        <a:srgbClr val="D9E2DD"/>
+                      </a:solidFill>
+                      <a:prstDash val="solid"/>
+                      <a:round/>
+                      <a:headEnd type="none" w="med" len="med"/>
+                      <a:tailEnd type="none" w="med" len="med"/>
+                    </a:lnB>
+                    <a:solidFill>
+                      <a:srgbClr val="FFFFFF"/>
+                    </a:solidFill>
+                  </a:tcPr>
+                </a:tc>
+                <a:tc>
+                  <a:txBody>
+                    <a:bodyPr/>
+                    <a:lstStyle/>
+                    <a:p>
+                      <a:pPr indent="0" marL="0">
+                        <a:buNone/>
+                      </a:pPr>
+                      <a:r>
+                        <a:rPr lang="en-US" sz="1300" dirty="0">
+                          <a:solidFill>
+                            <a:srgbClr val="1D2420"/>
+                          </a:solidFill>
+                          <a:latin typeface="Calibri" pitchFamily="34" charset="0"/>
+                          <a:ea typeface="Calibri" pitchFamily="34" charset="-122"/>
+                          <a:cs typeface="Calibri" pitchFamily="34" charset="-120"/>
+                        </a:rPr>
+                        <a:t>Plataforma</a:t>
+                      </a:r>
+                      <a:endParaRPr lang="en-US" sz="1300" dirty="0">
+                        <a:latin typeface="Calibri" charset="0"/>
+                        <a:ea typeface="Calibri" charset="0"/>
+                        <a:cs typeface="Calibri" charset="0"/>
+                      </a:endParaRPr>
+                    </a:p>
+                  </a:txBody>
+                  <a:tcPr marL="54864" marR="54864" marT="54864" marB="54864" anchor="ctr">
+                    <a:lnL w="6350" cap="flat" cmpd="sng" algn="ctr">
+                      <a:solidFill>
+                        <a:srgbClr val="D9E2DD"/>
+                      </a:solidFill>
+                      <a:prstDash val="solid"/>
+                      <a:round/>
+                      <a:headEnd type="none" w="med" len="med"/>
+                      <a:tailEnd type="none" w="med" len="med"/>
+                    </a:lnL>
+                    <a:lnR w="6350" cap="flat" cmpd="sng" algn="ctr">
+                      <a:solidFill>
+                        <a:srgbClr val="D9E2DD"/>
+                      </a:solidFill>
+                      <a:prstDash val="solid"/>
+                      <a:round/>
+                      <a:headEnd type="none" w="med" len="med"/>
+                      <a:tailEnd type="none" w="med" len="med"/>
+                    </a:lnR>
+                    <a:lnT w="6350" cap="flat" cmpd="sng" algn="ctr">
+                      <a:solidFill>
+                        <a:srgbClr val="D9E2DD"/>
+                      </a:solidFill>
+                      <a:prstDash val="solid"/>
+                      <a:round/>
+                      <a:headEnd type="none" w="med" len="med"/>
+                      <a:tailEnd type="none" w="med" len="med"/>
+                    </a:lnT>
+                    <a:lnB w="6350" cap="flat" cmpd="sng" algn="ctr">
+                      <a:solidFill>
+                        <a:srgbClr val="D9E2DD"/>
+                      </a:solidFill>
+                      <a:prstDash val="solid"/>
+                      <a:round/>
+                      <a:headEnd type="none" w="med" len="med"/>
+                      <a:tailEnd type="none" w="med" len="med"/>
+                    </a:lnB>
+                    <a:solidFill>
+                      <a:srgbClr val="FFFFFF"/>
+                    </a:solidFill>
+                  </a:tcPr>
+                </a:tc>
+                <a:tc>
+                  <a:txBody>
+                    <a:bodyPr/>
+                    <a:lstStyle/>
+                    <a:p>
+                      <a:pPr indent="0" marL="0">
+                        <a:buNone/>
+                      </a:pPr>
+                      <a:r>
+                        <a:rPr lang="en-US" sz="1300" dirty="0">
+                          <a:solidFill>
+                            <a:srgbClr val="1D2420"/>
+                          </a:solidFill>
+                          <a:latin typeface="Calibri" pitchFamily="34" charset="0"/>
+                          <a:ea typeface="Calibri" pitchFamily="34" charset="-122"/>
+                          <a:cs typeface="Calibri" pitchFamily="34" charset="-120"/>
+                        </a:rPr>
+                        <a:t>$40K</a:t>
+                      </a:r>
+                      <a:endParaRPr lang="en-US" sz="1300" dirty="0">
+                        <a:latin typeface="Calibri" charset="0"/>
+                        <a:ea typeface="Calibri" charset="0"/>
+                        <a:cs typeface="Calibri" charset="0"/>
+                      </a:endParaRPr>
+                    </a:p>
+                  </a:txBody>
+                  <a:tcPr marL="54864" marR="54864" marT="54864" marB="54864" anchor="ctr">
+                    <a:lnL w="6350" cap="flat" cmpd="sng" algn="ctr">
+                      <a:solidFill>
+                        <a:srgbClr val="D9E2DD"/>
+                      </a:solidFill>
+                      <a:prstDash val="solid"/>
+                      <a:round/>
+                      <a:headEnd type="none" w="med" len="med"/>
+                      <a:tailEnd type="none" w="med" len="med"/>
+                    </a:lnL>
+                    <a:lnR w="6350" cap="flat" cmpd="sng" algn="ctr">
+                      <a:solidFill>
+                        <a:srgbClr val="D9E2DD"/>
+                      </a:solidFill>
+                      <a:prstDash val="solid"/>
+                      <a:round/>
+                      <a:headEnd type="none" w="med" len="med"/>
+                      <a:tailEnd type="none" w="med" len="med"/>
+                    </a:lnR>
+                    <a:lnT w="6350" cap="flat" cmpd="sng" algn="ctr">
+                      <a:solidFill>
+                        <a:srgbClr val="D9E2DD"/>
+                      </a:solidFill>
+                      <a:prstDash val="solid"/>
+                      <a:round/>
+                      <a:headEnd type="none" w="med" len="med"/>
+                      <a:tailEnd type="none" w="med" len="med"/>
+                    </a:lnT>
+                    <a:lnB w="6350" cap="flat" cmpd="sng" algn="ctr">
+                      <a:solidFill>
+                        <a:srgbClr val="D9E2DD"/>
+                      </a:solidFill>
+                      <a:prstDash val="solid"/>
+                      <a:round/>
+                      <a:headEnd type="none" w="med" len="med"/>
+                      <a:tailEnd type="none" w="med" len="med"/>
+                    </a:lnB>
+                    <a:solidFill>
+                      <a:srgbClr val="FFFFFF"/>
+                    </a:solidFill>
+                  </a:tcPr>
+                </a:tc>
+                <a:tc>
+                  <a:txBody>
+                    <a:bodyPr/>
+                    <a:lstStyle/>
+                    <a:p>
+                      <a:pPr indent="0" marL="0">
+                        <a:buNone/>
+                      </a:pPr>
+                      <a:r>
+                        <a:rPr lang="en-US" sz="1300" dirty="0">
+                          <a:solidFill>
+                            <a:srgbClr val="1D2420"/>
+                          </a:solidFill>
+                          <a:latin typeface="Calibri" pitchFamily="34" charset="0"/>
+                          <a:ea typeface="Calibri" pitchFamily="34" charset="-122"/>
+                          <a:cs typeface="Calibri" pitchFamily="34" charset="-120"/>
+                        </a:rPr>
+                        <a:t>Plataforma de Tinbet; fee de integración EUR 5.000</a:t>
+                      </a:r>
+                      <a:endParaRPr lang="en-US" sz="1300" dirty="0">
+                        <a:latin typeface="Calibri" charset="0"/>
+                        <a:ea typeface="Calibri" charset="0"/>
+                        <a:cs typeface="Calibri" charset="0"/>
+                      </a:endParaRPr>
+                    </a:p>
+                  </a:txBody>
+                  <a:tcPr marL="54864" marR="54864" marT="54864" marB="54864" anchor="ctr">
+                    <a:lnL w="6350" cap="flat" cmpd="sng" algn="ctr">
+                      <a:solidFill>
+                        <a:srgbClr val="D9E2DD"/>
+                      </a:solidFill>
+                      <a:prstDash val="solid"/>
+                      <a:round/>
+                      <a:headEnd type="none" w="med" len="med"/>
+                      <a:tailEnd type="none" w="med" len="med"/>
+                    </a:lnL>
+                    <a:lnR w="6350" cap="flat" cmpd="sng" algn="ctr">
+                      <a:solidFill>
+                        <a:srgbClr val="D9E2DD"/>
+                      </a:solidFill>
+                      <a:prstDash val="solid"/>
+                      <a:round/>
+                      <a:headEnd type="none" w="med" len="med"/>
+                      <a:tailEnd type="none" w="med" len="med"/>
+                    </a:lnR>
+                    <a:lnT w="6350" cap="flat" cmpd="sng" algn="ctr">
+                      <a:solidFill>
+                        <a:srgbClr val="D9E2DD"/>
+                      </a:solidFill>
+                      <a:prstDash val="solid"/>
+                      <a:round/>
+                      <a:headEnd type="none" w="med" len="med"/>
+                      <a:tailEnd type="none" w="med" len="med"/>
+                    </a:lnT>
+                    <a:lnB w="6350" cap="flat" cmpd="sng" algn="ctr">
+                      <a:solidFill>
+                        <a:srgbClr val="D9E2DD"/>
+                      </a:solidFill>
+                      <a:prstDash val="solid"/>
+                      <a:round/>
+                      <a:headEnd type="none" w="med" len="med"/>
+                      <a:tailEnd type="none" w="med" len="med"/>
+                    </a:lnB>
+                    <a:solidFill>
+                      <a:srgbClr val="FFFFFF"/>
+                    </a:solidFill>
+                  </a:tcPr>
+                </a:tc>
+              </a:tr>
+              <a:tr h="420624">
+                <a:tc>
+                  <a:txBody>
+                    <a:bodyPr/>
+                    <a:lstStyle/>
+                    <a:p>
+                      <a:pPr indent="0" marL="0">
+                        <a:buNone/>
+                      </a:pPr>
+                      <a:r>
+                        <a:rPr lang="en-US" sz="1300" dirty="0">
+                          <a:solidFill>
+                            <a:srgbClr val="1D2420"/>
+                          </a:solidFill>
+                          <a:latin typeface="Calibri" pitchFamily="34" charset="0"/>
+                          <a:ea typeface="Calibri" pitchFamily="34" charset="-122"/>
+                          <a:cs typeface="Calibri" pitchFamily="34" charset="-120"/>
+                        </a:rPr>
+                        <a:t>VirtualSoft</a:t>
+                      </a:r>
+                      <a:endParaRPr lang="en-US" sz="1300" dirty="0">
+                        <a:latin typeface="Calibri" charset="0"/>
+                        <a:ea typeface="Calibri" charset="0"/>
+                        <a:cs typeface="Calibri" charset="0"/>
+                      </a:endParaRPr>
+                    </a:p>
+                  </a:txBody>
+                  <a:tcPr marL="54864" marR="54864" marT="54864" marB="54864" anchor="ctr">
+                    <a:lnL w="6350" cap="flat" cmpd="sng" algn="ctr">
+                      <a:solidFill>
+                        <a:srgbClr val="D9E2DD"/>
+                      </a:solidFill>
+                      <a:prstDash val="solid"/>
+                      <a:round/>
+                      <a:headEnd type="none" w="med" len="med"/>
+                      <a:tailEnd type="none" w="med" len="med"/>
+                    </a:lnL>
+                    <a:lnR w="6350" cap="flat" cmpd="sng" algn="ctr">
+                      <a:solidFill>
+                        <a:srgbClr val="D9E2DD"/>
+                      </a:solidFill>
+                      <a:prstDash val="solid"/>
+                      <a:round/>
+                      <a:headEnd type="none" w="med" len="med"/>
+                      <a:tailEnd type="none" w="med" len="med"/>
+                    </a:lnR>
+                    <a:lnT w="6350" cap="flat" cmpd="sng" algn="ctr">
+                      <a:solidFill>
+                        <a:srgbClr val="D9E2DD"/>
+                      </a:solidFill>
+                      <a:prstDash val="solid"/>
+                      <a:round/>
+                      <a:headEnd type="none" w="med" len="med"/>
+                      <a:tailEnd type="none" w="med" len="med"/>
+                    </a:lnT>
+                    <a:lnB w="6350" cap="flat" cmpd="sng" algn="ctr">
+                      <a:solidFill>
+                        <a:srgbClr val="D9E2DD"/>
+                      </a:solidFill>
+                      <a:prstDash val="solid"/>
+                      <a:round/>
+                      <a:headEnd type="none" w="med" len="med"/>
+                      <a:tailEnd type="none" w="med" len="med"/>
+                    </a:lnB>
+                    <a:solidFill>
+                      <a:srgbClr val="FFFFFF"/>
+                    </a:solidFill>
+                  </a:tcPr>
+                </a:tc>
+                <a:tc>
+                  <a:txBody>
+                    <a:bodyPr/>
+                    <a:lstStyle/>
+                    <a:p>
+                      <a:pPr indent="0" marL="0">
+                        <a:buNone/>
+                      </a:pPr>
+                      <a:r>
+                        <a:rPr lang="en-US" sz="1300" dirty="0">
+                          <a:solidFill>
+                            <a:srgbClr val="1D2420"/>
+                          </a:solidFill>
+                          <a:latin typeface="Calibri" pitchFamily="34" charset="0"/>
+                          <a:ea typeface="Calibri" pitchFamily="34" charset="-122"/>
+                          <a:cs typeface="Calibri" pitchFamily="34" charset="-120"/>
+                        </a:rPr>
+                        <a:t>LATAM</a:t>
+                      </a:r>
+                      <a:endParaRPr lang="en-US" sz="1300" dirty="0">
+                        <a:latin typeface="Calibri" charset="0"/>
+                        <a:ea typeface="Calibri" charset="0"/>
+                        <a:cs typeface="Calibri" charset="0"/>
+                      </a:endParaRPr>
+                    </a:p>
+                  </a:txBody>
+                  <a:tcPr marL="54864" marR="54864" marT="54864" marB="54864" anchor="ctr">
+                    <a:lnL w="6350" cap="flat" cmpd="sng" algn="ctr">
+                      <a:solidFill>
+                        <a:srgbClr val="D9E2DD"/>
+                      </a:solidFill>
+                      <a:prstDash val="solid"/>
+                      <a:round/>
+                      <a:headEnd type="none" w="med" len="med"/>
+                      <a:tailEnd type="none" w="med" len="med"/>
+                    </a:lnL>
+                    <a:lnR w="6350" cap="flat" cmpd="sng" algn="ctr">
+                      <a:solidFill>
+                        <a:srgbClr val="D9E2DD"/>
+                      </a:solidFill>
+                      <a:prstDash val="solid"/>
+                      <a:round/>
+                      <a:headEnd type="none" w="med" len="med"/>
+                      <a:tailEnd type="none" w="med" len="med"/>
+                    </a:lnR>
+                    <a:lnT w="6350" cap="flat" cmpd="sng" algn="ctr">
+                      <a:solidFill>
+                        <a:srgbClr val="D9E2DD"/>
+                      </a:solidFill>
+                      <a:prstDash val="solid"/>
+                      <a:round/>
+                      <a:headEnd type="none" w="med" len="med"/>
+                      <a:tailEnd type="none" w="med" len="med"/>
+                    </a:lnT>
+                    <a:lnB w="6350" cap="flat" cmpd="sng" algn="ctr">
+                      <a:solidFill>
+                        <a:srgbClr val="D9E2DD"/>
+                      </a:solidFill>
+                      <a:prstDash val="solid"/>
+                      <a:round/>
+                      <a:headEnd type="none" w="med" len="med"/>
+                      <a:tailEnd type="none" w="med" len="med"/>
+                    </a:lnB>
+                    <a:solidFill>
+                      <a:srgbClr val="FFFFFF"/>
+                    </a:solidFill>
+                  </a:tcPr>
+                </a:tc>
+                <a:tc>
+                  <a:txBody>
+                    <a:bodyPr/>
+                    <a:lstStyle/>
+                    <a:p>
+                      <a:pPr indent="0" marL="0">
+                        <a:buNone/>
+                      </a:pPr>
+                      <a:r>
+                        <a:rPr lang="en-US" sz="1300" dirty="0">
+                          <a:solidFill>
+                            <a:srgbClr val="1D2420"/>
+                          </a:solidFill>
+                          <a:latin typeface="Calibri" pitchFamily="34" charset="0"/>
+                          <a:ea typeface="Calibri" pitchFamily="34" charset="-122"/>
+                          <a:cs typeface="Calibri" pitchFamily="34" charset="-120"/>
+                        </a:rPr>
+                        <a:t>Plataforma</a:t>
+                      </a:r>
+                      <a:endParaRPr lang="en-US" sz="1300" dirty="0">
+                        <a:latin typeface="Calibri" charset="0"/>
+                        <a:ea typeface="Calibri" charset="0"/>
+                        <a:cs typeface="Calibri" charset="0"/>
+                      </a:endParaRPr>
+                    </a:p>
+                  </a:txBody>
+                  <a:tcPr marL="54864" marR="54864" marT="54864" marB="54864" anchor="ctr">
+                    <a:lnL w="6350" cap="flat" cmpd="sng" algn="ctr">
+                      <a:solidFill>
+                        <a:srgbClr val="D9E2DD"/>
+                      </a:solidFill>
+                      <a:prstDash val="solid"/>
+                      <a:round/>
+                      <a:headEnd type="none" w="med" len="med"/>
+                      <a:tailEnd type="none" w="med" len="med"/>
+                    </a:lnL>
+                    <a:lnR w="6350" cap="flat" cmpd="sng" algn="ctr">
+                      <a:solidFill>
+                        <a:srgbClr val="D9E2DD"/>
+                      </a:solidFill>
+                      <a:prstDash val="solid"/>
+                      <a:round/>
+                      <a:headEnd type="none" w="med" len="med"/>
+                      <a:tailEnd type="none" w="med" len="med"/>
+                    </a:lnR>
+                    <a:lnT w="6350" cap="flat" cmpd="sng" algn="ctr">
+                      <a:solidFill>
+                        <a:srgbClr val="D9E2DD"/>
+                      </a:solidFill>
+                      <a:prstDash val="solid"/>
+                      <a:round/>
+                      <a:headEnd type="none" w="med" len="med"/>
+                      <a:tailEnd type="none" w="med" len="med"/>
+                    </a:lnT>
+                    <a:lnB w="6350" cap="flat" cmpd="sng" algn="ctr">
+                      <a:solidFill>
+                        <a:srgbClr val="D9E2DD"/>
+                      </a:solidFill>
+                      <a:prstDash val="solid"/>
+                      <a:round/>
+                      <a:headEnd type="none" w="med" len="med"/>
+                      <a:tailEnd type="none" w="med" len="med"/>
+                    </a:lnB>
+                    <a:solidFill>
+                      <a:srgbClr val="FFFFFF"/>
+                    </a:solidFill>
+                  </a:tcPr>
+                </a:tc>
+                <a:tc>
+                  <a:txBody>
+                    <a:bodyPr/>
+                    <a:lstStyle/>
+                    <a:p>
+                      <a:pPr indent="0" marL="0">
+                        <a:buNone/>
+                      </a:pPr>
+                      <a:r>
+                        <a:rPr lang="en-US" sz="1300" dirty="0">
+                          <a:solidFill>
+                            <a:srgbClr val="1D2420"/>
+                          </a:solidFill>
+                          <a:latin typeface="Calibri" pitchFamily="34" charset="0"/>
+                          <a:ea typeface="Calibri" pitchFamily="34" charset="-122"/>
+                          <a:cs typeface="Calibri" pitchFamily="34" charset="-120"/>
+                        </a:rPr>
+                        <a:t>$40K</a:t>
+                      </a:r>
+                      <a:endParaRPr lang="en-US" sz="1300" dirty="0">
+                        <a:latin typeface="Calibri" charset="0"/>
+                        <a:ea typeface="Calibri" charset="0"/>
+                        <a:cs typeface="Calibri" charset="0"/>
+                      </a:endParaRPr>
+                    </a:p>
+                  </a:txBody>
+                  <a:tcPr marL="54864" marR="54864" marT="54864" marB="54864" anchor="ctr">
+                    <a:lnL w="6350" cap="flat" cmpd="sng" algn="ctr">
+                      <a:solidFill>
+                        <a:srgbClr val="D9E2DD"/>
+                      </a:solidFill>
+                      <a:prstDash val="solid"/>
+                      <a:round/>
+                      <a:headEnd type="none" w="med" len="med"/>
+                      <a:tailEnd type="none" w="med" len="med"/>
+                    </a:lnL>
+                    <a:lnR w="6350" cap="flat" cmpd="sng" algn="ctr">
+                      <a:solidFill>
+                        <a:srgbClr val="D9E2DD"/>
+                      </a:solidFill>
+                      <a:prstDash val="solid"/>
+                      <a:round/>
+                      <a:headEnd type="none" w="med" len="med"/>
+                      <a:tailEnd type="none" w="med" len="med"/>
+                    </a:lnR>
+                    <a:lnT w="6350" cap="flat" cmpd="sng" algn="ctr">
+                      <a:solidFill>
+                        <a:srgbClr val="D9E2DD"/>
+                      </a:solidFill>
+                      <a:prstDash val="solid"/>
+                      <a:round/>
+                      <a:headEnd type="none" w="med" len="med"/>
+                      <a:tailEnd type="none" w="med" len="med"/>
+                    </a:lnT>
+                    <a:lnB w="6350" cap="flat" cmpd="sng" algn="ctr">
+                      <a:solidFill>
+                        <a:srgbClr val="D9E2DD"/>
+                      </a:solidFill>
+                      <a:prstDash val="solid"/>
+                      <a:round/>
+                      <a:headEnd type="none" w="med" len="med"/>
+                      <a:tailEnd type="none" w="med" len="med"/>
+                    </a:lnB>
+                    <a:solidFill>
+                      <a:srgbClr val="FFFFFF"/>
+                    </a:solidFill>
+                  </a:tcPr>
+                </a:tc>
+                <a:tc>
+                  <a:txBody>
+                    <a:bodyPr/>
+                    <a:lstStyle/>
+                    <a:p>
+                      <a:pPr indent="0" marL="0">
+                        <a:buNone/>
+                      </a:pPr>
+                      <a:r>
+                        <a:rPr lang="en-US" sz="1300" dirty="0">
+                          <a:solidFill>
+                            <a:srgbClr val="1D2420"/>
+                          </a:solidFill>
+                          <a:latin typeface="Calibri" pitchFamily="34" charset="0"/>
+                          <a:ea typeface="Calibri" pitchFamily="34" charset="-122"/>
+                          <a:cs typeface="Calibri" pitchFamily="34" charset="-120"/>
+                        </a:rPr>
+                        <a:t>Ruleta personalizada por posicionamiento; sin setup ni OPEX</a:t>
+                      </a:r>
+                      <a:endParaRPr lang="en-US" sz="1300" dirty="0">
+                        <a:latin typeface="Calibri" charset="0"/>
+                        <a:ea typeface="Calibri" charset="0"/>
+                        <a:cs typeface="Calibri" charset="0"/>
+                      </a:endParaRPr>
+                    </a:p>
+                  </a:txBody>
+                  <a:tcPr marL="54864" marR="54864" marT="54864" marB="54864" anchor="ctr">
+                    <a:lnL w="6350" cap="flat" cmpd="sng" algn="ctr">
+                      <a:solidFill>
+                        <a:srgbClr val="D9E2DD"/>
+                      </a:solidFill>
+                      <a:prstDash val="solid"/>
+                      <a:round/>
+                      <a:headEnd type="none" w="med" len="med"/>
+                      <a:tailEnd type="none" w="med" len="med"/>
+                    </a:lnL>
+                    <a:lnR w="6350" cap="flat" cmpd="sng" algn="ctr">
+                      <a:solidFill>
+                        <a:srgbClr val="D9E2DD"/>
+                      </a:solidFill>
+                      <a:prstDash val="solid"/>
+                      <a:round/>
+                      <a:headEnd type="none" w="med" len="med"/>
+                      <a:tailEnd type="none" w="med" len="med"/>
+                    </a:lnR>
+                    <a:lnT w="6350" cap="flat" cmpd="sng" algn="ctr">
+                      <a:solidFill>
+                        <a:srgbClr val="D9E2DD"/>
+                      </a:solidFill>
+                      <a:prstDash val="solid"/>
+                      <a:round/>
+                      <a:headEnd type="none" w="med" len="med"/>
+                      <a:tailEnd type="none" w="med" len="med"/>
+                    </a:lnT>
+                    <a:lnB w="6350" cap="flat" cmpd="sng" algn="ctr">
+                      <a:solidFill>
+                        <a:srgbClr val="D9E2DD"/>
+                      </a:solidFill>
+                      <a:prstDash val="solid"/>
+                      <a:round/>
+                      <a:headEnd type="none" w="med" len="med"/>
+                      <a:tailEnd type="none" w="med" len="med"/>
+                    </a:lnB>
+                    <a:solidFill>
+                      <a:srgbClr val="FFFFFF"/>
+                    </a:solidFill>
+                  </a:tcPr>
+                </a:tc>
+              </a:tr>
+              <a:tr h="420624">
+                <a:tc>
+                  <a:txBody>
+                    <a:bodyPr/>
+                    <a:lstStyle/>
+                    <a:p>
+                      <a:pPr indent="0" marL="0">
+                        <a:buNone/>
+                      </a:pPr>
+                      <a:r>
+                        <a:rPr lang="en-US" sz="1300" dirty="0">
+                          <a:solidFill>
+                            <a:srgbClr val="1D2420"/>
+                          </a:solidFill>
+                          <a:latin typeface="Calibri" pitchFamily="34" charset="0"/>
+                          <a:ea typeface="Calibri" pitchFamily="34" charset="-122"/>
+                          <a:cs typeface="Calibri" pitchFamily="34" charset="-120"/>
+                        </a:rPr>
+                        <a:t>Olimpobet</a:t>
+                      </a:r>
+                      <a:endParaRPr lang="en-US" sz="1300" dirty="0">
+                        <a:latin typeface="Calibri" charset="0"/>
+                        <a:ea typeface="Calibri" charset="0"/>
+                        <a:cs typeface="Calibri" charset="0"/>
+                      </a:endParaRPr>
+                    </a:p>
+                  </a:txBody>
+                  <a:tcPr marL="54864" marR="54864" marT="54864" marB="54864" anchor="ctr">
+                    <a:lnL w="6350" cap="flat" cmpd="sng" algn="ctr">
+                      <a:solidFill>
+                        <a:srgbClr val="D9E2DD"/>
+                      </a:solidFill>
+                      <a:prstDash val="solid"/>
+                      <a:round/>
+                      <a:headEnd type="none" w="med" len="med"/>
+                      <a:tailEnd type="none" w="med" len="med"/>
+                    </a:lnL>
+                    <a:lnR w="6350" cap="flat" cmpd="sng" algn="ctr">
+                      <a:solidFill>
+                        <a:srgbClr val="D9E2DD"/>
+                      </a:solidFill>
+                      <a:prstDash val="solid"/>
+                      <a:round/>
+                      <a:headEnd type="none" w="med" len="med"/>
+                      <a:tailEnd type="none" w="med" len="med"/>
+                    </a:lnR>
+                    <a:lnT w="6350" cap="flat" cmpd="sng" algn="ctr">
+                      <a:solidFill>
+                        <a:srgbClr val="D9E2DD"/>
+                      </a:solidFill>
+                      <a:prstDash val="solid"/>
+                      <a:round/>
+                      <a:headEnd type="none" w="med" len="med"/>
+                      <a:tailEnd type="none" w="med" len="med"/>
+                    </a:lnT>
+                    <a:lnB w="6350" cap="flat" cmpd="sng" algn="ctr">
+                      <a:solidFill>
+                        <a:srgbClr val="D9E2DD"/>
+                      </a:solidFill>
+                      <a:prstDash val="solid"/>
+                      <a:round/>
+                      <a:headEnd type="none" w="med" len="med"/>
+                      <a:tailEnd type="none" w="med" len="med"/>
+                    </a:lnB>
+                    <a:solidFill>
+                      <a:srgbClr val="FFFFFF"/>
+                    </a:solidFill>
+                  </a:tcPr>
+                </a:tc>
+                <a:tc>
+                  <a:txBody>
+                    <a:bodyPr/>
+                    <a:lstStyle/>
+                    <a:p>
+                      <a:pPr indent="0" marL="0">
+                        <a:buNone/>
+                      </a:pPr>
+                      <a:r>
+                        <a:rPr lang="en-US" sz="1300" dirty="0">
+                          <a:solidFill>
+                            <a:srgbClr val="1D2420"/>
+                          </a:solidFill>
+                          <a:latin typeface="Calibri" pitchFamily="34" charset="0"/>
+                          <a:ea typeface="Calibri" pitchFamily="34" charset="-122"/>
+                          <a:cs typeface="Calibri" pitchFamily="34" charset="-120"/>
+                        </a:rPr>
+                        <a:t>Por confirmar</a:t>
+                      </a:r>
+                      <a:endParaRPr lang="en-US" sz="1300" dirty="0">
+                        <a:latin typeface="Calibri" charset="0"/>
+                        <a:ea typeface="Calibri" charset="0"/>
+                        <a:cs typeface="Calibri" charset="0"/>
+                      </a:endParaRPr>
+                    </a:p>
+                  </a:txBody>
+                  <a:tcPr marL="54864" marR="54864" marT="54864" marB="54864" anchor="ctr">
+                    <a:lnL w="6350" cap="flat" cmpd="sng" algn="ctr">
+                      <a:solidFill>
+                        <a:srgbClr val="D9E2DD"/>
+                      </a:solidFill>
+                      <a:prstDash val="solid"/>
+                      <a:round/>
+                      <a:headEnd type="none" w="med" len="med"/>
+                      <a:tailEnd type="none" w="med" len="med"/>
+                    </a:lnL>
+                    <a:lnR w="6350" cap="flat" cmpd="sng" algn="ctr">
+                      <a:solidFill>
+                        <a:srgbClr val="D9E2DD"/>
+                      </a:solidFill>
+                      <a:prstDash val="solid"/>
+                      <a:round/>
+                      <a:headEnd type="none" w="med" len="med"/>
+                      <a:tailEnd type="none" w="med" len="med"/>
+                    </a:lnR>
+                    <a:lnT w="6350" cap="flat" cmpd="sng" algn="ctr">
+                      <a:solidFill>
+                        <a:srgbClr val="D9E2DD"/>
+                      </a:solidFill>
+                      <a:prstDash val="solid"/>
+                      <a:round/>
+                      <a:headEnd type="none" w="med" len="med"/>
+                      <a:tailEnd type="none" w="med" len="med"/>
+                    </a:lnT>
+                    <a:lnB w="6350" cap="flat" cmpd="sng" algn="ctr">
+                      <a:solidFill>
+                        <a:srgbClr val="D9E2DD"/>
+                      </a:solidFill>
+                      <a:prstDash val="solid"/>
+                      <a:round/>
+                      <a:headEnd type="none" w="med" len="med"/>
+                      <a:tailEnd type="none" w="med" len="med"/>
+                    </a:lnB>
+                    <a:solidFill>
+                      <a:srgbClr val="FFFFFF"/>
+                    </a:solidFill>
+                  </a:tcPr>
+                </a:tc>
+                <a:tc>
+                  <a:txBody>
+                    <a:bodyPr/>
+                    <a:lstStyle/>
+                    <a:p>
+                      <a:pPr indent="0" marL="0">
+                        <a:buNone/>
+                      </a:pPr>
+                      <a:r>
+                        <a:rPr lang="en-US" sz="1300" dirty="0">
+                          <a:solidFill>
+                            <a:srgbClr val="1D2420"/>
+                          </a:solidFill>
+                          <a:latin typeface="Calibri" pitchFamily="34" charset="0"/>
+                          <a:ea typeface="Calibri" pitchFamily="34" charset="-122"/>
+                          <a:cs typeface="Calibri" pitchFamily="34" charset="-120"/>
+                        </a:rPr>
+                        <a:t>Nuevo logo</a:t>
+                      </a:r>
+                      <a:endParaRPr lang="en-US" sz="1300" dirty="0">
+                        <a:latin typeface="Calibri" charset="0"/>
+                        <a:ea typeface="Calibri" charset="0"/>
+                        <a:cs typeface="Calibri" charset="0"/>
+                      </a:endParaRPr>
+                    </a:p>
+                  </a:txBody>
+                  <a:tcPr marL="54864" marR="54864" marT="54864" marB="54864" anchor="ctr">
+                    <a:lnL w="6350" cap="flat" cmpd="sng" algn="ctr">
+                      <a:solidFill>
+                        <a:srgbClr val="D9E2DD"/>
+                      </a:solidFill>
+                      <a:prstDash val="solid"/>
+                      <a:round/>
+                      <a:headEnd type="none" w="med" len="med"/>
+                      <a:tailEnd type="none" w="med" len="med"/>
+                    </a:lnL>
+                    <a:lnR w="6350" cap="flat" cmpd="sng" algn="ctr">
+                      <a:solidFill>
+                        <a:srgbClr val="D9E2DD"/>
+                      </a:solidFill>
+                      <a:prstDash val="solid"/>
+                      <a:round/>
+                      <a:headEnd type="none" w="med" len="med"/>
+                      <a:tailEnd type="none" w="med" len="med"/>
+                    </a:lnR>
+                    <a:lnT w="6350" cap="flat" cmpd="sng" algn="ctr">
+                      <a:solidFill>
+                        <a:srgbClr val="D9E2DD"/>
+                      </a:solidFill>
+                      <a:prstDash val="solid"/>
+                      <a:round/>
+                      <a:headEnd type="none" w="med" len="med"/>
+                      <a:tailEnd type="none" w="med" len="med"/>
+                    </a:lnT>
+                    <a:lnB w="6350" cap="flat" cmpd="sng" algn="ctr">
+                      <a:solidFill>
+                        <a:srgbClr val="D9E2DD"/>
+                      </a:solidFill>
+                      <a:prstDash val="solid"/>
+                      <a:round/>
+                      <a:headEnd type="none" w="med" len="med"/>
+                      <a:tailEnd type="none" w="med" len="med"/>
+                    </a:lnB>
+                    <a:solidFill>
+                      <a:srgbClr val="FFFFFF"/>
+                    </a:solidFill>
+                  </a:tcPr>
+                </a:tc>
+                <a:tc>
+                  <a:txBody>
+                    <a:bodyPr/>
+                    <a:lstStyle/>
+                    <a:p>
+                      <a:pPr indent="0" marL="0">
+                        <a:buNone/>
+                      </a:pPr>
+                      <a:r>
+                        <a:rPr lang="en-US" sz="1300" dirty="0">
+                          <a:solidFill>
+                            <a:srgbClr val="1D2420"/>
+                          </a:solidFill>
+                          <a:latin typeface="Calibri" pitchFamily="34" charset="0"/>
+                          <a:ea typeface="Calibri" pitchFamily="34" charset="-122"/>
+                          <a:cs typeface="Calibri" pitchFamily="34" charset="-120"/>
+                        </a:rPr>
+                        <a:t>$35K</a:t>
+                      </a:r>
+                      <a:endParaRPr lang="en-US" sz="1300" dirty="0">
+                        <a:latin typeface="Calibri" charset="0"/>
+                        <a:ea typeface="Calibri" charset="0"/>
+                        <a:cs typeface="Calibri" charset="0"/>
+                      </a:endParaRPr>
+                    </a:p>
+                  </a:txBody>
+                  <a:tcPr marL="54864" marR="54864" marT="54864" marB="54864" anchor="ctr">
+                    <a:lnL w="6350" cap="flat" cmpd="sng" algn="ctr">
+                      <a:solidFill>
+                        <a:srgbClr val="D9E2DD"/>
+                      </a:solidFill>
+                      <a:prstDash val="solid"/>
+                      <a:round/>
+                      <a:headEnd type="none" w="med" len="med"/>
+                      <a:tailEnd type="none" w="med" len="med"/>
+                    </a:lnL>
+                    <a:lnR w="6350" cap="flat" cmpd="sng" algn="ctr">
+                      <a:solidFill>
+                        <a:srgbClr val="D9E2DD"/>
+                      </a:solidFill>
+                      <a:prstDash val="solid"/>
+                      <a:round/>
+                      <a:headEnd type="none" w="med" len="med"/>
+                      <a:tailEnd type="none" w="med" len="med"/>
+                    </a:lnR>
+                    <a:lnT w="6350" cap="flat" cmpd="sng" algn="ctr">
+                      <a:solidFill>
+                        <a:srgbClr val="D9E2DD"/>
+                      </a:solidFill>
+                      <a:prstDash val="solid"/>
+                      <a:round/>
+                      <a:headEnd type="none" w="med" len="med"/>
+                      <a:tailEnd type="none" w="med" len="med"/>
+                    </a:lnT>
+                    <a:lnB w="6350" cap="flat" cmpd="sng" algn="ctr">
+                      <a:solidFill>
+                        <a:srgbClr val="D9E2DD"/>
+                      </a:solidFill>
+                      <a:prstDash val="solid"/>
+                      <a:round/>
+                      <a:headEnd type="none" w="med" len="med"/>
+                      <a:tailEnd type="none" w="med" len="med"/>
+                    </a:lnB>
+                    <a:solidFill>
+                      <a:srgbClr val="FFFFFF"/>
+                    </a:solidFill>
+                  </a:tcPr>
+                </a:tc>
+                <a:tc>
+                  <a:txBody>
+                    <a:bodyPr/>
+                    <a:lstStyle/>
+                    <a:p>
+                      <a:pPr indent="0" marL="0">
+                        <a:buNone/>
+                      </a:pPr>
+                      <a:r>
+                        <a:rPr lang="en-US" sz="1300" dirty="0">
+                          <a:solidFill>
+                            <a:srgbClr val="1D2420"/>
+                          </a:solidFill>
+                          <a:latin typeface="Calibri" pitchFamily="34" charset="0"/>
+                          <a:ea typeface="Calibri" pitchFamily="34" charset="-122"/>
+                          <a:cs typeface="Calibri" pitchFamily="34" charset="-120"/>
+                        </a:rPr>
+                        <a:t>Ruleta personalizada multi-marca; CAPEX parcial del cliente</a:t>
+                      </a:r>
+                      <a:endParaRPr lang="en-US" sz="1300" dirty="0">
+                        <a:latin typeface="Calibri" charset="0"/>
+                        <a:ea typeface="Calibri" charset="0"/>
+                        <a:cs typeface="Calibri" charset="0"/>
+                      </a:endParaRPr>
+                    </a:p>
+                  </a:txBody>
+                  <a:tcPr marL="54864" marR="54864" marT="54864" marB="54864" anchor="ctr">
+                    <a:lnL w="6350" cap="flat" cmpd="sng" algn="ctr">
+                      <a:solidFill>
+                        <a:srgbClr val="D9E2DD"/>
+                      </a:solidFill>
+                      <a:prstDash val="solid"/>
+                      <a:round/>
+                      <a:headEnd type="none" w="med" len="med"/>
+                      <a:tailEnd type="none" w="med" len="med"/>
+                    </a:lnL>
+                    <a:lnR w="6350" cap="flat" cmpd="sng" algn="ctr">
+                      <a:solidFill>
+                        <a:srgbClr val="D9E2DD"/>
+                      </a:solidFill>
+                      <a:prstDash val="solid"/>
+                      <a:round/>
+                      <a:headEnd type="none" w="med" len="med"/>
+                      <a:tailEnd type="none" w="med" len="med"/>
+                    </a:lnR>
+                    <a:lnT w="6350" cap="flat" cmpd="sng" algn="ctr">
+                      <a:solidFill>
+                        <a:srgbClr val="D9E2DD"/>
+                      </a:solidFill>
+                      <a:prstDash val="solid"/>
+                      <a:round/>
+                      <a:headEnd type="none" w="med" len="med"/>
+                      <a:tailEnd type="none" w="med" len="med"/>
+                    </a:lnT>
+                    <a:lnB w="6350" cap="flat" cmpd="sng" algn="ctr">
+                      <a:solidFill>
+                        <a:srgbClr val="D9E2DD"/>
+                      </a:solidFill>
+                      <a:prstDash val="solid"/>
+                      <a:round/>
+                      <a:headEnd type="none" w="med" len="med"/>
+                      <a:tailEnd type="none" w="med" len="med"/>
+                    </a:lnB>
+                    <a:solidFill>
+                      <a:srgbClr val="FFFFFF"/>
+                    </a:solidFill>
+                  </a:tcPr>
+                </a:tc>
+              </a:tr>
+              <a:tr h="420624">
+                <a:tc>
+                  <a:txBody>
+                    <a:bodyPr/>
+                    <a:lstStyle/>
+                    <a:p>
+                      <a:pPr indent="0" marL="0">
+                        <a:buNone/>
+                      </a:pPr>
+                      <a:r>
+                        <a:rPr lang="en-US" sz="1300" dirty="0">
+                          <a:solidFill>
+                            <a:srgbClr val="1D2420"/>
+                          </a:solidFill>
+                          <a:latin typeface="Calibri" pitchFamily="34" charset="0"/>
+                          <a:ea typeface="Calibri" pitchFamily="34" charset="-122"/>
+                          <a:cs typeface="Calibri" pitchFamily="34" charset="-120"/>
+                        </a:rPr>
+                        <a:t>GameMedia / Betzar</a:t>
+                      </a:r>
+                      <a:endParaRPr lang="en-US" sz="1300" dirty="0">
+                        <a:latin typeface="Calibri" charset="0"/>
+                        <a:ea typeface="Calibri" charset="0"/>
+                        <a:cs typeface="Calibri" charset="0"/>
+                      </a:endParaRPr>
+                    </a:p>
+                  </a:txBody>
+                  <a:tcPr marL="54864" marR="54864" marT="54864" marB="54864" anchor="ctr">
+                    <a:lnL w="6350" cap="flat" cmpd="sng" algn="ctr">
+                      <a:solidFill>
+                        <a:srgbClr val="D9E2DD"/>
+                      </a:solidFill>
+                      <a:prstDash val="solid"/>
+                      <a:round/>
+                      <a:headEnd type="none" w="med" len="med"/>
+                      <a:tailEnd type="none" w="med" len="med"/>
+                    </a:lnL>
+                    <a:lnR w="6350" cap="flat" cmpd="sng" algn="ctr">
+                      <a:solidFill>
+                        <a:srgbClr val="D9E2DD"/>
+                      </a:solidFill>
+                      <a:prstDash val="solid"/>
+                      <a:round/>
+                      <a:headEnd type="none" w="med" len="med"/>
+                      <a:tailEnd type="none" w="med" len="med"/>
+                    </a:lnR>
+                    <a:lnT w="6350" cap="flat" cmpd="sng" algn="ctr">
+                      <a:solidFill>
+                        <a:srgbClr val="D9E2DD"/>
+                      </a:solidFill>
+                      <a:prstDash val="solid"/>
+                      <a:round/>
+                      <a:headEnd type="none" w="med" len="med"/>
+                      <a:tailEnd type="none" w="med" len="med"/>
+                    </a:lnT>
+                    <a:lnB w="6350" cap="flat" cmpd="sng" algn="ctr">
+                      <a:solidFill>
+                        <a:srgbClr val="D9E2DD"/>
+                      </a:solidFill>
+                      <a:prstDash val="solid"/>
+                      <a:round/>
+                      <a:headEnd type="none" w="med" len="med"/>
+                      <a:tailEnd type="none" w="med" len="med"/>
+                    </a:lnB>
+                    <a:solidFill>
+                      <a:srgbClr val="FFFFFF"/>
+                    </a:solidFill>
+                  </a:tcPr>
+                </a:tc>
+                <a:tc>
+                  <a:txBody>
+                    <a:bodyPr/>
+                    <a:lstStyle/>
+                    <a:p>
+                      <a:pPr indent="0" marL="0">
+                        <a:buNone/>
+                      </a:pPr>
+                      <a:r>
+                        <a:rPr lang="en-US" sz="1300" dirty="0">
+                          <a:solidFill>
+                            <a:srgbClr val="1D2420"/>
+                          </a:solidFill>
+                          <a:latin typeface="Calibri" pitchFamily="34" charset="0"/>
+                          <a:ea typeface="Calibri" pitchFamily="34" charset="-122"/>
+                          <a:cs typeface="Calibri" pitchFamily="34" charset="-120"/>
+                        </a:rPr>
+                        <a:t>Perú</a:t>
+                      </a:r>
+                      <a:endParaRPr lang="en-US" sz="1300" dirty="0">
+                        <a:latin typeface="Calibri" charset="0"/>
+                        <a:ea typeface="Calibri" charset="0"/>
+                        <a:cs typeface="Calibri" charset="0"/>
+                      </a:endParaRPr>
+                    </a:p>
+                  </a:txBody>
+                  <a:tcPr marL="54864" marR="54864" marT="54864" marB="54864" anchor="ctr">
+                    <a:lnL w="6350" cap="flat" cmpd="sng" algn="ctr">
+                      <a:solidFill>
+                        <a:srgbClr val="D9E2DD"/>
+                      </a:solidFill>
+                      <a:prstDash val="solid"/>
+                      <a:round/>
+                      <a:headEnd type="none" w="med" len="med"/>
+                      <a:tailEnd type="none" w="med" len="med"/>
+                    </a:lnL>
+                    <a:lnR w="6350" cap="flat" cmpd="sng" algn="ctr">
+                      <a:solidFill>
+                        <a:srgbClr val="D9E2DD"/>
+                      </a:solidFill>
+                      <a:prstDash val="solid"/>
+                      <a:round/>
+                      <a:headEnd type="none" w="med" len="med"/>
+                      <a:tailEnd type="none" w="med" len="med"/>
+                    </a:lnR>
+                    <a:lnT w="6350" cap="flat" cmpd="sng" algn="ctr">
+                      <a:solidFill>
+                        <a:srgbClr val="D9E2DD"/>
+                      </a:solidFill>
+                      <a:prstDash val="solid"/>
+                      <a:round/>
+                      <a:headEnd type="none" w="med" len="med"/>
+                      <a:tailEnd type="none" w="med" len="med"/>
+                    </a:lnT>
+                    <a:lnB w="6350" cap="flat" cmpd="sng" algn="ctr">
+                      <a:solidFill>
+                        <a:srgbClr val="D9E2DD"/>
+                      </a:solidFill>
+                      <a:prstDash val="solid"/>
+                      <a:round/>
+                      <a:headEnd type="none" w="med" len="med"/>
+                      <a:tailEnd type="none" w="med" len="med"/>
+                    </a:lnB>
+                    <a:solidFill>
+                      <a:srgbClr val="FFFFFF"/>
+                    </a:solidFill>
+                  </a:tcPr>
+                </a:tc>
+                <a:tc>
+                  <a:txBody>
+                    <a:bodyPr/>
+                    <a:lstStyle/>
+                    <a:p>
+                      <a:pPr indent="0" marL="0">
+                        <a:buNone/>
+                      </a:pPr>
+                      <a:r>
+                        <a:rPr lang="en-US" sz="1300" dirty="0">
+                          <a:solidFill>
+                            <a:srgbClr val="1D2420"/>
+                          </a:solidFill>
+                          <a:latin typeface="Calibri" pitchFamily="34" charset="0"/>
+                          <a:ea typeface="Calibri" pitchFamily="34" charset="-122"/>
+                          <a:cs typeface="Calibri" pitchFamily="34" charset="-120"/>
+                        </a:rPr>
+                        <a:t>Nuevo logo</a:t>
+                      </a:r>
+                      <a:endParaRPr lang="en-US" sz="1300" dirty="0">
+                        <a:latin typeface="Calibri" charset="0"/>
+                        <a:ea typeface="Calibri" charset="0"/>
+                        <a:cs typeface="Calibri" charset="0"/>
+                      </a:endParaRPr>
+                    </a:p>
+                  </a:txBody>
+                  <a:tcPr marL="54864" marR="54864" marT="54864" marB="54864" anchor="ctr">
+                    <a:lnL w="6350" cap="flat" cmpd="sng" algn="ctr">
+                      <a:solidFill>
+                        <a:srgbClr val="D9E2DD"/>
+                      </a:solidFill>
+                      <a:prstDash val="solid"/>
+                      <a:round/>
+                      <a:headEnd type="none" w="med" len="med"/>
+                      <a:tailEnd type="none" w="med" len="med"/>
+                    </a:lnL>
+                    <a:lnR w="6350" cap="flat" cmpd="sng" algn="ctr">
+                      <a:solidFill>
+                        <a:srgbClr val="D9E2DD"/>
+                      </a:solidFill>
+                      <a:prstDash val="solid"/>
+                      <a:round/>
+                      <a:headEnd type="none" w="med" len="med"/>
+                      <a:tailEnd type="none" w="med" len="med"/>
+                    </a:lnR>
+                    <a:lnT w="6350" cap="flat" cmpd="sng" algn="ctr">
+                      <a:solidFill>
+                        <a:srgbClr val="D9E2DD"/>
+                      </a:solidFill>
+                      <a:prstDash val="solid"/>
+                      <a:round/>
+                      <a:headEnd type="none" w="med" len="med"/>
+                      <a:tailEnd type="none" w="med" len="med"/>
+                    </a:lnT>
+                    <a:lnB w="6350" cap="flat" cmpd="sng" algn="ctr">
+                      <a:solidFill>
+                        <a:srgbClr val="D9E2DD"/>
+                      </a:solidFill>
+                      <a:prstDash val="solid"/>
+                      <a:round/>
+                      <a:headEnd type="none" w="med" len="med"/>
+                      <a:tailEnd type="none" w="med" len="med"/>
+                    </a:lnB>
+                    <a:solidFill>
+                      <a:srgbClr val="FFFFFF"/>
+                    </a:solidFill>
+                  </a:tcPr>
+                </a:tc>
+                <a:tc>
+                  <a:txBody>
+                    <a:bodyPr/>
+                    <a:lstStyle/>
+                    <a:p>
+                      <a:pPr indent="0" marL="0">
+                        <a:buNone/>
+                      </a:pPr>
+                      <a:r>
+                        <a:rPr lang="en-US" sz="1300" dirty="0">
+                          <a:solidFill>
+                            <a:srgbClr val="1D2420"/>
+                          </a:solidFill>
+                          <a:latin typeface="Calibri" pitchFamily="34" charset="0"/>
+                          <a:ea typeface="Calibri" pitchFamily="34" charset="-122"/>
+                          <a:cs typeface="Calibri" pitchFamily="34" charset="-120"/>
+                        </a:rPr>
+                        <a:t>$35K</a:t>
+                      </a:r>
+                      <a:endParaRPr lang="en-US" sz="1300" dirty="0">
+                        <a:latin typeface="Calibri" charset="0"/>
+                        <a:ea typeface="Calibri" charset="0"/>
+                        <a:cs typeface="Calibri" charset="0"/>
+                      </a:endParaRPr>
+                    </a:p>
+                  </a:txBody>
+                  <a:tcPr marL="54864" marR="54864" marT="54864" marB="54864" anchor="ctr">
+                    <a:lnL w="6350" cap="flat" cmpd="sng" algn="ctr">
+                      <a:solidFill>
+                        <a:srgbClr val="D9E2DD"/>
+                      </a:solidFill>
+                      <a:prstDash val="solid"/>
+                      <a:round/>
+                      <a:headEnd type="none" w="med" len="med"/>
+                      <a:tailEnd type="none" w="med" len="med"/>
+                    </a:lnL>
+                    <a:lnR w="6350" cap="flat" cmpd="sng" algn="ctr">
+                      <a:solidFill>
+                        <a:srgbClr val="D9E2DD"/>
+                      </a:solidFill>
+                      <a:prstDash val="solid"/>
+                      <a:round/>
+                      <a:headEnd type="none" w="med" len="med"/>
+                      <a:tailEnd type="none" w="med" len="med"/>
+                    </a:lnR>
+                    <a:lnT w="6350" cap="flat" cmpd="sng" algn="ctr">
+                      <a:solidFill>
+                        <a:srgbClr val="D9E2DD"/>
+                      </a:solidFill>
+                      <a:prstDash val="solid"/>
+                      <a:round/>
+                      <a:headEnd type="none" w="med" len="med"/>
+                      <a:tailEnd type="none" w="med" len="med"/>
+                    </a:lnT>
+                    <a:lnB w="6350" cap="flat" cmpd="sng" algn="ctr">
+                      <a:solidFill>
+                        <a:srgbClr val="D9E2DD"/>
+                      </a:solidFill>
+                      <a:prstDash val="solid"/>
+                      <a:round/>
+                      <a:headEnd type="none" w="med" len="med"/>
+                      <a:tailEnd type="none" w="med" len="med"/>
+                    </a:lnB>
+                    <a:solidFill>
+                      <a:srgbClr val="FFFFFF"/>
+                    </a:solidFill>
+                  </a:tcPr>
+                </a:tc>
+                <a:tc>
+                  <a:txBody>
+                    <a:bodyPr/>
+                    <a:lstStyle/>
+                    <a:p>
+                      <a:pPr indent="0" marL="0">
+                        <a:buNone/>
+                      </a:pPr>
+                      <a:r>
+                        <a:rPr lang="en-US" sz="1300" dirty="0">
+                          <a:solidFill>
+                            <a:srgbClr val="1D2420"/>
+                          </a:solidFill>
+                          <a:latin typeface="Calibri" pitchFamily="34" charset="0"/>
+                          <a:ea typeface="Calibri" pitchFamily="34" charset="-122"/>
+                          <a:cs typeface="Calibri" pitchFamily="34" charset="-120"/>
+                        </a:rPr>
+                        <a:t>Exclusividad Live a cambio de sin setup ni mínimo 12 meses</a:t>
+                      </a:r>
+                      <a:endParaRPr lang="en-US" sz="1300" dirty="0">
+                        <a:latin typeface="Calibri" charset="0"/>
+                        <a:ea typeface="Calibri" charset="0"/>
+                        <a:cs typeface="Calibri" charset="0"/>
+                      </a:endParaRPr>
+                    </a:p>
+                  </a:txBody>
+                  <a:tcPr marL="54864" marR="54864" marT="54864" marB="54864" anchor="ctr">
+                    <a:lnL w="6350" cap="flat" cmpd="sng" algn="ctr">
+                      <a:solidFill>
+                        <a:srgbClr val="D9E2DD"/>
+                      </a:solidFill>
+                      <a:prstDash val="solid"/>
+                      <a:round/>
+                      <a:headEnd type="none" w="med" len="med"/>
+                      <a:tailEnd type="none" w="med" len="med"/>
+                    </a:lnL>
+                    <a:lnR w="6350" cap="flat" cmpd="sng" algn="ctr">
+                      <a:solidFill>
+                        <a:srgbClr val="D9E2DD"/>
+                      </a:solidFill>
+                      <a:prstDash val="solid"/>
+                      <a:round/>
+                      <a:headEnd type="none" w="med" len="med"/>
+                      <a:tailEnd type="none" w="med" len="med"/>
+                    </a:lnR>
+                    <a:lnT w="6350" cap="flat" cmpd="sng" algn="ctr">
+                      <a:solidFill>
+                        <a:srgbClr val="D9E2DD"/>
+                      </a:solidFill>
+                      <a:prstDash val="solid"/>
+                      <a:round/>
+                      <a:headEnd type="none" w="med" len="med"/>
+                      <a:tailEnd type="none" w="med" len="med"/>
+                    </a:lnT>
+                    <a:lnB w="6350" cap="flat" cmpd="sng" algn="ctr">
+                      <a:solidFill>
+                        <a:srgbClr val="D9E2DD"/>
+                      </a:solidFill>
+                      <a:prstDash val="solid"/>
+                      <a:round/>
+                      <a:headEnd type="none" w="med" len="med"/>
+                      <a:tailEnd type="none" w="med" len="med"/>
+                    </a:lnB>
+                    <a:solidFill>
+                      <a:srgbClr val="FFFFFF"/>
+                    </a:solidFill>
+                  </a:tcPr>
+                </a:tc>
+              </a:tr>
+              <a:tr h="420624">
+                <a:tc>
+                  <a:txBody>
+                    <a:bodyPr/>
+                    <a:lstStyle/>
+                    <a:p>
+                      <a:pPr indent="0" marL="0">
+                        <a:buNone/>
+                      </a:pPr>
+                      <a:r>
+                        <a:rPr lang="en-US" sz="1300" dirty="0">
+                          <a:solidFill>
+                            <a:srgbClr val="1D2420"/>
+                          </a:solidFill>
+                          <a:latin typeface="Calibri" pitchFamily="34" charset="0"/>
+                          <a:ea typeface="Calibri" pitchFamily="34" charset="-122"/>
+                          <a:cs typeface="Calibri" pitchFamily="34" charset="-120"/>
+                        </a:rPr>
+                        <a:t>BRBet</a:t>
+                      </a:r>
+                      <a:endParaRPr lang="en-US" sz="1300" dirty="0">
+                        <a:latin typeface="Calibri" charset="0"/>
+                        <a:ea typeface="Calibri" charset="0"/>
+                        <a:cs typeface="Calibri" charset="0"/>
+                      </a:endParaRPr>
+                    </a:p>
+                  </a:txBody>
+                  <a:tcPr marL="54864" marR="54864" marT="54864" marB="54864" anchor="ctr">
+                    <a:lnL w="6350" cap="flat" cmpd="sng" algn="ctr">
+                      <a:solidFill>
+                        <a:srgbClr val="D9E2DD"/>
+                      </a:solidFill>
+                      <a:prstDash val="solid"/>
+                      <a:round/>
+                      <a:headEnd type="none" w="med" len="med"/>
+                      <a:tailEnd type="none" w="med" len="med"/>
+                    </a:lnL>
+                    <a:lnR w="6350" cap="flat" cmpd="sng" algn="ctr">
+                      <a:solidFill>
+                        <a:srgbClr val="D9E2DD"/>
+                      </a:solidFill>
+                      <a:prstDash val="solid"/>
+                      <a:round/>
+                      <a:headEnd type="none" w="med" len="med"/>
+                      <a:tailEnd type="none" w="med" len="med"/>
+                    </a:lnR>
+                    <a:lnT w="6350" cap="flat" cmpd="sng" algn="ctr">
+                      <a:solidFill>
+                        <a:srgbClr val="D9E2DD"/>
+                      </a:solidFill>
+                      <a:prstDash val="solid"/>
+                      <a:round/>
+                      <a:headEnd type="none" w="med" len="med"/>
+                      <a:tailEnd type="none" w="med" len="med"/>
+                    </a:lnT>
+                    <a:lnB w="6350" cap="flat" cmpd="sng" algn="ctr">
+                      <a:solidFill>
+                        <a:srgbClr val="D9E2DD"/>
+                      </a:solidFill>
+                      <a:prstDash val="solid"/>
+                      <a:round/>
+                      <a:headEnd type="none" w="med" len="med"/>
+                      <a:tailEnd type="none" w="med" len="med"/>
+                    </a:lnB>
+                    <a:solidFill>
+                      <a:srgbClr val="FFFFFF"/>
+                    </a:solidFill>
+                  </a:tcPr>
+                </a:tc>
+                <a:tc>
+                  <a:txBody>
+                    <a:bodyPr/>
+                    <a:lstStyle/>
+                    <a:p>
+                      <a:pPr indent="0" marL="0">
+                        <a:buNone/>
+                      </a:pPr>
+                      <a:r>
+                        <a:rPr lang="en-US" sz="1300" dirty="0">
+                          <a:solidFill>
+                            <a:srgbClr val="1D2420"/>
+                          </a:solidFill>
+                          <a:latin typeface="Calibri" pitchFamily="34" charset="0"/>
+                          <a:ea typeface="Calibri" pitchFamily="34" charset="-122"/>
+                          <a:cs typeface="Calibri" pitchFamily="34" charset="-120"/>
+                        </a:rPr>
+                        <a:t>El Salvador</a:t>
+                      </a:r>
+                      <a:endParaRPr lang="en-US" sz="1300" dirty="0">
+                        <a:latin typeface="Calibri" charset="0"/>
+                        <a:ea typeface="Calibri" charset="0"/>
+                        <a:cs typeface="Calibri" charset="0"/>
+                      </a:endParaRPr>
+                    </a:p>
+                  </a:txBody>
+                  <a:tcPr marL="54864" marR="54864" marT="54864" marB="54864" anchor="ctr">
+                    <a:lnL w="6350" cap="flat" cmpd="sng" algn="ctr">
+                      <a:solidFill>
+                        <a:srgbClr val="D9E2DD"/>
+                      </a:solidFill>
+                      <a:prstDash val="solid"/>
+                      <a:round/>
+                      <a:headEnd type="none" w="med" len="med"/>
+                      <a:tailEnd type="none" w="med" len="med"/>
+                    </a:lnL>
+                    <a:lnR w="6350" cap="flat" cmpd="sng" algn="ctr">
+                      <a:solidFill>
+                        <a:srgbClr val="D9E2DD"/>
+                      </a:solidFill>
+                      <a:prstDash val="solid"/>
+                      <a:round/>
+                      <a:headEnd type="none" w="med" len="med"/>
+                      <a:tailEnd type="none" w="med" len="med"/>
+                    </a:lnR>
+                    <a:lnT w="6350" cap="flat" cmpd="sng" algn="ctr">
+                      <a:solidFill>
+                        <a:srgbClr val="D9E2DD"/>
+                      </a:solidFill>
+                      <a:prstDash val="solid"/>
+                      <a:round/>
+                      <a:headEnd type="none" w="med" len="med"/>
+                      <a:tailEnd type="none" w="med" len="med"/>
+                    </a:lnT>
+                    <a:lnB w="6350" cap="flat" cmpd="sng" algn="ctr">
+                      <a:solidFill>
+                        <a:srgbClr val="D9E2DD"/>
+                      </a:solidFill>
+                      <a:prstDash val="solid"/>
+                      <a:round/>
+                      <a:headEnd type="none" w="med" len="med"/>
+                      <a:tailEnd type="none" w="med" len="med"/>
+                    </a:lnB>
+                    <a:solidFill>
+                      <a:srgbClr val="FFFFFF"/>
+                    </a:solidFill>
+                  </a:tcPr>
+                </a:tc>
+                <a:tc>
+                  <a:txBody>
+                    <a:bodyPr/>
+                    <a:lstStyle/>
+                    <a:p>
+                      <a:pPr indent="0" marL="0">
+                        <a:buNone/>
+                      </a:pPr>
+                      <a:r>
+                        <a:rPr lang="en-US" sz="1300" dirty="0">
+                          <a:solidFill>
+                            <a:srgbClr val="1D2420"/>
+                          </a:solidFill>
+                          <a:latin typeface="Calibri" pitchFamily="34" charset="0"/>
+                          <a:ea typeface="Calibri" pitchFamily="34" charset="-122"/>
+                          <a:cs typeface="Calibri" pitchFamily="34" charset="-120"/>
+                        </a:rPr>
+                        <a:t>Nuevo logo</a:t>
+                      </a:r>
+                      <a:endParaRPr lang="en-US" sz="1300" dirty="0">
+                        <a:latin typeface="Calibri" charset="0"/>
+                        <a:ea typeface="Calibri" charset="0"/>
+                        <a:cs typeface="Calibri" charset="0"/>
+                      </a:endParaRPr>
+                    </a:p>
+                  </a:txBody>
+                  <a:tcPr marL="54864" marR="54864" marT="54864" marB="54864" anchor="ctr">
+                    <a:lnL w="6350" cap="flat" cmpd="sng" algn="ctr">
+                      <a:solidFill>
+                        <a:srgbClr val="D9E2DD"/>
+                      </a:solidFill>
+                      <a:prstDash val="solid"/>
+                      <a:round/>
+                      <a:headEnd type="none" w="med" len="med"/>
+                      <a:tailEnd type="none" w="med" len="med"/>
+                    </a:lnL>
+                    <a:lnR w="6350" cap="flat" cmpd="sng" algn="ctr">
+                      <a:solidFill>
+                        <a:srgbClr val="D9E2DD"/>
+                      </a:solidFill>
+                      <a:prstDash val="solid"/>
+                      <a:round/>
+                      <a:headEnd type="none" w="med" len="med"/>
+                      <a:tailEnd type="none" w="med" len="med"/>
+                    </a:lnR>
+                    <a:lnT w="6350" cap="flat" cmpd="sng" algn="ctr">
+                      <a:solidFill>
+                        <a:srgbClr val="D9E2DD"/>
+                      </a:solidFill>
+                      <a:prstDash val="solid"/>
+                      <a:round/>
+                      <a:headEnd type="none" w="med" len="med"/>
+                      <a:tailEnd type="none" w="med" len="med"/>
+                    </a:lnT>
+                    <a:lnB w="6350" cap="flat" cmpd="sng" algn="ctr">
+                      <a:solidFill>
+                        <a:srgbClr val="D9E2DD"/>
+                      </a:solidFill>
+                      <a:prstDash val="solid"/>
+                      <a:round/>
+                      <a:headEnd type="none" w="med" len="med"/>
+                      <a:tailEnd type="none" w="med" len="med"/>
+                    </a:lnB>
+                    <a:solidFill>
+                      <a:srgbClr val="FFFFFF"/>
+                    </a:solidFill>
+                  </a:tcPr>
+                </a:tc>
+                <a:tc>
+                  <a:txBody>
+                    <a:bodyPr/>
+                    <a:lstStyle/>
+                    <a:p>
+                      <a:pPr indent="0" marL="0">
+                        <a:buNone/>
+                      </a:pPr>
+                      <a:r>
+                        <a:rPr lang="en-US" sz="1300" dirty="0">
+                          <a:solidFill>
+                            <a:srgbClr val="1D2420"/>
+                          </a:solidFill>
+                          <a:latin typeface="Calibri" pitchFamily="34" charset="0"/>
+                          <a:ea typeface="Calibri" pitchFamily="34" charset="-122"/>
+                          <a:cs typeface="Calibri" pitchFamily="34" charset="-120"/>
+                        </a:rPr>
+                        <a:t>$25K</a:t>
+                      </a:r>
+                      <a:endParaRPr lang="en-US" sz="1300" dirty="0">
+                        <a:latin typeface="Calibri" charset="0"/>
+                        <a:ea typeface="Calibri" charset="0"/>
+                        <a:cs typeface="Calibri" charset="0"/>
+                      </a:endParaRPr>
+                    </a:p>
+                  </a:txBody>
+                  <a:tcPr marL="54864" marR="54864" marT="54864" marB="54864" anchor="ctr">
+                    <a:lnL w="6350" cap="flat" cmpd="sng" algn="ctr">
+                      <a:solidFill>
+                        <a:srgbClr val="D9E2DD"/>
+                      </a:solidFill>
+                      <a:prstDash val="solid"/>
+                      <a:round/>
+                      <a:headEnd type="none" w="med" len="med"/>
+                      <a:tailEnd type="none" w="med" len="med"/>
+                    </a:lnL>
+                    <a:lnR w="6350" cap="flat" cmpd="sng" algn="ctr">
+                      <a:solidFill>
+                        <a:srgbClr val="D9E2DD"/>
+                      </a:solidFill>
+                      <a:prstDash val="solid"/>
+                      <a:round/>
+                      <a:headEnd type="none" w="med" len="med"/>
+                      <a:tailEnd type="none" w="med" len="med"/>
+                    </a:lnR>
+                    <a:lnT w="6350" cap="flat" cmpd="sng" algn="ctr">
+                      <a:solidFill>
+                        <a:srgbClr val="D9E2DD"/>
+                      </a:solidFill>
+                      <a:prstDash val="solid"/>
+                      <a:round/>
+                      <a:headEnd type="none" w="med" len="med"/>
+                      <a:tailEnd type="none" w="med" len="med"/>
+                    </a:lnT>
+                    <a:lnB w="6350" cap="flat" cmpd="sng" algn="ctr">
+                      <a:solidFill>
+                        <a:srgbClr val="D9E2DD"/>
+                      </a:solidFill>
+                      <a:prstDash val="solid"/>
+                      <a:round/>
+                      <a:headEnd type="none" w="med" len="med"/>
+                      <a:tailEnd type="none" w="med" len="med"/>
+                    </a:lnB>
+                    <a:solidFill>
+                      <a:srgbClr val="FFFFFF"/>
+                    </a:solidFill>
+                  </a:tcPr>
+                </a:tc>
+                <a:tc>
+                  <a:txBody>
+                    <a:bodyPr/>
+                    <a:lstStyle/>
+                    <a:p>
+                      <a:pPr indent="0" marL="0">
+                        <a:buNone/>
+                      </a:pPr>
+                      <a:r>
+                        <a:rPr lang="en-US" sz="1300" dirty="0">
+                          <a:solidFill>
+                            <a:srgbClr val="1D2420"/>
+                          </a:solidFill>
+                          <a:latin typeface="Calibri" pitchFamily="34" charset="0"/>
+                          <a:ea typeface="Calibri" pitchFamily="34" charset="-122"/>
+                          <a:cs typeface="Calibri" pitchFamily="34" charset="-120"/>
+                        </a:rPr>
+                        <a:t>Expansión a El Salvador</a:t>
+                      </a:r>
+                      <a:endParaRPr lang="en-US" sz="1300" dirty="0">
+                        <a:latin typeface="Calibri" charset="0"/>
+                        <a:ea typeface="Calibri" charset="0"/>
+                        <a:cs typeface="Calibri" charset="0"/>
+                      </a:endParaRPr>
+                    </a:p>
+                  </a:txBody>
+                  <a:tcPr marL="54864" marR="54864" marT="54864" marB="54864" anchor="ctr">
+                    <a:lnL w="6350" cap="flat" cmpd="sng" algn="ctr">
+                      <a:solidFill>
+                        <a:srgbClr val="D9E2DD"/>
+                      </a:solidFill>
+                      <a:prstDash val="solid"/>
+                      <a:round/>
+                      <a:headEnd type="none" w="med" len="med"/>
+                      <a:tailEnd type="none" w="med" len="med"/>
+                    </a:lnL>
+                    <a:lnR w="6350" cap="flat" cmpd="sng" algn="ctr">
+                      <a:solidFill>
+                        <a:srgbClr val="D9E2DD"/>
+                      </a:solidFill>
+                      <a:prstDash val="solid"/>
+                      <a:round/>
+                      <a:headEnd type="none" w="med" len="med"/>
+                      <a:tailEnd type="none" w="med" len="med"/>
+                    </a:lnR>
+                    <a:lnT w="6350" cap="flat" cmpd="sng" algn="ctr">
+                      <a:solidFill>
+                        <a:srgbClr val="D9E2DD"/>
+                      </a:solidFill>
+                      <a:prstDash val="solid"/>
+                      <a:round/>
+                      <a:headEnd type="none" w="med" len="med"/>
+                      <a:tailEnd type="none" w="med" len="med"/>
+                    </a:lnT>
+                    <a:lnB w="6350" cap="flat" cmpd="sng" algn="ctr">
+                      <a:solidFill>
+                        <a:srgbClr val="D9E2DD"/>
+                      </a:solidFill>
+                      <a:prstDash val="solid"/>
+                      <a:round/>
+                      <a:headEnd type="none" w="med" len="med"/>
+                      <a:tailEnd type="none" w="med" len="med"/>
+                    </a:lnB>
+                    <a:solidFill>
+                      <a:srgbClr val="FFFFFF"/>
+                    </a:solidFill>
+                  </a:tcPr>
+                </a:tc>
+              </a:tr>
+              <a:tr h="420624">
+                <a:tc>
+                  <a:txBody>
+                    <a:bodyPr/>
+                    <a:lstStyle/>
+                    <a:p>
+                      <a:pPr indent="0" marL="0">
+                        <a:buNone/>
+                      </a:pPr>
+                      <a:r>
+                        <a:rPr lang="en-US" sz="1300" dirty="0">
+                          <a:solidFill>
+                            <a:srgbClr val="1D2420"/>
+                          </a:solidFill>
+                          <a:latin typeface="Calibri" pitchFamily="34" charset="0"/>
+                          <a:ea typeface="Calibri" pitchFamily="34" charset="-122"/>
+                          <a:cs typeface="Calibri" pitchFamily="34" charset="-120"/>
+                        </a:rPr>
+                        <a:t>Bet n Play · RumbaWin · Juegatelo</a:t>
+                      </a:r>
+                      <a:endParaRPr lang="en-US" sz="1300" dirty="0">
+                        <a:latin typeface="Calibri" charset="0"/>
+                        <a:ea typeface="Calibri" charset="0"/>
+                        <a:cs typeface="Calibri" charset="0"/>
+                      </a:endParaRPr>
+                    </a:p>
+                  </a:txBody>
+                  <a:tcPr marL="54864" marR="54864" marT="54864" marB="54864" anchor="ctr">
+                    <a:lnL w="6350" cap="flat" cmpd="sng" algn="ctr">
+                      <a:solidFill>
+                        <a:srgbClr val="D9E2DD"/>
+                      </a:solidFill>
+                      <a:prstDash val="solid"/>
+                      <a:round/>
+                      <a:headEnd type="none" w="med" len="med"/>
+                      <a:tailEnd type="none" w="med" len="med"/>
+                    </a:lnL>
+                    <a:lnR w="6350" cap="flat" cmpd="sng" algn="ctr">
+                      <a:solidFill>
+                        <a:srgbClr val="D9E2DD"/>
+                      </a:solidFill>
+                      <a:prstDash val="solid"/>
+                      <a:round/>
+                      <a:headEnd type="none" w="med" len="med"/>
+                      <a:tailEnd type="none" w="med" len="med"/>
+                    </a:lnR>
+                    <a:lnT w="6350" cap="flat" cmpd="sng" algn="ctr">
+                      <a:solidFill>
+                        <a:srgbClr val="D9E2DD"/>
+                      </a:solidFill>
+                      <a:prstDash val="solid"/>
+                      <a:round/>
+                      <a:headEnd type="none" w="med" len="med"/>
+                      <a:tailEnd type="none" w="med" len="med"/>
+                    </a:lnT>
+                    <a:lnB w="6350" cap="flat" cmpd="sng" algn="ctr">
+                      <a:solidFill>
+                        <a:srgbClr val="D9E2DD"/>
+                      </a:solidFill>
+                      <a:prstDash val="solid"/>
+                      <a:round/>
+                      <a:headEnd type="none" w="med" len="med"/>
+                      <a:tailEnd type="none" w="med" len="med"/>
+                    </a:lnB>
+                    <a:solidFill>
+                      <a:srgbClr val="FFFFFF"/>
+                    </a:solidFill>
+                  </a:tcPr>
+                </a:tc>
+                <a:tc>
+                  <a:txBody>
+                    <a:bodyPr/>
+                    <a:lstStyle/>
+                    <a:p>
+                      <a:pPr indent="0" marL="0">
+                        <a:buNone/>
+                      </a:pPr>
+                      <a:r>
+                        <a:rPr lang="en-US" sz="1300" dirty="0">
+                          <a:solidFill>
+                            <a:srgbClr val="1D2420"/>
+                          </a:solidFill>
+                          <a:latin typeface="Calibri" pitchFamily="34" charset="0"/>
+                          <a:ea typeface="Calibri" pitchFamily="34" charset="-122"/>
+                          <a:cs typeface="Calibri" pitchFamily="34" charset="-120"/>
+                        </a:rPr>
+                        <a:t>Venezuela</a:t>
+                      </a:r>
+                      <a:endParaRPr lang="en-US" sz="1300" dirty="0">
+                        <a:latin typeface="Calibri" charset="0"/>
+                        <a:ea typeface="Calibri" charset="0"/>
+                        <a:cs typeface="Calibri" charset="0"/>
+                      </a:endParaRPr>
+                    </a:p>
+                  </a:txBody>
+                  <a:tcPr marL="54864" marR="54864" marT="54864" marB="54864" anchor="ctr">
+                    <a:lnL w="6350" cap="flat" cmpd="sng" algn="ctr">
+                      <a:solidFill>
+                        <a:srgbClr val="D9E2DD"/>
+                      </a:solidFill>
+                      <a:prstDash val="solid"/>
+                      <a:round/>
+                      <a:headEnd type="none" w="med" len="med"/>
+                      <a:tailEnd type="none" w="med" len="med"/>
+                    </a:lnL>
+                    <a:lnR w="6350" cap="flat" cmpd="sng" algn="ctr">
+                      <a:solidFill>
+                        <a:srgbClr val="D9E2DD"/>
+                      </a:solidFill>
+                      <a:prstDash val="solid"/>
+                      <a:round/>
+                      <a:headEnd type="none" w="med" len="med"/>
+                      <a:tailEnd type="none" w="med" len="med"/>
+                    </a:lnR>
+                    <a:lnT w="6350" cap="flat" cmpd="sng" algn="ctr">
+                      <a:solidFill>
+                        <a:srgbClr val="D9E2DD"/>
+                      </a:solidFill>
+                      <a:prstDash val="solid"/>
+                      <a:round/>
+                      <a:headEnd type="none" w="med" len="med"/>
+                      <a:tailEnd type="none" w="med" len="med"/>
+                    </a:lnT>
+                    <a:lnB w="6350" cap="flat" cmpd="sng" algn="ctr">
+                      <a:solidFill>
+                        <a:srgbClr val="D9E2DD"/>
+                      </a:solidFill>
+                      <a:prstDash val="solid"/>
+                      <a:round/>
+                      <a:headEnd type="none" w="med" len="med"/>
+                      <a:tailEnd type="none" w="med" len="med"/>
+                    </a:lnB>
+                    <a:solidFill>
+                      <a:srgbClr val="FFFFFF"/>
+                    </a:solidFill>
+                  </a:tcPr>
+                </a:tc>
+                <a:tc>
+                  <a:txBody>
+                    <a:bodyPr/>
+                    <a:lstStyle/>
+                    <a:p>
+                      <a:pPr indent="0" marL="0">
+                        <a:buNone/>
+                      </a:pPr>
+                      <a:r>
+                        <a:rPr lang="en-US" sz="1300" dirty="0">
+                          <a:solidFill>
+                            <a:srgbClr val="1D2420"/>
+                          </a:solidFill>
+                          <a:latin typeface="Calibri" pitchFamily="34" charset="0"/>
+                          <a:ea typeface="Calibri" pitchFamily="34" charset="-122"/>
+                          <a:cs typeface="Calibri" pitchFamily="34" charset="-120"/>
+                        </a:rPr>
+                        <a:t>Nuevos logos</a:t>
+                      </a:r>
+                      <a:endParaRPr lang="en-US" sz="1300" dirty="0">
+                        <a:latin typeface="Calibri" charset="0"/>
+                        <a:ea typeface="Calibri" charset="0"/>
+                        <a:cs typeface="Calibri" charset="0"/>
+                      </a:endParaRPr>
+                    </a:p>
+                  </a:txBody>
+                  <a:tcPr marL="54864" marR="54864" marT="54864" marB="54864" anchor="ctr">
+                    <a:lnL w="6350" cap="flat" cmpd="sng" algn="ctr">
+                      <a:solidFill>
+                        <a:srgbClr val="D9E2DD"/>
+                      </a:solidFill>
+                      <a:prstDash val="solid"/>
+                      <a:round/>
+                      <a:headEnd type="none" w="med" len="med"/>
+                      <a:tailEnd type="none" w="med" len="med"/>
+                    </a:lnL>
+                    <a:lnR w="6350" cap="flat" cmpd="sng" algn="ctr">
+                      <a:solidFill>
+                        <a:srgbClr val="D9E2DD"/>
+                      </a:solidFill>
+                      <a:prstDash val="solid"/>
+                      <a:round/>
+                      <a:headEnd type="none" w="med" len="med"/>
+                      <a:tailEnd type="none" w="med" len="med"/>
+                    </a:lnR>
+                    <a:lnT w="6350" cap="flat" cmpd="sng" algn="ctr">
+                      <a:solidFill>
+                        <a:srgbClr val="D9E2DD"/>
+                      </a:solidFill>
+                      <a:prstDash val="solid"/>
+                      <a:round/>
+                      <a:headEnd type="none" w="med" len="med"/>
+                      <a:tailEnd type="none" w="med" len="med"/>
+                    </a:lnT>
+                    <a:lnB w="6350" cap="flat" cmpd="sng" algn="ctr">
+                      <a:solidFill>
+                        <a:srgbClr val="D9E2DD"/>
+                      </a:solidFill>
+                      <a:prstDash val="solid"/>
+                      <a:round/>
+                      <a:headEnd type="none" w="med" len="med"/>
+                      <a:tailEnd type="none" w="med" len="med"/>
+                    </a:lnB>
+                    <a:solidFill>
+                      <a:srgbClr val="FFFFFF"/>
+                    </a:solidFill>
+                  </a:tcPr>
+                </a:tc>
+                <a:tc>
+                  <a:txBody>
+                    <a:bodyPr/>
+                    <a:lstStyle/>
+                    <a:p>
+                      <a:pPr indent="0" marL="0">
+                        <a:buNone/>
+                      </a:pPr>
+                      <a:r>
+                        <a:rPr lang="en-US" sz="1300" dirty="0">
+                          <a:solidFill>
+                            <a:srgbClr val="1D2420"/>
+                          </a:solidFill>
+                          <a:latin typeface="Calibri" pitchFamily="34" charset="0"/>
+                          <a:ea typeface="Calibri" pitchFamily="34" charset="-122"/>
+                          <a:cs typeface="Calibri" pitchFamily="34" charset="-120"/>
+                        </a:rPr>
+                        <a:t>$75K</a:t>
+                      </a:r>
+                      <a:endParaRPr lang="en-US" sz="1300" dirty="0">
+                        <a:latin typeface="Calibri" charset="0"/>
+                        <a:ea typeface="Calibri" charset="0"/>
+                        <a:cs typeface="Calibri" charset="0"/>
+                      </a:endParaRPr>
+                    </a:p>
+                  </a:txBody>
+                  <a:tcPr marL="54864" marR="54864" marT="54864" marB="54864" anchor="ctr">
+                    <a:lnL w="6350" cap="flat" cmpd="sng" algn="ctr">
+                      <a:solidFill>
+                        <a:srgbClr val="D9E2DD"/>
+                      </a:solidFill>
+                      <a:prstDash val="solid"/>
+                      <a:round/>
+                      <a:headEnd type="none" w="med" len="med"/>
+                      <a:tailEnd type="none" w="med" len="med"/>
+                    </a:lnL>
+                    <a:lnR w="6350" cap="flat" cmpd="sng" algn="ctr">
+                      <a:solidFill>
+                        <a:srgbClr val="D9E2DD"/>
+                      </a:solidFill>
+                      <a:prstDash val="solid"/>
+                      <a:round/>
+                      <a:headEnd type="none" w="med" len="med"/>
+                      <a:tailEnd type="none" w="med" len="med"/>
+                    </a:lnR>
+                    <a:lnT w="6350" cap="flat" cmpd="sng" algn="ctr">
+                      <a:solidFill>
+                        <a:srgbClr val="D9E2DD"/>
+                      </a:solidFill>
+                      <a:prstDash val="solid"/>
+                      <a:round/>
+                      <a:headEnd type="none" w="med" len="med"/>
+                      <a:tailEnd type="none" w="med" len="med"/>
+                    </a:lnT>
+                    <a:lnB w="6350" cap="flat" cmpd="sng" algn="ctr">
+                      <a:solidFill>
+                        <a:srgbClr val="D9E2DD"/>
+                      </a:solidFill>
+                      <a:prstDash val="solid"/>
+                      <a:round/>
+                      <a:headEnd type="none" w="med" len="med"/>
+                      <a:tailEnd type="none" w="med" len="med"/>
+                    </a:lnB>
+                    <a:solidFill>
+                      <a:srgbClr val="FFFFFF"/>
+                    </a:solidFill>
+                  </a:tcPr>
+                </a:tc>
+                <a:tc>
+                  <a:txBody>
+                    <a:bodyPr/>
+                    <a:lstStyle/>
+                    <a:p>
+                      <a:pPr indent="0" marL="0">
+                        <a:buNone/>
+                      </a:pPr>
+                      <a:r>
+                        <a:rPr lang="en-US" sz="1300" dirty="0">
+                          <a:solidFill>
+                            <a:srgbClr val="1D2420"/>
+                          </a:solidFill>
+                          <a:latin typeface="Calibri" pitchFamily="34" charset="0"/>
+                          <a:ea typeface="Calibri" pitchFamily="34" charset="-122"/>
+                          <a:cs typeface="Calibri" pitchFamily="34" charset="-120"/>
+                        </a:rPr>
+                        <a:t>Pipeline Venezuela junto a Grupo Royal</a:t>
+                      </a:r>
+                      <a:endParaRPr lang="en-US" sz="1300" dirty="0">
+                        <a:latin typeface="Calibri" charset="0"/>
+                        <a:ea typeface="Calibri" charset="0"/>
+                        <a:cs typeface="Calibri" charset="0"/>
+                      </a:endParaRPr>
+                    </a:p>
+                  </a:txBody>
+                  <a:tcPr marL="54864" marR="54864" marT="54864" marB="54864" anchor="ctr">
+                    <a:lnL w="6350" cap="flat" cmpd="sng" algn="ctr">
+                      <a:solidFill>
+                        <a:srgbClr val="D9E2DD"/>
+                      </a:solidFill>
+                      <a:prstDash val="solid"/>
+                      <a:round/>
+                      <a:headEnd type="none" w="med" len="med"/>
+                      <a:tailEnd type="none" w="med" len="med"/>
+                    </a:lnL>
+                    <a:lnR w="6350" cap="flat" cmpd="sng" algn="ctr">
+                      <a:solidFill>
+                        <a:srgbClr val="D9E2DD"/>
+                      </a:solidFill>
+                      <a:prstDash val="solid"/>
+                      <a:round/>
+                      <a:headEnd type="none" w="med" len="med"/>
+                      <a:tailEnd type="none" w="med" len="med"/>
+                    </a:lnR>
+                    <a:lnT w="6350" cap="flat" cmpd="sng" algn="ctr">
+                      <a:solidFill>
+                        <a:srgbClr val="D9E2DD"/>
+                      </a:solidFill>
+                      <a:prstDash val="solid"/>
+                      <a:round/>
+                      <a:headEnd type="none" w="med" len="med"/>
+                      <a:tailEnd type="none" w="med" len="med"/>
+                    </a:lnT>
+                    <a:lnB w="6350" cap="flat" cmpd="sng" algn="ctr">
+                      <a:solidFill>
+                        <a:srgbClr val="D9E2DD"/>
+                      </a:solidFill>
+                      <a:prstDash val="solid"/>
+                      <a:round/>
+                      <a:headEnd type="none" w="med" len="med"/>
+                      <a:tailEnd type="none" w="med" len="med"/>
+                    </a:lnB>
+                    <a:solidFill>
+                      <a:srgbClr val="FFFFFF"/>
+                    </a:solidFill>
+                  </a:tcPr>
+                </a:tc>
+              </a:tr>
+              <a:tr h="420624">
+                <a:tc>
+                  <a:txBody>
+                    <a:bodyPr/>
+                    <a:lstStyle/>
+                    <a:p>
+                      <a:pPr indent="0" marL="0">
+                        <a:buNone/>
+                      </a:pPr>
+                      <a:r>
+                        <a:rPr lang="en-US" sz="1300" dirty="0">
+                          <a:solidFill>
+                            <a:srgbClr val="1D2420"/>
+                          </a:solidFill>
+                          <a:latin typeface="Calibri" pitchFamily="34" charset="0"/>
+                          <a:ea typeface="Calibri" pitchFamily="34" charset="-122"/>
+                          <a:cs typeface="Calibri" pitchFamily="34" charset="-120"/>
+                        </a:rPr>
+                        <a:t>Apuesta Total</a:t>
+                      </a:r>
+                      <a:endParaRPr lang="en-US" sz="1300" dirty="0">
+                        <a:latin typeface="Calibri" charset="0"/>
+                        <a:ea typeface="Calibri" charset="0"/>
+                        <a:cs typeface="Calibri" charset="0"/>
+                      </a:endParaRPr>
+                    </a:p>
+                  </a:txBody>
+                  <a:tcPr marL="54864" marR="54864" marT="54864" marB="54864" anchor="ctr">
+                    <a:lnL w="6350" cap="flat" cmpd="sng" algn="ctr">
+                      <a:solidFill>
+                        <a:srgbClr val="D9E2DD"/>
+                      </a:solidFill>
+                      <a:prstDash val="solid"/>
+                      <a:round/>
+                      <a:headEnd type="none" w="med" len="med"/>
+                      <a:tailEnd type="none" w="med" len="med"/>
+                    </a:lnL>
+                    <a:lnR w="6350" cap="flat" cmpd="sng" algn="ctr">
+                      <a:solidFill>
+                        <a:srgbClr val="D9E2DD"/>
+                      </a:solidFill>
+                      <a:prstDash val="solid"/>
+                      <a:round/>
+                      <a:headEnd type="none" w="med" len="med"/>
+                      <a:tailEnd type="none" w="med" len="med"/>
+                    </a:lnR>
+                    <a:lnT w="6350" cap="flat" cmpd="sng" algn="ctr">
+                      <a:solidFill>
+                        <a:srgbClr val="D9E2DD"/>
+                      </a:solidFill>
+                      <a:prstDash val="solid"/>
+                      <a:round/>
+                      <a:headEnd type="none" w="med" len="med"/>
+                      <a:tailEnd type="none" w="med" len="med"/>
+                    </a:lnT>
+                    <a:lnB w="6350" cap="flat" cmpd="sng" algn="ctr">
+                      <a:solidFill>
+                        <a:srgbClr val="D9E2DD"/>
+                      </a:solidFill>
+                      <a:prstDash val="solid"/>
+                      <a:round/>
+                      <a:headEnd type="none" w="med" len="med"/>
+                      <a:tailEnd type="none" w="med" len="med"/>
+                    </a:lnB>
+                    <a:solidFill>
+                      <a:srgbClr val="FFFFFF"/>
+                    </a:solidFill>
+                  </a:tcPr>
+                </a:tc>
+                <a:tc>
+                  <a:txBody>
+                    <a:bodyPr/>
+                    <a:lstStyle/>
+                    <a:p>
+                      <a:pPr indent="0" marL="0">
+                        <a:buNone/>
+                      </a:pPr>
+                      <a:r>
+                        <a:rPr lang="en-US" sz="1300" dirty="0">
+                          <a:solidFill>
+                            <a:srgbClr val="1D2420"/>
+                          </a:solidFill>
+                          <a:latin typeface="Calibri" pitchFamily="34" charset="0"/>
+                          <a:ea typeface="Calibri" pitchFamily="34" charset="-122"/>
+                          <a:cs typeface="Calibri" pitchFamily="34" charset="-120"/>
+                        </a:rPr>
+                        <a:t>Perú</a:t>
+                      </a:r>
+                      <a:endParaRPr lang="en-US" sz="1300" dirty="0">
+                        <a:latin typeface="Calibri" charset="0"/>
+                        <a:ea typeface="Calibri" charset="0"/>
+                        <a:cs typeface="Calibri" charset="0"/>
+                      </a:endParaRPr>
+                    </a:p>
+                  </a:txBody>
+                  <a:tcPr marL="54864" marR="54864" marT="54864" marB="54864" anchor="ctr">
+                    <a:lnL w="6350" cap="flat" cmpd="sng" algn="ctr">
+                      <a:solidFill>
+                        <a:srgbClr val="D9E2DD"/>
+                      </a:solidFill>
+                      <a:prstDash val="solid"/>
+                      <a:round/>
+                      <a:headEnd type="none" w="med" len="med"/>
+                      <a:tailEnd type="none" w="med" len="med"/>
+                    </a:lnL>
+                    <a:lnR w="6350" cap="flat" cmpd="sng" algn="ctr">
+                      <a:solidFill>
+                        <a:srgbClr val="D9E2DD"/>
+                      </a:solidFill>
+                      <a:prstDash val="solid"/>
+                      <a:round/>
+                      <a:headEnd type="none" w="med" len="med"/>
+                      <a:tailEnd type="none" w="med" len="med"/>
+                    </a:lnR>
+                    <a:lnT w="6350" cap="flat" cmpd="sng" algn="ctr">
+                      <a:solidFill>
+                        <a:srgbClr val="D9E2DD"/>
+                      </a:solidFill>
+                      <a:prstDash val="solid"/>
+                      <a:round/>
+                      <a:headEnd type="none" w="med" len="med"/>
+                      <a:tailEnd type="none" w="med" len="med"/>
+                    </a:lnT>
+                    <a:lnB w="6350" cap="flat" cmpd="sng" algn="ctr">
+                      <a:solidFill>
+                        <a:srgbClr val="D9E2DD"/>
+                      </a:solidFill>
+                      <a:prstDash val="solid"/>
+                      <a:round/>
+                      <a:headEnd type="none" w="med" len="med"/>
+                      <a:tailEnd type="none" w="med" len="med"/>
+                    </a:lnB>
+                    <a:solidFill>
+                      <a:srgbClr val="FFFFFF"/>
+                    </a:solidFill>
+                  </a:tcPr>
+                </a:tc>
+                <a:tc>
+                  <a:txBody>
+                    <a:bodyPr/>
+                    <a:lstStyle/>
+                    <a:p>
+                      <a:pPr indent="0" marL="0">
+                        <a:buNone/>
+                      </a:pPr>
+                      <a:r>
+                        <a:rPr lang="en-US" sz="1300" dirty="0">
+                          <a:solidFill>
+                            <a:srgbClr val="1D2420"/>
+                          </a:solidFill>
+                          <a:latin typeface="Calibri" pitchFamily="34" charset="0"/>
+                          <a:ea typeface="Calibri" pitchFamily="34" charset="-122"/>
+                          <a:cs typeface="Calibri" pitchFamily="34" charset="-120"/>
+                        </a:rPr>
+                        <a:t>Upsell</a:t>
+                      </a:r>
+                      <a:endParaRPr lang="en-US" sz="1300" dirty="0">
+                        <a:latin typeface="Calibri" charset="0"/>
+                        <a:ea typeface="Calibri" charset="0"/>
+                        <a:cs typeface="Calibri" charset="0"/>
+                      </a:endParaRPr>
+                    </a:p>
+                  </a:txBody>
+                  <a:tcPr marL="54864" marR="54864" marT="54864" marB="54864" anchor="ctr">
+                    <a:lnL w="6350" cap="flat" cmpd="sng" algn="ctr">
+                      <a:solidFill>
+                        <a:srgbClr val="D9E2DD"/>
+                      </a:solidFill>
+                      <a:prstDash val="solid"/>
+                      <a:round/>
+                      <a:headEnd type="none" w="med" len="med"/>
+                      <a:tailEnd type="none" w="med" len="med"/>
+                    </a:lnL>
+                    <a:lnR w="6350" cap="flat" cmpd="sng" algn="ctr">
+                      <a:solidFill>
+                        <a:srgbClr val="D9E2DD"/>
+                      </a:solidFill>
+                      <a:prstDash val="solid"/>
+                      <a:round/>
+                      <a:headEnd type="none" w="med" len="med"/>
+                      <a:tailEnd type="none" w="med" len="med"/>
+                    </a:lnR>
+                    <a:lnT w="6350" cap="flat" cmpd="sng" algn="ctr">
+                      <a:solidFill>
+                        <a:srgbClr val="D9E2DD"/>
+                      </a:solidFill>
+                      <a:prstDash val="solid"/>
+                      <a:round/>
+                      <a:headEnd type="none" w="med" len="med"/>
+                      <a:tailEnd type="none" w="med" len="med"/>
+                    </a:lnT>
+                    <a:lnB w="6350" cap="flat" cmpd="sng" algn="ctr">
+                      <a:solidFill>
+                        <a:srgbClr val="D9E2DD"/>
+                      </a:solidFill>
+                      <a:prstDash val="solid"/>
+                      <a:round/>
+                      <a:headEnd type="none" w="med" len="med"/>
+                      <a:tailEnd type="none" w="med" len="med"/>
+                    </a:lnB>
+                    <a:solidFill>
+                      <a:srgbClr val="FFFFFF"/>
+                    </a:solidFill>
+                  </a:tcPr>
+                </a:tc>
+                <a:tc>
+                  <a:txBody>
+                    <a:bodyPr/>
+                    <a:lstStyle/>
+                    <a:p>
+                      <a:pPr indent="0" marL="0">
+                        <a:buNone/>
+                      </a:pPr>
+                      <a:r>
+                        <a:rPr lang="en-US" sz="1300" dirty="0">
+                          <a:solidFill>
+                            <a:srgbClr val="1D2420"/>
+                          </a:solidFill>
+                          <a:latin typeface="Calibri" pitchFamily="34" charset="0"/>
+                          <a:ea typeface="Calibri" pitchFamily="34" charset="-122"/>
+                          <a:cs typeface="Calibri" pitchFamily="34" charset="-120"/>
+                        </a:rPr>
+                        <a:t>$50K</a:t>
+                      </a:r>
+                      <a:endParaRPr lang="en-US" sz="1300" dirty="0">
+                        <a:latin typeface="Calibri" charset="0"/>
+                        <a:ea typeface="Calibri" charset="0"/>
+                        <a:cs typeface="Calibri" charset="0"/>
+                      </a:endParaRPr>
+                    </a:p>
+                  </a:txBody>
+                  <a:tcPr marL="54864" marR="54864" marT="54864" marB="54864" anchor="ctr">
+                    <a:lnL w="6350" cap="flat" cmpd="sng" algn="ctr">
+                      <a:solidFill>
+                        <a:srgbClr val="D9E2DD"/>
+                      </a:solidFill>
+                      <a:prstDash val="solid"/>
+                      <a:round/>
+                      <a:headEnd type="none" w="med" len="med"/>
+                      <a:tailEnd type="none" w="med" len="med"/>
+                    </a:lnL>
+                    <a:lnR w="6350" cap="flat" cmpd="sng" algn="ctr">
+                      <a:solidFill>
+                        <a:srgbClr val="D9E2DD"/>
+                      </a:solidFill>
+                      <a:prstDash val="solid"/>
+                      <a:round/>
+                      <a:headEnd type="none" w="med" len="med"/>
+                      <a:tailEnd type="none" w="med" len="med"/>
+                    </a:lnR>
+                    <a:lnT w="6350" cap="flat" cmpd="sng" algn="ctr">
+                      <a:solidFill>
+                        <a:srgbClr val="D9E2DD"/>
+                      </a:solidFill>
+                      <a:prstDash val="solid"/>
+                      <a:round/>
+                      <a:headEnd type="none" w="med" len="med"/>
+                      <a:tailEnd type="none" w="med" len="med"/>
+                    </a:lnT>
+                    <a:lnB w="6350" cap="flat" cmpd="sng" algn="ctr">
+                      <a:solidFill>
+                        <a:srgbClr val="D9E2DD"/>
+                      </a:solidFill>
+                      <a:prstDash val="solid"/>
+                      <a:round/>
+                      <a:headEnd type="none" w="med" len="med"/>
+                      <a:tailEnd type="none" w="med" len="med"/>
+                    </a:lnB>
+                    <a:solidFill>
+                      <a:srgbClr val="FFFFFF"/>
+                    </a:solidFill>
+                  </a:tcPr>
+                </a:tc>
+                <a:tc>
+                  <a:txBody>
+                    <a:bodyPr/>
+                    <a:lstStyle/>
+                    <a:p>
+                      <a:pPr indent="0" marL="0">
+                        <a:buNone/>
+                      </a:pPr>
+                      <a:r>
+                        <a:rPr lang="en-US" sz="1300" dirty="0">
+                          <a:solidFill>
+                            <a:srgbClr val="1D2420"/>
+                          </a:solidFill>
+                          <a:latin typeface="Calibri" pitchFamily="34" charset="0"/>
+                          <a:ea typeface="Calibri" pitchFamily="34" charset="-122"/>
+                          <a:cs typeface="Calibri" pitchFamily="34" charset="-120"/>
+                        </a:rPr>
+                        <a:t>Cliente #1 Perú: omnicanal, mesas, deuda y marketing</a:t>
+                      </a:r>
+                      <a:endParaRPr lang="en-US" sz="1300" dirty="0">
+                        <a:latin typeface="Calibri" charset="0"/>
+                        <a:ea typeface="Calibri" charset="0"/>
+                        <a:cs typeface="Calibri" charset="0"/>
+                      </a:endParaRPr>
+                    </a:p>
+                  </a:txBody>
+                  <a:tcPr marL="54864" marR="54864" marT="54864" marB="54864" anchor="ctr">
+                    <a:lnL w="6350" cap="flat" cmpd="sng" algn="ctr">
+                      <a:solidFill>
+                        <a:srgbClr val="D9E2DD"/>
+                      </a:solidFill>
+                      <a:prstDash val="solid"/>
+                      <a:round/>
+                      <a:headEnd type="none" w="med" len="med"/>
+                      <a:tailEnd type="none" w="med" len="med"/>
+                    </a:lnL>
+                    <a:lnR w="6350" cap="flat" cmpd="sng" algn="ctr">
+                      <a:solidFill>
+                        <a:srgbClr val="D9E2DD"/>
+                      </a:solidFill>
+                      <a:prstDash val="solid"/>
+                      <a:round/>
+                      <a:headEnd type="none" w="med" len="med"/>
+                      <a:tailEnd type="none" w="med" len="med"/>
+                    </a:lnR>
+                    <a:lnT w="6350" cap="flat" cmpd="sng" algn="ctr">
+                      <a:solidFill>
+                        <a:srgbClr val="D9E2DD"/>
+                      </a:solidFill>
+                      <a:prstDash val="solid"/>
+                      <a:round/>
+                      <a:headEnd type="none" w="med" len="med"/>
+                      <a:tailEnd type="none" w="med" len="med"/>
+                    </a:lnT>
+                    <a:lnB w="6350" cap="flat" cmpd="sng" algn="ctr">
+                      <a:solidFill>
+                        <a:srgbClr val="D9E2DD"/>
+                      </a:solidFill>
+                      <a:prstDash val="solid"/>
+                      <a:round/>
+                      <a:headEnd type="none" w="med" len="med"/>
+                      <a:tailEnd type="none" w="med" len="med"/>
+                    </a:lnB>
+                    <a:solidFill>
+                      <a:srgbClr val="FFFFFF"/>
+                    </a:solidFill>
+                  </a:tcPr>
+                </a:tc>
+              </a:tr>
+              <a:tr h="420624">
+                <a:tc>
+                  <a:txBody>
+                    <a:bodyPr/>
+                    <a:lstStyle/>
+                    <a:p>
+                      <a:pPr indent="0" marL="0">
+                        <a:buNone/>
+                      </a:pPr>
+                      <a:r>
+                        <a:rPr lang="en-US" sz="1300" dirty="0">
+                          <a:solidFill>
+                            <a:srgbClr val="1D2420"/>
+                          </a:solidFill>
+                          <a:latin typeface="Calibri" pitchFamily="34" charset="0"/>
+                          <a:ea typeface="Calibri" pitchFamily="34" charset="-122"/>
+                          <a:cs typeface="Calibri" pitchFamily="34" charset="-120"/>
+                        </a:rPr>
+                        <a:t>Winpot</a:t>
+                      </a:r>
+                      <a:endParaRPr lang="en-US" sz="1300" dirty="0">
+                        <a:latin typeface="Calibri" charset="0"/>
+                        <a:ea typeface="Calibri" charset="0"/>
+                        <a:cs typeface="Calibri" charset="0"/>
+                      </a:endParaRPr>
+                    </a:p>
+                  </a:txBody>
+                  <a:tcPr marL="54864" marR="54864" marT="54864" marB="54864" anchor="ctr">
+                    <a:lnL w="6350" cap="flat" cmpd="sng" algn="ctr">
+                      <a:solidFill>
+                        <a:srgbClr val="D9E2DD"/>
+                      </a:solidFill>
+                      <a:prstDash val="solid"/>
+                      <a:round/>
+                      <a:headEnd type="none" w="med" len="med"/>
+                      <a:tailEnd type="none" w="med" len="med"/>
+                    </a:lnL>
+                    <a:lnR w="6350" cap="flat" cmpd="sng" algn="ctr">
+                      <a:solidFill>
+                        <a:srgbClr val="D9E2DD"/>
+                      </a:solidFill>
+                      <a:prstDash val="solid"/>
+                      <a:round/>
+                      <a:headEnd type="none" w="med" len="med"/>
+                      <a:tailEnd type="none" w="med" len="med"/>
+                    </a:lnR>
+                    <a:lnT w="6350" cap="flat" cmpd="sng" algn="ctr">
+                      <a:solidFill>
+                        <a:srgbClr val="D9E2DD"/>
+                      </a:solidFill>
+                      <a:prstDash val="solid"/>
+                      <a:round/>
+                      <a:headEnd type="none" w="med" len="med"/>
+                      <a:tailEnd type="none" w="med" len="med"/>
+                    </a:lnT>
+                    <a:lnB w="6350" cap="flat" cmpd="sng" algn="ctr">
+                      <a:solidFill>
+                        <a:srgbClr val="D9E2DD"/>
+                      </a:solidFill>
+                      <a:prstDash val="solid"/>
+                      <a:round/>
+                      <a:headEnd type="none" w="med" len="med"/>
+                      <a:tailEnd type="none" w="med" len="med"/>
+                    </a:lnB>
+                    <a:solidFill>
+                      <a:srgbClr val="FFFFFF"/>
+                    </a:solidFill>
+                  </a:tcPr>
+                </a:tc>
+                <a:tc>
+                  <a:txBody>
+                    <a:bodyPr/>
+                    <a:lstStyle/>
+                    <a:p>
+                      <a:pPr indent="0" marL="0">
+                        <a:buNone/>
+                      </a:pPr>
+                      <a:r>
+                        <a:rPr lang="en-US" sz="1300" dirty="0">
+                          <a:solidFill>
+                            <a:srgbClr val="1D2420"/>
+                          </a:solidFill>
+                          <a:latin typeface="Calibri" pitchFamily="34" charset="0"/>
+                          <a:ea typeface="Calibri" pitchFamily="34" charset="-122"/>
+                          <a:cs typeface="Calibri" pitchFamily="34" charset="-120"/>
+                        </a:rPr>
+                        <a:t>México → Perú</a:t>
+                      </a:r>
+                      <a:endParaRPr lang="en-US" sz="1300" dirty="0">
+                        <a:latin typeface="Calibri" charset="0"/>
+                        <a:ea typeface="Calibri" charset="0"/>
+                        <a:cs typeface="Calibri" charset="0"/>
+                      </a:endParaRPr>
+                    </a:p>
+                  </a:txBody>
+                  <a:tcPr marL="54864" marR="54864" marT="54864" marB="54864" anchor="ctr">
+                    <a:lnL w="6350" cap="flat" cmpd="sng" algn="ctr">
+                      <a:solidFill>
+                        <a:srgbClr val="D9E2DD"/>
+                      </a:solidFill>
+                      <a:prstDash val="solid"/>
+                      <a:round/>
+                      <a:headEnd type="none" w="med" len="med"/>
+                      <a:tailEnd type="none" w="med" len="med"/>
+                    </a:lnL>
+                    <a:lnR w="6350" cap="flat" cmpd="sng" algn="ctr">
+                      <a:solidFill>
+                        <a:srgbClr val="D9E2DD"/>
+                      </a:solidFill>
+                      <a:prstDash val="solid"/>
+                      <a:round/>
+                      <a:headEnd type="none" w="med" len="med"/>
+                      <a:tailEnd type="none" w="med" len="med"/>
+                    </a:lnR>
+                    <a:lnT w="6350" cap="flat" cmpd="sng" algn="ctr">
+                      <a:solidFill>
+                        <a:srgbClr val="D9E2DD"/>
+                      </a:solidFill>
+                      <a:prstDash val="solid"/>
+                      <a:round/>
+                      <a:headEnd type="none" w="med" len="med"/>
+                      <a:tailEnd type="none" w="med" len="med"/>
+                    </a:lnT>
+                    <a:lnB w="6350" cap="flat" cmpd="sng" algn="ctr">
+                      <a:solidFill>
+                        <a:srgbClr val="D9E2DD"/>
+                      </a:solidFill>
+                      <a:prstDash val="solid"/>
+                      <a:round/>
+                      <a:headEnd type="none" w="med" len="med"/>
+                      <a:tailEnd type="none" w="med" len="med"/>
+                    </a:lnB>
+                    <a:solidFill>
+                      <a:srgbClr val="FFFFFF"/>
+                    </a:solidFill>
+                  </a:tcPr>
+                </a:tc>
+                <a:tc>
+                  <a:txBody>
+                    <a:bodyPr/>
+                    <a:lstStyle/>
+                    <a:p>
+                      <a:pPr indent="0" marL="0">
+                        <a:buNone/>
+                      </a:pPr>
+                      <a:r>
+                        <a:rPr lang="en-US" sz="1300" dirty="0">
+                          <a:solidFill>
+                            <a:srgbClr val="1D2420"/>
+                          </a:solidFill>
+                          <a:latin typeface="Calibri" pitchFamily="34" charset="0"/>
+                          <a:ea typeface="Calibri" pitchFamily="34" charset="-122"/>
+                          <a:cs typeface="Calibri" pitchFamily="34" charset="-120"/>
+                        </a:rPr>
+                        <a:t>Upsell</a:t>
+                      </a:r>
+                      <a:endParaRPr lang="en-US" sz="1300" dirty="0">
+                        <a:latin typeface="Calibri" charset="0"/>
+                        <a:ea typeface="Calibri" charset="0"/>
+                        <a:cs typeface="Calibri" charset="0"/>
+                      </a:endParaRPr>
+                    </a:p>
+                  </a:txBody>
+                  <a:tcPr marL="54864" marR="54864" marT="54864" marB="54864" anchor="ctr">
+                    <a:lnL w="6350" cap="flat" cmpd="sng" algn="ctr">
+                      <a:solidFill>
+                        <a:srgbClr val="D9E2DD"/>
+                      </a:solidFill>
+                      <a:prstDash val="solid"/>
+                      <a:round/>
+                      <a:headEnd type="none" w="med" len="med"/>
+                      <a:tailEnd type="none" w="med" len="med"/>
+                    </a:lnL>
+                    <a:lnR w="6350" cap="flat" cmpd="sng" algn="ctr">
+                      <a:solidFill>
+                        <a:srgbClr val="D9E2DD"/>
+                      </a:solidFill>
+                      <a:prstDash val="solid"/>
+                      <a:round/>
+                      <a:headEnd type="none" w="med" len="med"/>
+                      <a:tailEnd type="none" w="med" len="med"/>
+                    </a:lnR>
+                    <a:lnT w="6350" cap="flat" cmpd="sng" algn="ctr">
+                      <a:solidFill>
+                        <a:srgbClr val="D9E2DD"/>
+                      </a:solidFill>
+                      <a:prstDash val="solid"/>
+                      <a:round/>
+                      <a:headEnd type="none" w="med" len="med"/>
+                      <a:tailEnd type="none" w="med" len="med"/>
+                    </a:lnT>
+                    <a:lnB w="6350" cap="flat" cmpd="sng" algn="ctr">
+                      <a:solidFill>
+                        <a:srgbClr val="D9E2DD"/>
+                      </a:solidFill>
+                      <a:prstDash val="solid"/>
+                      <a:round/>
+                      <a:headEnd type="none" w="med" len="med"/>
+                      <a:tailEnd type="none" w="med" len="med"/>
+                    </a:lnB>
+                    <a:solidFill>
+                      <a:srgbClr val="FFFFFF"/>
+                    </a:solidFill>
+                  </a:tcPr>
+                </a:tc>
+                <a:tc>
+                  <a:txBody>
+                    <a:bodyPr/>
+                    <a:lstStyle/>
+                    <a:p>
+                      <a:pPr indent="0" marL="0">
+                        <a:buNone/>
+                      </a:pPr>
+                      <a:r>
+                        <a:rPr lang="en-US" sz="1300" dirty="0">
+                          <a:solidFill>
+                            <a:srgbClr val="1D2420"/>
+                          </a:solidFill>
+                          <a:latin typeface="Calibri" pitchFamily="34" charset="0"/>
+                          <a:ea typeface="Calibri" pitchFamily="34" charset="-122"/>
+                          <a:cs typeface="Calibri" pitchFamily="34" charset="-120"/>
+                        </a:rPr>
+                        <a:t>$50K</a:t>
+                      </a:r>
+                      <a:endParaRPr lang="en-US" sz="1300" dirty="0">
+                        <a:latin typeface="Calibri" charset="0"/>
+                        <a:ea typeface="Calibri" charset="0"/>
+                        <a:cs typeface="Calibri" charset="0"/>
+                      </a:endParaRPr>
+                    </a:p>
+                  </a:txBody>
+                  <a:tcPr marL="54864" marR="54864" marT="54864" marB="54864" anchor="ctr">
+                    <a:lnL w="6350" cap="flat" cmpd="sng" algn="ctr">
+                      <a:solidFill>
+                        <a:srgbClr val="D9E2DD"/>
+                      </a:solidFill>
+                      <a:prstDash val="solid"/>
+                      <a:round/>
+                      <a:headEnd type="none" w="med" len="med"/>
+                      <a:tailEnd type="none" w="med" len="med"/>
+                    </a:lnL>
+                    <a:lnR w="6350" cap="flat" cmpd="sng" algn="ctr">
+                      <a:solidFill>
+                        <a:srgbClr val="D9E2DD"/>
+                      </a:solidFill>
+                      <a:prstDash val="solid"/>
+                      <a:round/>
+                      <a:headEnd type="none" w="med" len="med"/>
+                      <a:tailEnd type="none" w="med" len="med"/>
+                    </a:lnR>
+                    <a:lnT w="6350" cap="flat" cmpd="sng" algn="ctr">
+                      <a:solidFill>
+                        <a:srgbClr val="D9E2DD"/>
+                      </a:solidFill>
+                      <a:prstDash val="solid"/>
+                      <a:round/>
+                      <a:headEnd type="none" w="med" len="med"/>
+                      <a:tailEnd type="none" w="med" len="med"/>
+                    </a:lnT>
+                    <a:lnB w="6350" cap="flat" cmpd="sng" algn="ctr">
+                      <a:solidFill>
+                        <a:srgbClr val="D9E2DD"/>
+                      </a:solidFill>
+                      <a:prstDash val="solid"/>
+                      <a:round/>
+                      <a:headEnd type="none" w="med" len="med"/>
+                      <a:tailEnd type="none" w="med" len="med"/>
+                    </a:lnB>
+                    <a:solidFill>
+                      <a:srgbClr val="FFFFFF"/>
+                    </a:solidFill>
+                  </a:tcPr>
+                </a:tc>
+                <a:tc>
+                  <a:txBody>
+                    <a:bodyPr/>
+                    <a:lstStyle/>
+                    <a:p>
+                      <a:pPr indent="0" marL="0">
+                        <a:buNone/>
+                      </a:pPr>
+                      <a:r>
+                        <a:rPr lang="en-US" sz="1300" dirty="0">
+                          <a:solidFill>
+                            <a:srgbClr val="1D2420"/>
+                          </a:solidFill>
+                          <a:latin typeface="Calibri" pitchFamily="34" charset="0"/>
+                          <a:ea typeface="Calibri" pitchFamily="34" charset="-122"/>
+                          <a:cs typeface="Calibri" pitchFamily="34" charset="-120"/>
+                        </a:rPr>
+                        <a:t>Mesa dedicada, nuevas marcas y entrada a Perú</a:t>
+                      </a:r>
+                      <a:endParaRPr lang="en-US" sz="1300" dirty="0">
+                        <a:latin typeface="Calibri" charset="0"/>
+                        <a:ea typeface="Calibri" charset="0"/>
+                        <a:cs typeface="Calibri" charset="0"/>
+                      </a:endParaRPr>
+                    </a:p>
+                  </a:txBody>
+                  <a:tcPr marL="54864" marR="54864" marT="54864" marB="54864" anchor="ctr">
+                    <a:lnL w="6350" cap="flat" cmpd="sng" algn="ctr">
+                      <a:solidFill>
+                        <a:srgbClr val="D9E2DD"/>
+                      </a:solidFill>
+                      <a:prstDash val="solid"/>
+                      <a:round/>
+                      <a:headEnd type="none" w="med" len="med"/>
+                      <a:tailEnd type="none" w="med" len="med"/>
+                    </a:lnL>
+                    <a:lnR w="6350" cap="flat" cmpd="sng" algn="ctr">
+                      <a:solidFill>
+                        <a:srgbClr val="D9E2DD"/>
+                      </a:solidFill>
+                      <a:prstDash val="solid"/>
+                      <a:round/>
+                      <a:headEnd type="none" w="med" len="med"/>
+                      <a:tailEnd type="none" w="med" len="med"/>
+                    </a:lnR>
+                    <a:lnT w="6350" cap="flat" cmpd="sng" algn="ctr">
+                      <a:solidFill>
+                        <a:srgbClr val="D9E2DD"/>
+                      </a:solidFill>
+                      <a:prstDash val="solid"/>
+                      <a:round/>
+                      <a:headEnd type="none" w="med" len="med"/>
+                      <a:tailEnd type="none" w="med" len="med"/>
+                    </a:lnT>
+                    <a:lnB w="6350" cap="flat" cmpd="sng" algn="ctr">
+                      <a:solidFill>
+                        <a:srgbClr val="D9E2DD"/>
+                      </a:solidFill>
+                      <a:prstDash val="solid"/>
+                      <a:round/>
+                      <a:headEnd type="none" w="med" len="med"/>
+                      <a:tailEnd type="none" w="med" len="med"/>
+                    </a:lnB>
+                    <a:solidFill>
+                      <a:srgbClr val="FFFFFF"/>
+                    </a:solidFill>
+                  </a:tcPr>
+                </a:tc>
+              </a:tr>
+              <a:tr h="420624">
+                <a:tc>
+                  <a:txBody>
+                    <a:bodyPr/>
+                    <a:lstStyle/>
+                    <a:p>
+                      <a:pPr indent="0" marL="0">
+                        <a:buNone/>
+                      </a:pPr>
+                      <a:r>
+                        <a:rPr lang="en-US" sz="1300" dirty="0">
+                          <a:solidFill>
+                            <a:srgbClr val="1D2420"/>
+                          </a:solidFill>
+                          <a:latin typeface="Calibri" pitchFamily="34" charset="0"/>
+                          <a:ea typeface="Calibri" pitchFamily="34" charset="-122"/>
+                          <a:cs typeface="Calibri" pitchFamily="34" charset="-120"/>
+                        </a:rPr>
+                        <a:t>Jugamax</a:t>
+                      </a:r>
+                      <a:endParaRPr lang="en-US" sz="1300" dirty="0">
+                        <a:latin typeface="Calibri" charset="0"/>
+                        <a:ea typeface="Calibri" charset="0"/>
+                        <a:cs typeface="Calibri" charset="0"/>
+                      </a:endParaRPr>
+                    </a:p>
+                  </a:txBody>
+                  <a:tcPr marL="54864" marR="54864" marT="54864" marB="54864" anchor="ctr">
+                    <a:lnL w="6350" cap="flat" cmpd="sng" algn="ctr">
+                      <a:solidFill>
+                        <a:srgbClr val="D9E2DD"/>
+                      </a:solidFill>
+                      <a:prstDash val="solid"/>
+                      <a:round/>
+                      <a:headEnd type="none" w="med" len="med"/>
+                      <a:tailEnd type="none" w="med" len="med"/>
+                    </a:lnL>
+                    <a:lnR w="6350" cap="flat" cmpd="sng" algn="ctr">
+                      <a:solidFill>
+                        <a:srgbClr val="D9E2DD"/>
+                      </a:solidFill>
+                      <a:prstDash val="solid"/>
+                      <a:round/>
+                      <a:headEnd type="none" w="med" len="med"/>
+                      <a:tailEnd type="none" w="med" len="med"/>
+                    </a:lnR>
+                    <a:lnT w="6350" cap="flat" cmpd="sng" algn="ctr">
+                      <a:solidFill>
+                        <a:srgbClr val="D9E2DD"/>
+                      </a:solidFill>
+                      <a:prstDash val="solid"/>
+                      <a:round/>
+                      <a:headEnd type="none" w="med" len="med"/>
+                      <a:tailEnd type="none" w="med" len="med"/>
+                    </a:lnT>
+                    <a:lnB w="6350" cap="flat" cmpd="sng" algn="ctr">
+                      <a:solidFill>
+                        <a:srgbClr val="D9E2DD"/>
+                      </a:solidFill>
+                      <a:prstDash val="solid"/>
+                      <a:round/>
+                      <a:headEnd type="none" w="med" len="med"/>
+                      <a:tailEnd type="none" w="med" len="med"/>
+                    </a:lnB>
+                    <a:solidFill>
+                      <a:srgbClr val="FFFFFF"/>
+                    </a:solidFill>
+                  </a:tcPr>
+                </a:tc>
+                <a:tc>
+                  <a:txBody>
+                    <a:bodyPr/>
+                    <a:lstStyle/>
+                    <a:p>
+                      <a:pPr indent="0" marL="0">
+                        <a:buNone/>
+                      </a:pPr>
+                      <a:r>
+                        <a:rPr lang="en-US" sz="1300" dirty="0">
+                          <a:solidFill>
+                            <a:srgbClr val="1D2420"/>
+                          </a:solidFill>
+                          <a:latin typeface="Calibri" pitchFamily="34" charset="0"/>
+                          <a:ea typeface="Calibri" pitchFamily="34" charset="-122"/>
+                          <a:cs typeface="Calibri" pitchFamily="34" charset="-120"/>
+                        </a:rPr>
+                        <a:t>Por confirmar</a:t>
+                      </a:r>
+                      <a:endParaRPr lang="en-US" sz="1300" dirty="0">
+                        <a:latin typeface="Calibri" charset="0"/>
+                        <a:ea typeface="Calibri" charset="0"/>
+                        <a:cs typeface="Calibri" charset="0"/>
+                      </a:endParaRPr>
+                    </a:p>
+                  </a:txBody>
+                  <a:tcPr marL="54864" marR="54864" marT="54864" marB="54864" anchor="ctr">
+                    <a:lnL w="6350" cap="flat" cmpd="sng" algn="ctr">
+                      <a:solidFill>
+                        <a:srgbClr val="D9E2DD"/>
+                      </a:solidFill>
+                      <a:prstDash val="solid"/>
+                      <a:round/>
+                      <a:headEnd type="none" w="med" len="med"/>
+                      <a:tailEnd type="none" w="med" len="med"/>
+                    </a:lnL>
+                    <a:lnR w="6350" cap="flat" cmpd="sng" algn="ctr">
+                      <a:solidFill>
+                        <a:srgbClr val="D9E2DD"/>
+                      </a:solidFill>
+                      <a:prstDash val="solid"/>
+                      <a:round/>
+                      <a:headEnd type="none" w="med" len="med"/>
+                      <a:tailEnd type="none" w="med" len="med"/>
+                    </a:lnR>
+                    <a:lnT w="6350" cap="flat" cmpd="sng" algn="ctr">
+                      <a:solidFill>
+                        <a:srgbClr val="D9E2DD"/>
+                      </a:solidFill>
+                      <a:prstDash val="solid"/>
+                      <a:round/>
+                      <a:headEnd type="none" w="med" len="med"/>
+                      <a:tailEnd type="none" w="med" len="med"/>
+                    </a:lnT>
+                    <a:lnB w="6350" cap="flat" cmpd="sng" algn="ctr">
+                      <a:solidFill>
+                        <a:srgbClr val="D9E2DD"/>
+                      </a:solidFill>
+                      <a:prstDash val="solid"/>
+                      <a:round/>
+                      <a:headEnd type="none" w="med" len="med"/>
+                      <a:tailEnd type="none" w="med" len="med"/>
+                    </a:lnB>
+                    <a:solidFill>
+                      <a:srgbClr val="FFFFFF"/>
+                    </a:solidFill>
+                  </a:tcPr>
+                </a:tc>
+                <a:tc>
+                  <a:txBody>
+                    <a:bodyPr/>
+                    <a:lstStyle/>
+                    <a:p>
+                      <a:pPr indent="0" marL="0">
+                        <a:buNone/>
+                      </a:pPr>
+                      <a:r>
+                        <a:rPr lang="en-US" sz="1300" dirty="0">
+                          <a:solidFill>
+                            <a:srgbClr val="1D2420"/>
+                          </a:solidFill>
+                          <a:latin typeface="Calibri" pitchFamily="34" charset="0"/>
+                          <a:ea typeface="Calibri" pitchFamily="34" charset="-122"/>
+                          <a:cs typeface="Calibri" pitchFamily="34" charset="-120"/>
+                        </a:rPr>
+                        <a:t>Upsell</a:t>
+                      </a:r>
+                      <a:endParaRPr lang="en-US" sz="1300" dirty="0">
+                        <a:latin typeface="Calibri" charset="0"/>
+                        <a:ea typeface="Calibri" charset="0"/>
+                        <a:cs typeface="Calibri" charset="0"/>
+                      </a:endParaRPr>
+                    </a:p>
+                  </a:txBody>
+                  <a:tcPr marL="54864" marR="54864" marT="54864" marB="54864" anchor="ctr">
+                    <a:lnL w="6350" cap="flat" cmpd="sng" algn="ctr">
+                      <a:solidFill>
+                        <a:srgbClr val="D9E2DD"/>
+                      </a:solidFill>
+                      <a:prstDash val="solid"/>
+                      <a:round/>
+                      <a:headEnd type="none" w="med" len="med"/>
+                      <a:tailEnd type="none" w="med" len="med"/>
+                    </a:lnL>
+                    <a:lnR w="6350" cap="flat" cmpd="sng" algn="ctr">
+                      <a:solidFill>
+                        <a:srgbClr val="D9E2DD"/>
+                      </a:solidFill>
+                      <a:prstDash val="solid"/>
+                      <a:round/>
+                      <a:headEnd type="none" w="med" len="med"/>
+                      <a:tailEnd type="none" w="med" len="med"/>
+                    </a:lnR>
+                    <a:lnT w="6350" cap="flat" cmpd="sng" algn="ctr">
+                      <a:solidFill>
+                        <a:srgbClr val="D9E2DD"/>
+                      </a:solidFill>
+                      <a:prstDash val="solid"/>
+                      <a:round/>
+                      <a:headEnd type="none" w="med" len="med"/>
+                      <a:tailEnd type="none" w="med" len="med"/>
+                    </a:lnT>
+                    <a:lnB w="6350" cap="flat" cmpd="sng" algn="ctr">
+                      <a:solidFill>
+                        <a:srgbClr val="D9E2DD"/>
+                      </a:solidFill>
+                      <a:prstDash val="solid"/>
+                      <a:round/>
+                      <a:headEnd type="none" w="med" len="med"/>
+                      <a:tailEnd type="none" w="med" len="med"/>
+                    </a:lnB>
+                    <a:solidFill>
+                      <a:srgbClr val="FFFFFF"/>
+                    </a:solidFill>
+                  </a:tcPr>
+                </a:tc>
+                <a:tc>
+                  <a:txBody>
+                    <a:bodyPr/>
+                    <a:lstStyle/>
+                    <a:p>
+                      <a:pPr indent="0" marL="0">
+                        <a:buNone/>
+                      </a:pPr>
+                      <a:r>
+                        <a:rPr lang="en-US" sz="1300" dirty="0">
+                          <a:solidFill>
+                            <a:srgbClr val="1D2420"/>
+                          </a:solidFill>
+                          <a:latin typeface="Calibri" pitchFamily="34" charset="0"/>
+                          <a:ea typeface="Calibri" pitchFamily="34" charset="-122"/>
+                          <a:cs typeface="Calibri" pitchFamily="34" charset="-120"/>
+                        </a:rPr>
+                        <a:t>$15K</a:t>
+                      </a:r>
+                      <a:endParaRPr lang="en-US" sz="1300" dirty="0">
+                        <a:latin typeface="Calibri" charset="0"/>
+                        <a:ea typeface="Calibri" charset="0"/>
+                        <a:cs typeface="Calibri" charset="0"/>
+                      </a:endParaRPr>
+                    </a:p>
+                  </a:txBody>
+                  <a:tcPr marL="54864" marR="54864" marT="54864" marB="54864" anchor="ctr">
+                    <a:lnL w="6350" cap="flat" cmpd="sng" algn="ctr">
+                      <a:solidFill>
+                        <a:srgbClr val="D9E2DD"/>
+                      </a:solidFill>
+                      <a:prstDash val="solid"/>
+                      <a:round/>
+                      <a:headEnd type="none" w="med" len="med"/>
+                      <a:tailEnd type="none" w="med" len="med"/>
+                    </a:lnL>
+                    <a:lnR w="6350" cap="flat" cmpd="sng" algn="ctr">
+                      <a:solidFill>
+                        <a:srgbClr val="D9E2DD"/>
+                      </a:solidFill>
+                      <a:prstDash val="solid"/>
+                      <a:round/>
+                      <a:headEnd type="none" w="med" len="med"/>
+                      <a:tailEnd type="none" w="med" len="med"/>
+                    </a:lnR>
+                    <a:lnT w="6350" cap="flat" cmpd="sng" algn="ctr">
+                      <a:solidFill>
+                        <a:srgbClr val="D9E2DD"/>
+                      </a:solidFill>
+                      <a:prstDash val="solid"/>
+                      <a:round/>
+                      <a:headEnd type="none" w="med" len="med"/>
+                      <a:tailEnd type="none" w="med" len="med"/>
+                    </a:lnT>
+                    <a:lnB w="6350" cap="flat" cmpd="sng" algn="ctr">
+                      <a:solidFill>
+                        <a:srgbClr val="D9E2DD"/>
+                      </a:solidFill>
+                      <a:prstDash val="solid"/>
+                      <a:round/>
+                      <a:headEnd type="none" w="med" len="med"/>
+                      <a:tailEnd type="none" w="med" len="med"/>
+                    </a:lnB>
+                    <a:solidFill>
+                      <a:srgbClr val="FFFFFF"/>
+                    </a:solidFill>
+                  </a:tcPr>
+                </a:tc>
+                <a:tc>
+                  <a:txBody>
+                    <a:bodyPr/>
+                    <a:lstStyle/>
+                    <a:p>
+                      <a:pPr indent="0" marL="0">
+                        <a:buNone/>
+                      </a:pPr>
+                      <a:r>
+                        <a:rPr lang="en-US" sz="1300" dirty="0">
+                          <a:solidFill>
+                            <a:srgbClr val="1D2420"/>
+                          </a:solidFill>
+                          <a:latin typeface="Calibri" pitchFamily="34" charset="0"/>
+                          <a:ea typeface="Calibri" pitchFamily="34" charset="-122"/>
+                          <a:cs typeface="Calibri" pitchFamily="34" charset="-120"/>
+                        </a:rPr>
+                        <a:t>Promociones, ruletas y microlímites</a:t>
+                      </a:r>
+                      <a:endParaRPr lang="en-US" sz="1300" dirty="0">
+                        <a:latin typeface="Calibri" charset="0"/>
+                        <a:ea typeface="Calibri" charset="0"/>
+                        <a:cs typeface="Calibri" charset="0"/>
+                      </a:endParaRPr>
+                    </a:p>
+                  </a:txBody>
+                  <a:tcPr marL="54864" marR="54864" marT="54864" marB="54864" anchor="ctr">
+                    <a:lnL w="6350" cap="flat" cmpd="sng" algn="ctr">
+                      <a:solidFill>
+                        <a:srgbClr val="D9E2DD"/>
+                      </a:solidFill>
+                      <a:prstDash val="solid"/>
+                      <a:round/>
+                      <a:headEnd type="none" w="med" len="med"/>
+                      <a:tailEnd type="none" w="med" len="med"/>
+                    </a:lnL>
+                    <a:lnR w="6350" cap="flat" cmpd="sng" algn="ctr">
+                      <a:solidFill>
+                        <a:srgbClr val="D9E2DD"/>
+                      </a:solidFill>
+                      <a:prstDash val="solid"/>
+                      <a:round/>
+                      <a:headEnd type="none" w="med" len="med"/>
+                      <a:tailEnd type="none" w="med" len="med"/>
+                    </a:lnR>
+                    <a:lnT w="6350" cap="flat" cmpd="sng" algn="ctr">
+                      <a:solidFill>
+                        <a:srgbClr val="D9E2DD"/>
+                      </a:solidFill>
+                      <a:prstDash val="solid"/>
+                      <a:round/>
+                      <a:headEnd type="none" w="med" len="med"/>
+                      <a:tailEnd type="none" w="med" len="med"/>
+                    </a:lnT>
+                    <a:lnB w="6350" cap="flat" cmpd="sng" algn="ctr">
+                      <a:solidFill>
+                        <a:srgbClr val="D9E2DD"/>
+                      </a:solidFill>
+                      <a:prstDash val="solid"/>
+                      <a:round/>
+                      <a:headEnd type="none" w="med" len="med"/>
+                      <a:tailEnd type="none" w="med" len="med"/>
+                    </a:lnB>
+                    <a:solidFill>
+                      <a:srgbClr val="FFFFFF"/>
+                    </a:solidFill>
+                  </a:tcPr>
+                </a:tc>
+              </a:tr>
+            </a:tbl>
+          </a:graphicData>
+        </a:graphic>
+      </p:graphicFrame>
+      <p:sp>
+        <p:nvSpPr>
+          <p:cNvPr id="4" name="Text 1"/>
           <p:cNvSpPr txBox="1"/>
           <p:nvPr/>
         </p:nvSpPr>
         <p:spPr>
           <a:xfrm>
-            <a:off x="822960" y="1508760"/>
-            <a:ext cx="3017520" cy="548640"/>
+            <a:off x="548640" y="5943600"/>
+            <a:ext cx="11064240" cy="365760"/>
           </a:xfrm>
           <a:prstGeom prst="rect">
             <a:avLst/>
@@ -7544,449 +11502,14 @@
               <a:buNone/>
             </a:pPr>
             <a:r>
-              <a:rPr lang="en-US" sz="2600" b="1" dirty="0">
-                <a:solidFill>
-                  <a:schemeClr val="accent2"/>
-                </a:solidFill>
-                <a:latin typeface="Cambria" pitchFamily="34" charset="0"/>
-                <a:ea typeface="Cambria" pitchFamily="34" charset="-122"/>
-                <a:cs typeface="Cambria" pitchFamily="34" charset="-120"/>
+              <a:rPr lang="en-US" sz="1200" i="1" dirty="0">
+                <a:solidFill>
+                  <a:schemeClr val="tx2"/>
+                </a:solidFill>
               </a:rPr>
-              <a:t>Q4 2026</a:t>
-            </a:r>
-            <a:endParaRPr lang="en-US" sz="2600" dirty="0"/>
-          </a:p>
-        </p:txBody>
-      </p:sp>
-      <p:sp>
-        <p:nvSpPr>
-          <p:cNvPr id="5" name="Text 3"/>
-          <p:cNvSpPr txBox="1"/>
-          <p:nvPr/>
-        </p:nvSpPr>
-        <p:spPr>
-          <a:xfrm>
-            <a:off x="822960" y="2194560"/>
-            <a:ext cx="3017520" cy="3840480"/>
-          </a:xfrm>
-          <a:prstGeom prst="rect">
-            <a:avLst/>
-          </a:prstGeom>
-          <a:noFill/>
-          <a:ln/>
-        </p:spPr>
-        <p:txBody>
-          <a:bodyPr wrap="square" lIns="0" tIns="0" rIns="0" bIns="0" rtlCol="0" anchor="t"/>
-          <a:lstStyle/>
-          <a:p>
-            <a:pPr marL="342900" indent="-342900">
-              <a:spcAft>
-                <a:spcPts val="1000"/>
-              </a:spcAft>
-              <a:buSzPct val="100000"/>
-              <a:buChar char="•"/>
-            </a:pPr>
-            <a:r>
-              <a:rPr lang="en-US" sz="1500" dirty="0">
-                <a:solidFill>
-                  <a:schemeClr val="bg1"/>
-                </a:solidFill>
-              </a:rPr>
-              <a:t>Go-live Ganamos + war-room</a:t>
-            </a:r>
-            <a:endParaRPr lang="en-US" sz="1500" dirty="0"/>
-          </a:p>
-          <a:p>
-            <a:pPr marL="342900" indent="-342900">
-              <a:spcAft>
-                <a:spcPts val="1000"/>
-              </a:spcAft>
-              <a:buSzPct val="100000"/>
-              <a:buChar char="•"/>
-            </a:pPr>
-            <a:r>
-              <a:rPr lang="en-US" sz="1500" dirty="0">
-                <a:solidFill>
-                  <a:schemeClr val="bg1"/>
-                </a:solidFill>
-              </a:rPr>
-              <a:t>DD Apuestas Royal; alta GoGo Royal</a:t>
-            </a:r>
-            <a:endParaRPr lang="en-US" sz="1500" dirty="0"/>
-          </a:p>
-          <a:p>
-            <a:pPr marL="342900" indent="-342900">
-              <a:spcAft>
-                <a:spcPts val="1000"/>
-              </a:spcAft>
-              <a:buSzPct val="100000"/>
-              <a:buChar char="•"/>
-            </a:pPr>
-            <a:r>
-              <a:rPr lang="en-US" sz="1500" dirty="0">
-                <a:solidFill>
-                  <a:schemeClr val="bg1"/>
-                </a:solidFill>
-              </a:rPr>
-              <a:t>Desbloquear Distra y firmar Cirsa</a:t>
-            </a:r>
-            <a:endParaRPr lang="en-US" sz="1500" dirty="0"/>
-          </a:p>
-          <a:p>
-            <a:pPr marL="342900" indent="-342900">
-              <a:spcAft>
-                <a:spcPts val="1000"/>
-              </a:spcAft>
-              <a:buSzPct val="100000"/>
-              <a:buChar char="•"/>
-            </a:pPr>
-            <a:r>
-              <a:rPr lang="en-US" sz="1500" dirty="0">
-                <a:solidFill>
-                  <a:schemeClr val="bg1"/>
-                </a:solidFill>
-              </a:rPr>
-              <a:t>Ejecutar plan de activación</a:t>
-            </a:r>
-            <a:endParaRPr lang="en-US" sz="1500" dirty="0"/>
-          </a:p>
-          <a:p>
-            <a:pPr marL="342900" indent="-342900">
-              <a:spcAft>
-                <a:spcPts val="1000"/>
-              </a:spcAft>
-              <a:buSzPct val="100000"/>
-              <a:buChar char="•"/>
-            </a:pPr>
-            <a:r>
-              <a:rPr lang="en-US" sz="1500" dirty="0">
-                <a:solidFill>
-                  <a:schemeClr val="bg1"/>
-                </a:solidFill>
-              </a:rPr>
-              <a:t>Agreegain, Loteka, Breeze, Quartzplay</a:t>
-            </a:r>
-            <a:endParaRPr lang="en-US" sz="1500" dirty="0"/>
-          </a:p>
-        </p:txBody>
-      </p:sp>
-      <p:sp>
-        <p:nvSpPr>
-          <p:cNvPr id="6" name="q1"/>
-          <p:cNvSpPr/>
-          <p:nvPr/>
-        </p:nvSpPr>
-        <p:spPr>
-          <a:xfrm>
-            <a:off x="4297680" y="1325880"/>
-            <a:ext cx="3520440" cy="4892040"/>
-          </a:xfrm>
-          <a:prstGeom prst="roundRect">
-            <a:avLst>
-              <a:gd name="adj" fmla="val 2078"/>
-            </a:avLst>
-          </a:prstGeom>
-          <a:solidFill>
-            <a:schemeClr val="bg2"/>
-          </a:solidFill>
-          <a:ln w="12700">
-            <a:solidFill>
-              <a:schemeClr val="bg2"/>
-            </a:solidFill>
-            <a:prstDash val="solid"/>
-          </a:ln>
-        </p:spPr>
-      </p:sp>
-      <p:sp>
-        <p:nvSpPr>
-          <p:cNvPr id="7" name="Text 5"/>
-          <p:cNvSpPr txBox="1"/>
-          <p:nvPr/>
-        </p:nvSpPr>
-        <p:spPr>
-          <a:xfrm>
-            <a:off x="4572000" y="1508760"/>
-            <a:ext cx="3017520" cy="548640"/>
-          </a:xfrm>
-          <a:prstGeom prst="rect">
-            <a:avLst/>
-          </a:prstGeom>
-          <a:noFill/>
-          <a:ln/>
-        </p:spPr>
-        <p:txBody>
-          <a:bodyPr wrap="square" lIns="0" tIns="0" rIns="0" bIns="0" rtlCol="0" anchor="t"/>
-          <a:lstStyle/>
-          <a:p>
-            <a:pPr indent="0" marL="0">
-              <a:buNone/>
-            </a:pPr>
-            <a:r>
-              <a:rPr lang="en-US" sz="2600" b="1" dirty="0">
-                <a:solidFill>
-                  <a:schemeClr val="tx2"/>
-                </a:solidFill>
-                <a:latin typeface="Cambria" pitchFamily="34" charset="0"/>
-                <a:ea typeface="Cambria" pitchFamily="34" charset="-122"/>
-                <a:cs typeface="Cambria" pitchFamily="34" charset="-120"/>
-              </a:rPr>
-              <a:t>Q1 2027</a:t>
-            </a:r>
-            <a:endParaRPr lang="en-US" sz="2600" dirty="0"/>
-          </a:p>
-        </p:txBody>
-      </p:sp>
-      <p:sp>
-        <p:nvSpPr>
-          <p:cNvPr id="8" name="Text 6"/>
-          <p:cNvSpPr txBox="1"/>
-          <p:nvPr/>
-        </p:nvSpPr>
-        <p:spPr>
-          <a:xfrm>
-            <a:off x="4572000" y="2194560"/>
-            <a:ext cx="3017520" cy="3840480"/>
-          </a:xfrm>
-          <a:prstGeom prst="rect">
-            <a:avLst/>
-          </a:prstGeom>
-          <a:noFill/>
-          <a:ln/>
-        </p:spPr>
-        <p:txBody>
-          <a:bodyPr wrap="square" lIns="0" tIns="0" rIns="0" bIns="0" rtlCol="0" anchor="t"/>
-          <a:lstStyle/>
-          <a:p>
-            <a:pPr marL="342900" indent="-342900">
-              <a:spcAft>
-                <a:spcPts val="1000"/>
-              </a:spcAft>
-              <a:buSzPct val="100000"/>
-              <a:buChar char="•"/>
-            </a:pPr>
-            <a:r>
-              <a:rPr lang="en-US" sz="1500" dirty="0">
-                <a:solidFill>
-                  <a:schemeClr val="tx1"/>
-                </a:solidFill>
-              </a:rPr>
-              <a:t>Programa México: Codere + upsell Ezugi</a:t>
-            </a:r>
-            <a:endParaRPr lang="en-US" sz="1500" dirty="0"/>
-          </a:p>
-          <a:p>
-            <a:pPr marL="342900" indent="-342900">
-              <a:spcAft>
-                <a:spcPts val="1000"/>
-              </a:spcAft>
-              <a:buSzPct val="100000"/>
-              <a:buChar char="•"/>
-            </a:pPr>
-            <a:r>
-              <a:rPr lang="en-US" sz="1500" dirty="0">
-                <a:solidFill>
-                  <a:schemeClr val="tx1"/>
-                </a:solidFill>
-              </a:rPr>
-              <a:t>Cerrar Zlot y Vegas Live</a:t>
-            </a:r>
-            <a:endParaRPr lang="en-US" sz="1500" dirty="0"/>
-          </a:p>
-          <a:p>
-            <a:pPr marL="342900" indent="-342900">
-              <a:spcAft>
-                <a:spcPts val="1000"/>
-              </a:spcAft>
-              <a:buSzPct val="100000"/>
-              <a:buChar char="•"/>
-            </a:pPr>
-            <a:r>
-              <a:rPr lang="en-US" sz="1500" dirty="0">
-                <a:solidFill>
-                  <a:schemeClr val="tx1"/>
-                </a:solidFill>
-              </a:rPr>
-              <a:t>Paraguay: confirmar 4–5 opps &gt; €50K</a:t>
-            </a:r>
-            <a:endParaRPr lang="en-US" sz="1500" dirty="0"/>
-          </a:p>
-          <a:p>
-            <a:pPr marL="342900" indent="-342900">
-              <a:spcAft>
-                <a:spcPts val="1000"/>
-              </a:spcAft>
-              <a:buSzPct val="100000"/>
-              <a:buChar char="•"/>
-            </a:pPr>
-            <a:r>
-              <a:rPr lang="en-US" sz="1500" dirty="0">
-                <a:solidFill>
-                  <a:schemeClr val="tx1"/>
-                </a:solidFill>
-              </a:rPr>
-              <a:t>Integración Distra y Trickless (+150%)</a:t>
-            </a:r>
-            <a:endParaRPr lang="en-US" sz="1500" dirty="0"/>
-          </a:p>
-        </p:txBody>
-      </p:sp>
-      <p:sp>
-        <p:nvSpPr>
-          <p:cNvPr id="9" name="q2"/>
-          <p:cNvSpPr/>
-          <p:nvPr/>
-        </p:nvSpPr>
-        <p:spPr>
-          <a:xfrm>
-            <a:off x="8046720" y="1325880"/>
-            <a:ext cx="3520440" cy="4892040"/>
-          </a:xfrm>
-          <a:prstGeom prst="roundRect">
-            <a:avLst>
-              <a:gd name="adj" fmla="val 2078"/>
-            </a:avLst>
-          </a:prstGeom>
-          <a:solidFill>
-            <a:schemeClr val="bg2"/>
-          </a:solidFill>
-          <a:ln w="12700">
-            <a:solidFill>
-              <a:schemeClr val="bg2"/>
-            </a:solidFill>
-            <a:prstDash val="solid"/>
-          </a:ln>
-        </p:spPr>
-      </p:sp>
-      <p:sp>
-        <p:nvSpPr>
-          <p:cNvPr id="10" name="Text 8"/>
-          <p:cNvSpPr txBox="1"/>
-          <p:nvPr/>
-        </p:nvSpPr>
-        <p:spPr>
-          <a:xfrm>
-            <a:off x="8321040" y="1508760"/>
-            <a:ext cx="3017520" cy="548640"/>
-          </a:xfrm>
-          <a:prstGeom prst="rect">
-            <a:avLst/>
-          </a:prstGeom>
-          <a:noFill/>
-          <a:ln/>
-        </p:spPr>
-        <p:txBody>
-          <a:bodyPr wrap="square" lIns="0" tIns="0" rIns="0" bIns="0" rtlCol="0" anchor="t"/>
-          <a:lstStyle/>
-          <a:p>
-            <a:pPr indent="0" marL="0">
-              <a:buNone/>
-            </a:pPr>
-            <a:r>
-              <a:rPr lang="en-US" sz="2600" b="1" dirty="0">
-                <a:solidFill>
-                  <a:schemeClr val="tx2"/>
-                </a:solidFill>
-                <a:latin typeface="Cambria" pitchFamily="34" charset="0"/>
-                <a:ea typeface="Cambria" pitchFamily="34" charset="-122"/>
-                <a:cs typeface="Cambria" pitchFamily="34" charset="-120"/>
-              </a:rPr>
-              <a:t>Q2–Q4 2027</a:t>
-            </a:r>
-            <a:endParaRPr lang="en-US" sz="2600" dirty="0"/>
-          </a:p>
-        </p:txBody>
-      </p:sp>
-      <p:sp>
-        <p:nvSpPr>
-          <p:cNvPr id="11" name="Text 9"/>
-          <p:cNvSpPr txBox="1"/>
-          <p:nvPr/>
-        </p:nvSpPr>
-        <p:spPr>
-          <a:xfrm>
-            <a:off x="8321040" y="2194560"/>
-            <a:ext cx="3017520" cy="3840480"/>
-          </a:xfrm>
-          <a:prstGeom prst="rect">
-            <a:avLst/>
-          </a:prstGeom>
-          <a:noFill/>
-          <a:ln/>
-        </p:spPr>
-        <p:txBody>
-          <a:bodyPr wrap="square" lIns="0" tIns="0" rIns="0" bIns="0" rtlCol="0" anchor="t"/>
-          <a:lstStyle/>
-          <a:p>
-            <a:pPr marL="342900" indent="-342900">
-              <a:spcAft>
-                <a:spcPts val="1000"/>
-              </a:spcAft>
-              <a:buSzPct val="100000"/>
-              <a:buChar char="•"/>
-            </a:pPr>
-            <a:r>
-              <a:rPr lang="en-US" sz="1500" dirty="0">
-                <a:solidFill>
-                  <a:schemeClr val="tx1"/>
-                </a:solidFill>
-              </a:rPr>
-              <a:t>Go-live Grupo Royal y Grupo Distra</a:t>
-            </a:r>
-            <a:endParaRPr lang="en-US" sz="1500" dirty="0"/>
-          </a:p>
-          <a:p>
-            <a:pPr marL="342900" indent="-342900">
-              <a:spcAft>
-                <a:spcPts val="1000"/>
-              </a:spcAft>
-              <a:buSzPct val="100000"/>
-              <a:buChar char="•"/>
-            </a:pPr>
-            <a:r>
-              <a:rPr lang="en-US" sz="1500" dirty="0">
-                <a:solidFill>
-                  <a:schemeClr val="tx1"/>
-                </a:solidFill>
-              </a:rPr>
-              <a:t>QBR mensual main opps, trimestral live</a:t>
-            </a:r>
-            <a:endParaRPr lang="en-US" sz="1500" dirty="0"/>
-          </a:p>
-          <a:p>
-            <a:pPr marL="342900" indent="-342900">
-              <a:spcAft>
-                <a:spcPts val="1000"/>
-              </a:spcAft>
-              <a:buSzPct val="100000"/>
-              <a:buChar char="•"/>
-            </a:pPr>
-            <a:r>
-              <a:rPr lang="en-US" sz="1500" dirty="0">
-                <a:solidFill>
-                  <a:schemeClr val="tx1"/>
-                </a:solidFill>
-              </a:rPr>
-              <a:t>2+ mesas dedicadas o branded</a:t>
-            </a:r>
-            <a:endParaRPr lang="en-US" sz="1500" dirty="0"/>
-          </a:p>
-          <a:p>
-            <a:pPr marL="342900" indent="-342900">
-              <a:spcAft>
-                <a:spcPts val="1000"/>
-              </a:spcAft>
-              <a:buSzPct val="100000"/>
-              <a:buChar char="•"/>
-            </a:pPr>
-            <a:r>
-              <a:rPr lang="en-US" sz="1500" dirty="0">
-                <a:solidFill>
-                  <a:schemeClr val="tx1"/>
-                </a:solidFill>
-              </a:rPr>
-              <a:t>Campañas Liga MX y cross-sell</a:t>
-            </a:r>
-            <a:endParaRPr lang="en-US" sz="1500" dirty="0"/>
+              <a:t>Valores estimados por confirmar: $25K por operador nuevo (promedio Hot_Leads), $35–50K para plataformas y grupos. Aporte 2027: €62K / €88K / €142K.</a:t>
+            </a:r>
+            <a:endParaRPr lang="en-US" sz="1200" dirty="0"/>
           </a:p>
         </p:txBody>
       </p:sp>
@@ -8070,6 +11593,1416 @@
         </p:nvSpPr>
         <p:spPr>
           <a:xfrm>
+            <a:off x="548640" y="320040"/>
+            <a:ext cx="11064240" cy="777240"/>
+          </a:xfrm>
+          <a:prstGeom prst="rect">
+            <a:avLst/>
+          </a:prstGeom>
+          <a:noFill/>
+          <a:ln/>
+        </p:spPr>
+        <p:txBody>
+          <a:bodyPr wrap="square" rtlCol="0" anchor="ctr"/>
+          <a:lstStyle/>
+          <a:p>
+            <a:pPr algn="l" indent="0" marL="0">
+              <a:buNone/>
+            </a:pPr>
+            <a:r>
+              <a:rPr lang="en-US" sz="3000" b="1" dirty="0">
+                <a:solidFill>
+                  <a:schemeClr val="tx2"/>
+                </a:solidFill>
+              </a:rPr>
+              <a:t>SBC Lisbon: prioridades inmediatas</a:t>
+            </a:r>
+            <a:endParaRPr lang="en-US" sz="3000" dirty="0"/>
+          </a:p>
+        </p:txBody>
+      </p:sp>
+      <p:sp>
+        <p:nvSpPr>
+          <p:cNvPr id="3" name="p0"/>
+          <p:cNvSpPr/>
+          <p:nvPr/>
+        </p:nvSpPr>
+        <p:spPr>
+          <a:xfrm>
+            <a:off x="548640" y="1325880"/>
+            <a:ext cx="3520440" cy="4892040"/>
+          </a:xfrm>
+          <a:prstGeom prst="roundRect">
+            <a:avLst>
+              <a:gd name="adj" fmla="val 2078"/>
+            </a:avLst>
+          </a:prstGeom>
+          <a:solidFill>
+            <a:schemeClr val="tx2"/>
+          </a:solidFill>
+          <a:ln w="12700">
+            <a:solidFill>
+              <a:schemeClr val="tx2"/>
+            </a:solidFill>
+            <a:prstDash val="solid"/>
+          </a:ln>
+        </p:spPr>
+      </p:sp>
+      <p:sp>
+        <p:nvSpPr>
+          <p:cNvPr id="4" name="Text 2"/>
+          <p:cNvSpPr txBox="1"/>
+          <p:nvPr/>
+        </p:nvSpPr>
+        <p:spPr>
+          <a:xfrm>
+            <a:off x="822960" y="1481328"/>
+            <a:ext cx="3017520" cy="502920"/>
+          </a:xfrm>
+          <a:prstGeom prst="rect">
+            <a:avLst/>
+          </a:prstGeom>
+          <a:noFill/>
+          <a:ln/>
+        </p:spPr>
+        <p:txBody>
+          <a:bodyPr wrap="square" lIns="0" tIns="0" rIns="0" bIns="0" rtlCol="0" anchor="t"/>
+          <a:lstStyle/>
+          <a:p>
+            <a:pPr indent="0" marL="0">
+              <a:buNone/>
+            </a:pPr>
+            <a:r>
+              <a:rPr lang="en-US" sz="2400" b="1" dirty="0">
+                <a:solidFill>
+                  <a:schemeClr val="accent2"/>
+                </a:solidFill>
+                <a:latin typeface="Cambria" pitchFamily="34" charset="0"/>
+                <a:ea typeface="Cambria" pitchFamily="34" charset="-122"/>
+                <a:cs typeface="Cambria" pitchFamily="34" charset="-120"/>
+              </a:rPr>
+              <a:t>Prioridad 1</a:t>
+            </a:r>
+            <a:endParaRPr lang="en-US" sz="2400" dirty="0"/>
+          </a:p>
+        </p:txBody>
+      </p:sp>
+      <p:sp>
+        <p:nvSpPr>
+          <p:cNvPr id="5" name="Text 3"/>
+          <p:cNvSpPr txBox="1"/>
+          <p:nvPr/>
+        </p:nvSpPr>
+        <p:spPr>
+          <a:xfrm>
+            <a:off x="822960" y="1984248"/>
+            <a:ext cx="3017520" cy="320040"/>
+          </a:xfrm>
+          <a:prstGeom prst="rect">
+            <a:avLst/>
+          </a:prstGeom>
+          <a:noFill/>
+          <a:ln/>
+        </p:spPr>
+        <p:txBody>
+          <a:bodyPr wrap="square" lIns="0" tIns="0" rIns="0" bIns="0" rtlCol="0" anchor="t"/>
+          <a:lstStyle/>
+          <a:p>
+            <a:pPr indent="0" marL="0">
+              <a:buNone/>
+            </a:pPr>
+            <a:r>
+              <a:rPr lang="en-US" sz="1400" i="1" dirty="0">
+                <a:solidFill>
+                  <a:schemeClr val="bg1"/>
+                </a:solidFill>
+              </a:rPr>
+              <a:t>Contratos, lanzamientos y finanzas</a:t>
+            </a:r>
+            <a:endParaRPr lang="en-US" sz="1400" dirty="0"/>
+          </a:p>
+        </p:txBody>
+      </p:sp>
+      <p:sp>
+        <p:nvSpPr>
+          <p:cNvPr id="6" name="Text 4"/>
+          <p:cNvSpPr txBox="1"/>
+          <p:nvPr/>
+        </p:nvSpPr>
+        <p:spPr>
+          <a:xfrm>
+            <a:off x="822960" y="2468880"/>
+            <a:ext cx="3017520" cy="3611880"/>
+          </a:xfrm>
+          <a:prstGeom prst="rect">
+            <a:avLst/>
+          </a:prstGeom>
+          <a:noFill/>
+          <a:ln/>
+        </p:spPr>
+        <p:txBody>
+          <a:bodyPr wrap="square" lIns="0" tIns="0" rIns="0" bIns="0" rtlCol="0" anchor="t"/>
+          <a:lstStyle/>
+          <a:p>
+            <a:pPr marL="342900" indent="-342900">
+              <a:spcAft>
+                <a:spcPts val="800"/>
+              </a:spcAft>
+              <a:buSzPct val="100000"/>
+              <a:buChar char="•"/>
+            </a:pPr>
+            <a:r>
+              <a:rPr lang="en-US" sz="1500" dirty="0">
+                <a:solidFill>
+                  <a:schemeClr val="bg1"/>
+                </a:solidFill>
+              </a:rPr>
+              <a:t>MasterBet365: contrato, DD y Promo Tools</a:t>
+            </a:r>
+            <a:endParaRPr lang="en-US" sz="1500" dirty="0"/>
+          </a:p>
+          <a:p>
+            <a:pPr marL="342900" indent="-342900">
+              <a:spcAft>
+                <a:spcPts val="800"/>
+              </a:spcAft>
+              <a:buSzPct val="100000"/>
+              <a:buChar char="•"/>
+            </a:pPr>
+            <a:r>
+              <a:rPr lang="en-US" sz="1500" dirty="0">
+                <a:solidFill>
+                  <a:schemeClr val="bg1"/>
+                </a:solidFill>
+              </a:rPr>
+              <a:t>Apuestas Royal: contrato y DD con Daniel Nunes</a:t>
+            </a:r>
+            <a:endParaRPr lang="en-US" sz="1500" dirty="0"/>
+          </a:p>
+          <a:p>
+            <a:pPr marL="342900" indent="-342900">
+              <a:spcAft>
+                <a:spcPts val="800"/>
+              </a:spcAft>
+              <a:buSzPct val="100000"/>
+              <a:buChar char="•"/>
+            </a:pPr>
+            <a:r>
+              <a:rPr lang="en-US" sz="1500" dirty="0">
+                <a:solidFill>
+                  <a:schemeClr val="bg1"/>
+                </a:solidFill>
+              </a:rPr>
+              <a:t>Betsolute: lanzamiento Colombia</a:t>
+            </a:r>
+            <a:endParaRPr lang="en-US" sz="1500" dirty="0"/>
+          </a:p>
+          <a:p>
+            <a:pPr marL="342900" indent="-342900">
+              <a:spcAft>
+                <a:spcPts val="800"/>
+              </a:spcAft>
+              <a:buSzPct val="100000"/>
+              <a:buChar char="•"/>
+            </a:pPr>
+            <a:r>
+              <a:rPr lang="en-US" sz="1500" dirty="0">
+                <a:solidFill>
+                  <a:schemeClr val="bg1"/>
+                </a:solidFill>
+              </a:rPr>
+              <a:t>Tinbet: despliegue de Promo Tools</a:t>
+            </a:r>
+            <a:endParaRPr lang="en-US" sz="1500" dirty="0"/>
+          </a:p>
+          <a:p>
+            <a:pPr marL="342900" indent="-342900">
+              <a:spcAft>
+                <a:spcPts val="800"/>
+              </a:spcAft>
+              <a:buSzPct val="100000"/>
+              <a:buChar char="•"/>
+            </a:pPr>
+            <a:r>
+              <a:rPr lang="en-US" sz="1500" dirty="0">
+                <a:solidFill>
+                  <a:schemeClr val="bg1"/>
+                </a:solidFill>
+              </a:rPr>
+              <a:t>Apuesta Total: deuda y mesas</a:t>
+            </a:r>
+            <a:endParaRPr lang="en-US" sz="1500" dirty="0"/>
+          </a:p>
+          <a:p>
+            <a:pPr marL="342900" indent="-342900">
+              <a:spcAft>
+                <a:spcPts val="800"/>
+              </a:spcAft>
+              <a:buSzPct val="100000"/>
+              <a:buChar char="•"/>
+            </a:pPr>
+            <a:r>
+              <a:rPr lang="en-US" sz="1500" dirty="0">
+                <a:solidFill>
+                  <a:schemeClr val="bg1"/>
+                </a:solidFill>
+              </a:rPr>
+              <a:t>Groove / Tucanbit: nota de crédito</a:t>
+            </a:r>
+            <a:endParaRPr lang="en-US" sz="1500" dirty="0"/>
+          </a:p>
+        </p:txBody>
+      </p:sp>
+      <p:sp>
+        <p:nvSpPr>
+          <p:cNvPr id="7" name="p1"/>
+          <p:cNvSpPr/>
+          <p:nvPr/>
+        </p:nvSpPr>
+        <p:spPr>
+          <a:xfrm>
+            <a:off x="4297680" y="1325880"/>
+            <a:ext cx="3520440" cy="4892040"/>
+          </a:xfrm>
+          <a:prstGeom prst="roundRect">
+            <a:avLst>
+              <a:gd name="adj" fmla="val 2078"/>
+            </a:avLst>
+          </a:prstGeom>
+          <a:solidFill>
+            <a:schemeClr val="bg2"/>
+          </a:solidFill>
+          <a:ln w="12700">
+            <a:solidFill>
+              <a:schemeClr val="bg2"/>
+            </a:solidFill>
+            <a:prstDash val="solid"/>
+          </a:ln>
+        </p:spPr>
+      </p:sp>
+      <p:sp>
+        <p:nvSpPr>
+          <p:cNvPr id="8" name="Text 6"/>
+          <p:cNvSpPr txBox="1"/>
+          <p:nvPr/>
+        </p:nvSpPr>
+        <p:spPr>
+          <a:xfrm>
+            <a:off x="4572000" y="1481328"/>
+            <a:ext cx="3017520" cy="502920"/>
+          </a:xfrm>
+          <a:prstGeom prst="rect">
+            <a:avLst/>
+          </a:prstGeom>
+          <a:noFill/>
+          <a:ln/>
+        </p:spPr>
+        <p:txBody>
+          <a:bodyPr wrap="square" lIns="0" tIns="0" rIns="0" bIns="0" rtlCol="0" anchor="t"/>
+          <a:lstStyle/>
+          <a:p>
+            <a:pPr indent="0" marL="0">
+              <a:buNone/>
+            </a:pPr>
+            <a:r>
+              <a:rPr lang="en-US" sz="2400" b="1" dirty="0">
+                <a:solidFill>
+                  <a:schemeClr val="tx2"/>
+                </a:solidFill>
+                <a:latin typeface="Cambria" pitchFamily="34" charset="0"/>
+                <a:ea typeface="Cambria" pitchFamily="34" charset="-122"/>
+                <a:cs typeface="Cambria" pitchFamily="34" charset="-120"/>
+              </a:rPr>
+              <a:t>Prioridad 2</a:t>
+            </a:r>
+            <a:endParaRPr lang="en-US" sz="2400" dirty="0"/>
+          </a:p>
+        </p:txBody>
+      </p:sp>
+      <p:sp>
+        <p:nvSpPr>
+          <p:cNvPr id="9" name="Text 7"/>
+          <p:cNvSpPr txBox="1"/>
+          <p:nvPr/>
+        </p:nvSpPr>
+        <p:spPr>
+          <a:xfrm>
+            <a:off x="4572000" y="1984248"/>
+            <a:ext cx="3017520" cy="320040"/>
+          </a:xfrm>
+          <a:prstGeom prst="rect">
+            <a:avLst/>
+          </a:prstGeom>
+          <a:noFill/>
+          <a:ln/>
+        </p:spPr>
+        <p:txBody>
+          <a:bodyPr wrap="square" lIns="0" tIns="0" rIns="0" bIns="0" rtlCol="0" anchor="t"/>
+          <a:lstStyle/>
+          <a:p>
+            <a:pPr indent="0" marL="0">
+              <a:buNone/>
+            </a:pPr>
+            <a:r>
+              <a:rPr lang="en-US" sz="1400" i="1" dirty="0">
+                <a:solidFill>
+                  <a:schemeClr val="tx1"/>
+                </a:solidFill>
+              </a:rPr>
+              <a:t>Propuestas y activación</a:t>
+            </a:r>
+            <a:endParaRPr lang="en-US" sz="1400" dirty="0"/>
+          </a:p>
+        </p:txBody>
+      </p:sp>
+      <p:sp>
+        <p:nvSpPr>
+          <p:cNvPr id="10" name="Text 8"/>
+          <p:cNvSpPr txBox="1"/>
+          <p:nvPr/>
+        </p:nvSpPr>
+        <p:spPr>
+          <a:xfrm>
+            <a:off x="4572000" y="2468880"/>
+            <a:ext cx="3017520" cy="3611880"/>
+          </a:xfrm>
+          <a:prstGeom prst="rect">
+            <a:avLst/>
+          </a:prstGeom>
+          <a:noFill/>
+          <a:ln/>
+        </p:spPr>
+        <p:txBody>
+          <a:bodyPr wrap="square" lIns="0" tIns="0" rIns="0" bIns="0" rtlCol="0" anchor="t"/>
+          <a:lstStyle/>
+          <a:p>
+            <a:pPr marL="342900" indent="-342900">
+              <a:spcAft>
+                <a:spcPts val="800"/>
+              </a:spcAft>
+              <a:buSzPct val="100000"/>
+              <a:buChar char="•"/>
+            </a:pPr>
+            <a:r>
+              <a:rPr lang="en-US" sz="1500" dirty="0">
+                <a:solidFill>
+                  <a:schemeClr val="tx1"/>
+                </a:solidFill>
+              </a:rPr>
+              <a:t>Ganamos: validar GGR y take rate</a:t>
+            </a:r>
+            <a:endParaRPr lang="en-US" sz="1500" dirty="0"/>
+          </a:p>
+          <a:p>
+            <a:pPr marL="342900" indent="-342900">
+              <a:spcAft>
+                <a:spcPts val="800"/>
+              </a:spcAft>
+              <a:buSzPct val="100000"/>
+              <a:buChar char="•"/>
+            </a:pPr>
+            <a:r>
+              <a:rPr lang="en-US" sz="1500" dirty="0">
+                <a:solidFill>
+                  <a:schemeClr val="tx1"/>
+                </a:solidFill>
+              </a:rPr>
+              <a:t>Palmsbet: Chroma, slots, Halloween</a:t>
+            </a:r>
+            <a:endParaRPr lang="en-US" sz="1500" dirty="0"/>
+          </a:p>
+          <a:p>
+            <a:pPr marL="342900" indent="-342900">
+              <a:spcAft>
+                <a:spcPts val="800"/>
+              </a:spcAft>
+              <a:buSzPct val="100000"/>
+              <a:buChar char="•"/>
+            </a:pPr>
+            <a:r>
+              <a:rPr lang="en-US" sz="1500" dirty="0">
+                <a:solidFill>
+                  <a:schemeClr val="tx1"/>
+                </a:solidFill>
+              </a:rPr>
+              <a:t>Betstarters: fee EUR 5.000</a:t>
+            </a:r>
+            <a:endParaRPr lang="en-US" sz="1500" dirty="0"/>
+          </a:p>
+          <a:p>
+            <a:pPr marL="342900" indent="-342900">
+              <a:spcAft>
+                <a:spcPts val="800"/>
+              </a:spcAft>
+              <a:buSzPct val="100000"/>
+              <a:buChar char="•"/>
+            </a:pPr>
+            <a:r>
+              <a:rPr lang="en-US" sz="1500" dirty="0">
+                <a:solidFill>
+                  <a:schemeClr val="tx1"/>
+                </a:solidFill>
+              </a:rPr>
+              <a:t>Bet4win, VirtualSoft, Olimpobet</a:t>
+            </a:r>
+            <a:endParaRPr lang="en-US" sz="1500" dirty="0"/>
+          </a:p>
+          <a:p>
+            <a:pPr marL="342900" indent="-342900">
+              <a:spcAft>
+                <a:spcPts val="800"/>
+              </a:spcAft>
+              <a:buSzPct val="100000"/>
+              <a:buChar char="•"/>
+            </a:pPr>
+            <a:r>
+              <a:rPr lang="en-US" sz="1500" dirty="0">
+                <a:solidFill>
+                  <a:schemeClr val="tx1"/>
+                </a:solidFill>
+              </a:rPr>
+              <a:t>GameMedia / Betzar</a:t>
+            </a:r>
+            <a:endParaRPr lang="en-US" sz="1500" dirty="0"/>
+          </a:p>
+          <a:p>
+            <a:pPr marL="342900" indent="-342900">
+              <a:spcAft>
+                <a:spcPts val="800"/>
+              </a:spcAft>
+              <a:buSzPct val="100000"/>
+              <a:buChar char="•"/>
+            </a:pPr>
+            <a:r>
+              <a:rPr lang="en-US" sz="1500" dirty="0">
+                <a:solidFill>
+                  <a:schemeClr val="tx1"/>
+                </a:solidFill>
+              </a:rPr>
+              <a:t>Jugamax y Betboom (Maite)</a:t>
+            </a:r>
+            <a:endParaRPr lang="en-US" sz="1500" dirty="0"/>
+          </a:p>
+        </p:txBody>
+      </p:sp>
+      <p:sp>
+        <p:nvSpPr>
+          <p:cNvPr id="11" name="p2"/>
+          <p:cNvSpPr/>
+          <p:nvPr/>
+        </p:nvSpPr>
+        <p:spPr>
+          <a:xfrm>
+            <a:off x="8046720" y="1325880"/>
+            <a:ext cx="3520440" cy="4892040"/>
+          </a:xfrm>
+          <a:prstGeom prst="roundRect">
+            <a:avLst>
+              <a:gd name="adj" fmla="val 2078"/>
+            </a:avLst>
+          </a:prstGeom>
+          <a:solidFill>
+            <a:schemeClr val="bg2"/>
+          </a:solidFill>
+          <a:ln w="12700">
+            <a:solidFill>
+              <a:schemeClr val="bg2"/>
+            </a:solidFill>
+            <a:prstDash val="solid"/>
+          </a:ln>
+        </p:spPr>
+      </p:sp>
+      <p:sp>
+        <p:nvSpPr>
+          <p:cNvPr id="12" name="Text 10"/>
+          <p:cNvSpPr txBox="1"/>
+          <p:nvPr/>
+        </p:nvSpPr>
+        <p:spPr>
+          <a:xfrm>
+            <a:off x="8321040" y="1481328"/>
+            <a:ext cx="3017520" cy="502920"/>
+          </a:xfrm>
+          <a:prstGeom prst="rect">
+            <a:avLst/>
+          </a:prstGeom>
+          <a:noFill/>
+          <a:ln/>
+        </p:spPr>
+        <p:txBody>
+          <a:bodyPr wrap="square" lIns="0" tIns="0" rIns="0" bIns="0" rtlCol="0" anchor="t"/>
+          <a:lstStyle/>
+          <a:p>
+            <a:pPr indent="0" marL="0">
+              <a:buNone/>
+            </a:pPr>
+            <a:r>
+              <a:rPr lang="en-US" sz="2400" b="1" dirty="0">
+                <a:solidFill>
+                  <a:schemeClr val="tx2"/>
+                </a:solidFill>
+                <a:latin typeface="Cambria" pitchFamily="34" charset="0"/>
+                <a:ea typeface="Cambria" pitchFamily="34" charset="-122"/>
+                <a:cs typeface="Cambria" pitchFamily="34" charset="-120"/>
+              </a:rPr>
+              <a:t>Prioridad 3</a:t>
+            </a:r>
+            <a:endParaRPr lang="en-US" sz="2400" dirty="0"/>
+          </a:p>
+        </p:txBody>
+      </p:sp>
+      <p:sp>
+        <p:nvSpPr>
+          <p:cNvPr id="13" name="Text 11"/>
+          <p:cNvSpPr txBox="1"/>
+          <p:nvPr/>
+        </p:nvSpPr>
+        <p:spPr>
+          <a:xfrm>
+            <a:off x="8321040" y="1984248"/>
+            <a:ext cx="3017520" cy="320040"/>
+          </a:xfrm>
+          <a:prstGeom prst="rect">
+            <a:avLst/>
+          </a:prstGeom>
+          <a:noFill/>
+          <a:ln/>
+        </p:spPr>
+        <p:txBody>
+          <a:bodyPr wrap="square" lIns="0" tIns="0" rIns="0" bIns="0" rtlCol="0" anchor="t"/>
+          <a:lstStyle/>
+          <a:p>
+            <a:pPr indent="0" marL="0">
+              <a:buNone/>
+            </a:pPr>
+            <a:r>
+              <a:rPr lang="en-US" sz="1400" i="1" dirty="0">
+                <a:solidFill>
+                  <a:schemeClr val="tx1"/>
+                </a:solidFill>
+              </a:rPr>
+              <a:t>Expansión</a:t>
+            </a:r>
+            <a:endParaRPr lang="en-US" sz="1400" dirty="0"/>
+          </a:p>
+        </p:txBody>
+      </p:sp>
+      <p:sp>
+        <p:nvSpPr>
+          <p:cNvPr id="14" name="Text 12"/>
+          <p:cNvSpPr txBox="1"/>
+          <p:nvPr/>
+        </p:nvSpPr>
+        <p:spPr>
+          <a:xfrm>
+            <a:off x="8321040" y="2468880"/>
+            <a:ext cx="3017520" cy="3611880"/>
+          </a:xfrm>
+          <a:prstGeom prst="rect">
+            <a:avLst/>
+          </a:prstGeom>
+          <a:noFill/>
+          <a:ln/>
+        </p:spPr>
+        <p:txBody>
+          <a:bodyPr wrap="square" lIns="0" tIns="0" rIns="0" bIns="0" rtlCol="0" anchor="t"/>
+          <a:lstStyle/>
+          <a:p>
+            <a:pPr marL="342900" indent="-342900">
+              <a:spcAft>
+                <a:spcPts val="800"/>
+              </a:spcAft>
+              <a:buSzPct val="100000"/>
+              <a:buChar char="•"/>
+            </a:pPr>
+            <a:r>
+              <a:rPr lang="en-US" sz="1500" dirty="0">
+                <a:solidFill>
+                  <a:schemeClr val="tx1"/>
+                </a:solidFill>
+              </a:rPr>
+              <a:t>Winpot: mesa dedicada y Perú</a:t>
+            </a:r>
+            <a:endParaRPr lang="en-US" sz="1500" dirty="0"/>
+          </a:p>
+          <a:p>
+            <a:pPr marL="342900" indent="-342900">
+              <a:spcAft>
+                <a:spcPts val="800"/>
+              </a:spcAft>
+              <a:buSzPct val="100000"/>
+              <a:buChar char="•"/>
+            </a:pPr>
+            <a:r>
+              <a:rPr lang="en-US" sz="1500" dirty="0">
+                <a:solidFill>
+                  <a:schemeClr val="tx1"/>
+                </a:solidFill>
+              </a:rPr>
+              <a:t>BRBet: El Salvador</a:t>
+            </a:r>
+            <a:endParaRPr lang="en-US" sz="1500" dirty="0"/>
+          </a:p>
+          <a:p>
+            <a:pPr marL="342900" indent="-342900">
+              <a:spcAft>
+                <a:spcPts val="800"/>
+              </a:spcAft>
+              <a:buSzPct val="100000"/>
+              <a:buChar char="•"/>
+            </a:pPr>
+            <a:r>
+              <a:rPr lang="en-US" sz="1500" dirty="0">
+                <a:solidFill>
+                  <a:schemeClr val="tx1"/>
+                </a:solidFill>
+              </a:rPr>
+              <a:t>Zenit: acuerdo directo LATAM</a:t>
+            </a:r>
+            <a:endParaRPr lang="en-US" sz="1500" dirty="0"/>
+          </a:p>
+          <a:p>
+            <a:pPr marL="342900" indent="-342900">
+              <a:spcAft>
+                <a:spcPts val="800"/>
+              </a:spcAft>
+              <a:buSzPct val="100000"/>
+              <a:buChar char="•"/>
+            </a:pPr>
+            <a:r>
+              <a:rPr lang="en-US" sz="1500" dirty="0">
+                <a:solidFill>
+                  <a:schemeClr val="tx1"/>
+                </a:solidFill>
+              </a:rPr>
+              <a:t>Bet n Play y pipeline Venezuela</a:t>
+            </a:r>
+            <a:endParaRPr lang="en-US" sz="1500" dirty="0"/>
+          </a:p>
+          <a:p>
+            <a:pPr marL="342900" indent="-342900">
+              <a:spcAft>
+                <a:spcPts val="800"/>
+              </a:spcAft>
+              <a:buSzPct val="100000"/>
+              <a:buChar char="•"/>
+            </a:pPr>
+            <a:r>
+              <a:rPr lang="en-US" sz="1500" dirty="0">
+                <a:solidFill>
+                  <a:schemeClr val="tx1"/>
+                </a:solidFill>
+              </a:rPr>
+              <a:t>Torrero: procesos abiertos</a:t>
+            </a:r>
+            <a:endParaRPr lang="en-US" sz="1500" dirty="0"/>
+          </a:p>
+          <a:p>
+            <a:pPr marL="342900" indent="-342900">
+              <a:spcAft>
+                <a:spcPts val="800"/>
+              </a:spcAft>
+              <a:buSzPct val="100000"/>
+              <a:buChar char="•"/>
+            </a:pPr>
+            <a:r>
+              <a:rPr lang="en-US" sz="1500" dirty="0">
+                <a:solidFill>
+                  <a:schemeClr val="tx1"/>
+                </a:solidFill>
+              </a:rPr>
+              <a:t>Betsolute: pipeline regional</a:t>
+            </a:r>
+            <a:endParaRPr lang="en-US" sz="1500" dirty="0"/>
+          </a:p>
+        </p:txBody>
+      </p:sp>
+      <p:sp>
+        <p:nvSpPr>
+          <p:cNvPr id="25" name="Slide Number Placeholder 0"/>
+          <p:cNvSpPr>
+            <a:spLocks noGrp="1"/>
+          </p:cNvSpPr>
+          <p:nvPr>
+            <p:ph type="sldNum" sz="quarter" idx="4294967295"/>
+          </p:nvPr>
+        </p:nvSpPr>
+        <p:spPr>
+          <a:xfrm>
+            <a:off x="11155680" y="6446520"/>
+            <a:ext cx="457200" cy="274320"/>
+          </a:xfrm>
+          <a:prstGeom prst="rect">
+            <a:avLst/>
+          </a:prstGeom>
+          <a:extLst>
+            <a:ext uri="{C572A759-6A51-4108-AA02-DFA0A04FC94B}">
+              <ma14:wrappingTextBoxFlag xmlns:ma14="http://schemas.microsoft.com/office/mac/drawingml/2011/main" val="0"/>
+            </a:ext>
+          </a:extLst>
+        </p:spPr>
+        <p:txBody>
+          <a:bodyPr/>
+          <a:lstStyle>
+            <a:lvl1pPr>
+              <a:defRPr sz="1000">
+                <a:solidFill>
+                  <a:srgbClr val="5E6B64"/>
+                </a:solidFill>
+              </a:defRPr>
+            </a:lvl1pPr>
+          </a:lstStyle>
+          <a:p>
+            <a:pPr algn="r"/>
+            <a:fld id="{F7021451-1387-4CA6-816F-3879F97B5CBC}" type="slidenum">
+              <a:rPr b="0" lang="en-US"/>
+              <a:t>13</a:t>
+            </a:fld>
+            <a:endParaRPr lang="en-US"/>
+          </a:p>
+        </p:txBody>
+      </p:sp>
+    </p:spTree>
+  </p:cSld>
+  <p:clrMapOvr>
+    <a:masterClrMapping/>
+  </p:clrMapOvr>
+</p:sld>
+</file>
+
+<file path=ppt/slides/slide14.xml><?xml version="1.0" encoding="utf-8"?>
+<p:sld xmlns:a="http://schemas.openxmlformats.org/drawingml/2006/main" xmlns:r="http://schemas.openxmlformats.org/officeDocument/2006/relationships" xmlns:p="http://schemas.openxmlformats.org/presentationml/2006/main">
+  <p:cSld name="Slide 14">
+    <p:spTree>
+      <p:nvGrpSpPr>
+        <p:cNvPr id="1" name=""/>
+        <p:cNvGrpSpPr/>
+        <p:nvPr/>
+      </p:nvGrpSpPr>
+      <p:grpSpPr>
+        <a:xfrm>
+          <a:off x="0" y="0"/>
+          <a:ext cx="0" cy="0"/>
+          <a:chOff x="0" y="0"/>
+          <a:chExt cx="0" cy="0"/>
+        </a:xfrm>
+      </p:grpSpPr>
+      <p:sp>
+        <p:nvSpPr>
+          <p:cNvPr id="2" name="Text 0"/>
+          <p:cNvSpPr/>
+          <p:nvPr>
+            <p:ph idx="100" type="title" hasCustomPrompt="1"/>
+          </p:nvPr>
+        </p:nvSpPr>
+        <p:spPr>
+          <a:xfrm>
+            <a:off x="548640" y="320040"/>
+            <a:ext cx="11064240" cy="777240"/>
+          </a:xfrm>
+          <a:prstGeom prst="rect">
+            <a:avLst/>
+          </a:prstGeom>
+          <a:noFill/>
+          <a:ln/>
+        </p:spPr>
+        <p:txBody>
+          <a:bodyPr wrap="square" rtlCol="0" anchor="ctr"/>
+          <a:lstStyle/>
+          <a:p>
+            <a:pPr algn="l" indent="0" marL="0">
+              <a:buNone/>
+            </a:pPr>
+            <a:r>
+              <a:rPr lang="en-US" sz="3000" b="1" dirty="0">
+                <a:solidFill>
+                  <a:schemeClr val="tx2"/>
+                </a:solidFill>
+              </a:rPr>
+              <a:t>Plan de acción 2027 por trimestre</a:t>
+            </a:r>
+            <a:endParaRPr lang="en-US" sz="3000" dirty="0"/>
+          </a:p>
+        </p:txBody>
+      </p:sp>
+      <p:sp>
+        <p:nvSpPr>
+          <p:cNvPr id="3" name="q0"/>
+          <p:cNvSpPr/>
+          <p:nvPr/>
+        </p:nvSpPr>
+        <p:spPr>
+          <a:xfrm>
+            <a:off x="548640" y="1325880"/>
+            <a:ext cx="3520440" cy="4892040"/>
+          </a:xfrm>
+          <a:prstGeom prst="roundRect">
+            <a:avLst>
+              <a:gd name="adj" fmla="val 2078"/>
+            </a:avLst>
+          </a:prstGeom>
+          <a:solidFill>
+            <a:schemeClr val="tx2"/>
+          </a:solidFill>
+          <a:ln w="12700">
+            <a:solidFill>
+              <a:schemeClr val="tx2"/>
+            </a:solidFill>
+            <a:prstDash val="solid"/>
+          </a:ln>
+        </p:spPr>
+      </p:sp>
+      <p:sp>
+        <p:nvSpPr>
+          <p:cNvPr id="4" name="Text 2"/>
+          <p:cNvSpPr txBox="1"/>
+          <p:nvPr/>
+        </p:nvSpPr>
+        <p:spPr>
+          <a:xfrm>
+            <a:off x="822960" y="1508760"/>
+            <a:ext cx="3017520" cy="548640"/>
+          </a:xfrm>
+          <a:prstGeom prst="rect">
+            <a:avLst/>
+          </a:prstGeom>
+          <a:noFill/>
+          <a:ln/>
+        </p:spPr>
+        <p:txBody>
+          <a:bodyPr wrap="square" lIns="0" tIns="0" rIns="0" bIns="0" rtlCol="0" anchor="t"/>
+          <a:lstStyle/>
+          <a:p>
+            <a:pPr indent="0" marL="0">
+              <a:buNone/>
+            </a:pPr>
+            <a:r>
+              <a:rPr lang="en-US" sz="2600" b="1" dirty="0">
+                <a:solidFill>
+                  <a:schemeClr val="accent2"/>
+                </a:solidFill>
+                <a:latin typeface="Cambria" pitchFamily="34" charset="0"/>
+                <a:ea typeface="Cambria" pitchFamily="34" charset="-122"/>
+                <a:cs typeface="Cambria" pitchFamily="34" charset="-120"/>
+              </a:rPr>
+              <a:t>Q4 2026</a:t>
+            </a:r>
+            <a:endParaRPr lang="en-US" sz="2600" dirty="0"/>
+          </a:p>
+        </p:txBody>
+      </p:sp>
+      <p:sp>
+        <p:nvSpPr>
+          <p:cNvPr id="5" name="Text 3"/>
+          <p:cNvSpPr txBox="1"/>
+          <p:nvPr/>
+        </p:nvSpPr>
+        <p:spPr>
+          <a:xfrm>
+            <a:off x="822960" y="2194560"/>
+            <a:ext cx="3017520" cy="3840480"/>
+          </a:xfrm>
+          <a:prstGeom prst="rect">
+            <a:avLst/>
+          </a:prstGeom>
+          <a:noFill/>
+          <a:ln/>
+        </p:spPr>
+        <p:txBody>
+          <a:bodyPr wrap="square" lIns="0" tIns="0" rIns="0" bIns="0" rtlCol="0" anchor="t"/>
+          <a:lstStyle/>
+          <a:p>
+            <a:pPr marL="342900" indent="-342900">
+              <a:spcAft>
+                <a:spcPts val="1000"/>
+              </a:spcAft>
+              <a:buSzPct val="100000"/>
+              <a:buChar char="•"/>
+            </a:pPr>
+            <a:r>
+              <a:rPr lang="en-US" sz="1500" dirty="0">
+                <a:solidFill>
+                  <a:schemeClr val="bg1"/>
+                </a:solidFill>
+              </a:rPr>
+              <a:t>Go-live Ganamos + war-room</a:t>
+            </a:r>
+            <a:endParaRPr lang="en-US" sz="1500" dirty="0"/>
+          </a:p>
+          <a:p>
+            <a:pPr marL="342900" indent="-342900">
+              <a:spcAft>
+                <a:spcPts val="1000"/>
+              </a:spcAft>
+              <a:buSzPct val="100000"/>
+              <a:buChar char="•"/>
+            </a:pPr>
+            <a:r>
+              <a:rPr lang="en-US" sz="1500" dirty="0">
+                <a:solidFill>
+                  <a:schemeClr val="bg1"/>
+                </a:solidFill>
+              </a:rPr>
+              <a:t>DD Apuestas Royal; alta GoGo Royal</a:t>
+            </a:r>
+            <a:endParaRPr lang="en-US" sz="1500" dirty="0"/>
+          </a:p>
+          <a:p>
+            <a:pPr marL="342900" indent="-342900">
+              <a:spcAft>
+                <a:spcPts val="1000"/>
+              </a:spcAft>
+              <a:buSzPct val="100000"/>
+              <a:buChar char="•"/>
+            </a:pPr>
+            <a:r>
+              <a:rPr lang="en-US" sz="1500" dirty="0">
+                <a:solidFill>
+                  <a:schemeClr val="bg1"/>
+                </a:solidFill>
+              </a:rPr>
+              <a:t>Desbloquear Distra y firmar Cirsa</a:t>
+            </a:r>
+            <a:endParaRPr lang="en-US" sz="1500" dirty="0"/>
+          </a:p>
+          <a:p>
+            <a:pPr marL="342900" indent="-342900">
+              <a:spcAft>
+                <a:spcPts val="1000"/>
+              </a:spcAft>
+              <a:buSzPct val="100000"/>
+              <a:buChar char="•"/>
+            </a:pPr>
+            <a:r>
+              <a:rPr lang="en-US" sz="1500" dirty="0">
+                <a:solidFill>
+                  <a:schemeClr val="bg1"/>
+                </a:solidFill>
+              </a:rPr>
+              <a:t>Ejecutar plan de activación</a:t>
+            </a:r>
+            <a:endParaRPr lang="en-US" sz="1500" dirty="0"/>
+          </a:p>
+          <a:p>
+            <a:pPr marL="342900" indent="-342900">
+              <a:spcAft>
+                <a:spcPts val="1000"/>
+              </a:spcAft>
+              <a:buSzPct val="100000"/>
+              <a:buChar char="•"/>
+            </a:pPr>
+            <a:r>
+              <a:rPr lang="en-US" sz="1500" dirty="0">
+                <a:solidFill>
+                  <a:schemeClr val="bg1"/>
+                </a:solidFill>
+              </a:rPr>
+              <a:t>Agreegain, Loteka, Breeze, Quartzplay</a:t>
+            </a:r>
+            <a:endParaRPr lang="en-US" sz="1500" dirty="0"/>
+          </a:p>
+        </p:txBody>
+      </p:sp>
+      <p:sp>
+        <p:nvSpPr>
+          <p:cNvPr id="6" name="q1"/>
+          <p:cNvSpPr/>
+          <p:nvPr/>
+        </p:nvSpPr>
+        <p:spPr>
+          <a:xfrm>
+            <a:off x="4297680" y="1325880"/>
+            <a:ext cx="3520440" cy="4892040"/>
+          </a:xfrm>
+          <a:prstGeom prst="roundRect">
+            <a:avLst>
+              <a:gd name="adj" fmla="val 2078"/>
+            </a:avLst>
+          </a:prstGeom>
+          <a:solidFill>
+            <a:schemeClr val="bg2"/>
+          </a:solidFill>
+          <a:ln w="12700">
+            <a:solidFill>
+              <a:schemeClr val="bg2"/>
+            </a:solidFill>
+            <a:prstDash val="solid"/>
+          </a:ln>
+        </p:spPr>
+      </p:sp>
+      <p:sp>
+        <p:nvSpPr>
+          <p:cNvPr id="7" name="Text 5"/>
+          <p:cNvSpPr txBox="1"/>
+          <p:nvPr/>
+        </p:nvSpPr>
+        <p:spPr>
+          <a:xfrm>
+            <a:off x="4572000" y="1508760"/>
+            <a:ext cx="3017520" cy="548640"/>
+          </a:xfrm>
+          <a:prstGeom prst="rect">
+            <a:avLst/>
+          </a:prstGeom>
+          <a:noFill/>
+          <a:ln/>
+        </p:spPr>
+        <p:txBody>
+          <a:bodyPr wrap="square" lIns="0" tIns="0" rIns="0" bIns="0" rtlCol="0" anchor="t"/>
+          <a:lstStyle/>
+          <a:p>
+            <a:pPr indent="0" marL="0">
+              <a:buNone/>
+            </a:pPr>
+            <a:r>
+              <a:rPr lang="en-US" sz="2600" b="1" dirty="0">
+                <a:solidFill>
+                  <a:schemeClr val="tx2"/>
+                </a:solidFill>
+                <a:latin typeface="Cambria" pitchFamily="34" charset="0"/>
+                <a:ea typeface="Cambria" pitchFamily="34" charset="-122"/>
+                <a:cs typeface="Cambria" pitchFamily="34" charset="-120"/>
+              </a:rPr>
+              <a:t>Q1 2027</a:t>
+            </a:r>
+            <a:endParaRPr lang="en-US" sz="2600" dirty="0"/>
+          </a:p>
+        </p:txBody>
+      </p:sp>
+      <p:sp>
+        <p:nvSpPr>
+          <p:cNvPr id="8" name="Text 6"/>
+          <p:cNvSpPr txBox="1"/>
+          <p:nvPr/>
+        </p:nvSpPr>
+        <p:spPr>
+          <a:xfrm>
+            <a:off x="4572000" y="2194560"/>
+            <a:ext cx="3017520" cy="3840480"/>
+          </a:xfrm>
+          <a:prstGeom prst="rect">
+            <a:avLst/>
+          </a:prstGeom>
+          <a:noFill/>
+          <a:ln/>
+        </p:spPr>
+        <p:txBody>
+          <a:bodyPr wrap="square" lIns="0" tIns="0" rIns="0" bIns="0" rtlCol="0" anchor="t"/>
+          <a:lstStyle/>
+          <a:p>
+            <a:pPr marL="342900" indent="-342900">
+              <a:spcAft>
+                <a:spcPts val="1000"/>
+              </a:spcAft>
+              <a:buSzPct val="100000"/>
+              <a:buChar char="•"/>
+            </a:pPr>
+            <a:r>
+              <a:rPr lang="en-US" sz="1500" dirty="0">
+                <a:solidFill>
+                  <a:schemeClr val="tx1"/>
+                </a:solidFill>
+              </a:rPr>
+              <a:t>Programa México: Codere + upsell Ezugi</a:t>
+            </a:r>
+            <a:endParaRPr lang="en-US" sz="1500" dirty="0"/>
+          </a:p>
+          <a:p>
+            <a:pPr marL="342900" indent="-342900">
+              <a:spcAft>
+                <a:spcPts val="1000"/>
+              </a:spcAft>
+              <a:buSzPct val="100000"/>
+              <a:buChar char="•"/>
+            </a:pPr>
+            <a:r>
+              <a:rPr lang="en-US" sz="1500" dirty="0">
+                <a:solidFill>
+                  <a:schemeClr val="tx1"/>
+                </a:solidFill>
+              </a:rPr>
+              <a:t>Cerrar Zlot y Vegas Live</a:t>
+            </a:r>
+            <a:endParaRPr lang="en-US" sz="1500" dirty="0"/>
+          </a:p>
+          <a:p>
+            <a:pPr marL="342900" indent="-342900">
+              <a:spcAft>
+                <a:spcPts val="1000"/>
+              </a:spcAft>
+              <a:buSzPct val="100000"/>
+              <a:buChar char="•"/>
+            </a:pPr>
+            <a:r>
+              <a:rPr lang="en-US" sz="1500" dirty="0">
+                <a:solidFill>
+                  <a:schemeClr val="tx1"/>
+                </a:solidFill>
+              </a:rPr>
+              <a:t>Paraguay: confirmar 4–5 opps &gt; €50K</a:t>
+            </a:r>
+            <a:endParaRPr lang="en-US" sz="1500" dirty="0"/>
+          </a:p>
+          <a:p>
+            <a:pPr marL="342900" indent="-342900">
+              <a:spcAft>
+                <a:spcPts val="1000"/>
+              </a:spcAft>
+              <a:buSzPct val="100000"/>
+              <a:buChar char="•"/>
+            </a:pPr>
+            <a:r>
+              <a:rPr lang="en-US" sz="1500" dirty="0">
+                <a:solidFill>
+                  <a:schemeClr val="tx1"/>
+                </a:solidFill>
+              </a:rPr>
+              <a:t>Integración Distra y Trickless (+150%)</a:t>
+            </a:r>
+            <a:endParaRPr lang="en-US" sz="1500" dirty="0"/>
+          </a:p>
+        </p:txBody>
+      </p:sp>
+      <p:sp>
+        <p:nvSpPr>
+          <p:cNvPr id="9" name="q2"/>
+          <p:cNvSpPr/>
+          <p:nvPr/>
+        </p:nvSpPr>
+        <p:spPr>
+          <a:xfrm>
+            <a:off x="8046720" y="1325880"/>
+            <a:ext cx="3520440" cy="4892040"/>
+          </a:xfrm>
+          <a:prstGeom prst="roundRect">
+            <a:avLst>
+              <a:gd name="adj" fmla="val 2078"/>
+            </a:avLst>
+          </a:prstGeom>
+          <a:solidFill>
+            <a:schemeClr val="bg2"/>
+          </a:solidFill>
+          <a:ln w="12700">
+            <a:solidFill>
+              <a:schemeClr val="bg2"/>
+            </a:solidFill>
+            <a:prstDash val="solid"/>
+          </a:ln>
+        </p:spPr>
+      </p:sp>
+      <p:sp>
+        <p:nvSpPr>
+          <p:cNvPr id="10" name="Text 8"/>
+          <p:cNvSpPr txBox="1"/>
+          <p:nvPr/>
+        </p:nvSpPr>
+        <p:spPr>
+          <a:xfrm>
+            <a:off x="8321040" y="1508760"/>
+            <a:ext cx="3017520" cy="548640"/>
+          </a:xfrm>
+          <a:prstGeom prst="rect">
+            <a:avLst/>
+          </a:prstGeom>
+          <a:noFill/>
+          <a:ln/>
+        </p:spPr>
+        <p:txBody>
+          <a:bodyPr wrap="square" lIns="0" tIns="0" rIns="0" bIns="0" rtlCol="0" anchor="t"/>
+          <a:lstStyle/>
+          <a:p>
+            <a:pPr indent="0" marL="0">
+              <a:buNone/>
+            </a:pPr>
+            <a:r>
+              <a:rPr lang="en-US" sz="2600" b="1" dirty="0">
+                <a:solidFill>
+                  <a:schemeClr val="tx2"/>
+                </a:solidFill>
+                <a:latin typeface="Cambria" pitchFamily="34" charset="0"/>
+                <a:ea typeface="Cambria" pitchFamily="34" charset="-122"/>
+                <a:cs typeface="Cambria" pitchFamily="34" charset="-120"/>
+              </a:rPr>
+              <a:t>Q2–Q4 2027</a:t>
+            </a:r>
+            <a:endParaRPr lang="en-US" sz="2600" dirty="0"/>
+          </a:p>
+        </p:txBody>
+      </p:sp>
+      <p:sp>
+        <p:nvSpPr>
+          <p:cNvPr id="11" name="Text 9"/>
+          <p:cNvSpPr txBox="1"/>
+          <p:nvPr/>
+        </p:nvSpPr>
+        <p:spPr>
+          <a:xfrm>
+            <a:off x="8321040" y="2194560"/>
+            <a:ext cx="3017520" cy="3840480"/>
+          </a:xfrm>
+          <a:prstGeom prst="rect">
+            <a:avLst/>
+          </a:prstGeom>
+          <a:noFill/>
+          <a:ln/>
+        </p:spPr>
+        <p:txBody>
+          <a:bodyPr wrap="square" lIns="0" tIns="0" rIns="0" bIns="0" rtlCol="0" anchor="t"/>
+          <a:lstStyle/>
+          <a:p>
+            <a:pPr marL="342900" indent="-342900">
+              <a:spcAft>
+                <a:spcPts val="1000"/>
+              </a:spcAft>
+              <a:buSzPct val="100000"/>
+              <a:buChar char="•"/>
+            </a:pPr>
+            <a:r>
+              <a:rPr lang="en-US" sz="1500" dirty="0">
+                <a:solidFill>
+                  <a:schemeClr val="tx1"/>
+                </a:solidFill>
+              </a:rPr>
+              <a:t>Go-live Grupo Royal y Grupo Distra</a:t>
+            </a:r>
+            <a:endParaRPr lang="en-US" sz="1500" dirty="0"/>
+          </a:p>
+          <a:p>
+            <a:pPr marL="342900" indent="-342900">
+              <a:spcAft>
+                <a:spcPts val="1000"/>
+              </a:spcAft>
+              <a:buSzPct val="100000"/>
+              <a:buChar char="•"/>
+            </a:pPr>
+            <a:r>
+              <a:rPr lang="en-US" sz="1500" dirty="0">
+                <a:solidFill>
+                  <a:schemeClr val="tx1"/>
+                </a:solidFill>
+              </a:rPr>
+              <a:t>QBR mensual main opps, trimestral live</a:t>
+            </a:r>
+            <a:endParaRPr lang="en-US" sz="1500" dirty="0"/>
+          </a:p>
+          <a:p>
+            <a:pPr marL="342900" indent="-342900">
+              <a:spcAft>
+                <a:spcPts val="1000"/>
+              </a:spcAft>
+              <a:buSzPct val="100000"/>
+              <a:buChar char="•"/>
+            </a:pPr>
+            <a:r>
+              <a:rPr lang="en-US" sz="1500" dirty="0">
+                <a:solidFill>
+                  <a:schemeClr val="tx1"/>
+                </a:solidFill>
+              </a:rPr>
+              <a:t>2+ mesas dedicadas o branded</a:t>
+            </a:r>
+            <a:endParaRPr lang="en-US" sz="1500" dirty="0"/>
+          </a:p>
+          <a:p>
+            <a:pPr marL="342900" indent="-342900">
+              <a:spcAft>
+                <a:spcPts val="1000"/>
+              </a:spcAft>
+              <a:buSzPct val="100000"/>
+              <a:buChar char="•"/>
+            </a:pPr>
+            <a:r>
+              <a:rPr lang="en-US" sz="1500" dirty="0">
+                <a:solidFill>
+                  <a:schemeClr val="tx1"/>
+                </a:solidFill>
+              </a:rPr>
+              <a:t>Campañas Liga MX y cross-sell</a:t>
+            </a:r>
+            <a:endParaRPr lang="en-US" sz="1500" dirty="0"/>
+          </a:p>
+        </p:txBody>
+      </p:sp>
+      <p:sp>
+        <p:nvSpPr>
+          <p:cNvPr id="25" name="Slide Number Placeholder 0"/>
+          <p:cNvSpPr>
+            <a:spLocks noGrp="1"/>
+          </p:cNvSpPr>
+          <p:nvPr>
+            <p:ph type="sldNum" sz="quarter" idx="4294967295"/>
+          </p:nvPr>
+        </p:nvSpPr>
+        <p:spPr>
+          <a:xfrm>
+            <a:off x="11155680" y="6446520"/>
+            <a:ext cx="457200" cy="274320"/>
+          </a:xfrm>
+          <a:prstGeom prst="rect">
+            <a:avLst/>
+          </a:prstGeom>
+          <a:extLst>
+            <a:ext uri="{C572A759-6A51-4108-AA02-DFA0A04FC94B}">
+              <ma14:wrappingTextBoxFlag xmlns:ma14="http://schemas.microsoft.com/office/mac/drawingml/2011/main" val="0"/>
+            </a:ext>
+          </a:extLst>
+        </p:spPr>
+        <p:txBody>
+          <a:bodyPr/>
+          <a:lstStyle>
+            <a:lvl1pPr>
+              <a:defRPr sz="1000">
+                <a:solidFill>
+                  <a:srgbClr val="5E6B64"/>
+                </a:solidFill>
+              </a:defRPr>
+            </a:lvl1pPr>
+          </a:lstStyle>
+          <a:p>
+            <a:pPr algn="r"/>
+            <a:fld id="{F7021451-1387-4CA6-816F-3879F97B5CBC}" type="slidenum">
+              <a:rPr b="0" lang="en-US"/>
+              <a:t>14</a:t>
+            </a:fld>
+            <a:endParaRPr lang="en-US"/>
+          </a:p>
+        </p:txBody>
+      </p:sp>
+    </p:spTree>
+  </p:cSld>
+  <p:clrMapOvr>
+    <a:masterClrMapping/>
+  </p:clrMapOvr>
+</p:sld>
+</file>
+
+<file path=ppt/slides/slide15.xml><?xml version="1.0" encoding="utf-8"?>
+<p:sld xmlns:a="http://schemas.openxmlformats.org/drawingml/2006/main" xmlns:r="http://schemas.openxmlformats.org/officeDocument/2006/relationships" xmlns:p="http://schemas.openxmlformats.org/presentationml/2006/main">
+  <p:cSld name="Slide 15">
+    <p:spTree>
+      <p:nvGrpSpPr>
+        <p:cNvPr id="1" name=""/>
+        <p:cNvGrpSpPr/>
+        <p:nvPr/>
+      </p:nvGrpSpPr>
+      <p:grpSpPr>
+        <a:xfrm>
+          <a:off x="0" y="0"/>
+          <a:ext cx="0" cy="0"/>
+          <a:chOff x="0" y="0"/>
+          <a:chExt cx="0" cy="0"/>
+        </a:xfrm>
+      </p:grpSpPr>
+      <p:sp>
+        <p:nvSpPr>
+          <p:cNvPr id="2" name="Text 0"/>
+          <p:cNvSpPr/>
+          <p:nvPr>
+            <p:ph idx="100" type="title" hasCustomPrompt="1"/>
+          </p:nvPr>
+        </p:nvSpPr>
+        <p:spPr>
+          <a:xfrm>
             <a:off x="640080" y="2011680"/>
             <a:ext cx="10515600" cy="1463040"/>
           </a:xfrm>
@@ -8133,7 +13066,7 @@
                   <a:schemeClr val="accent2"/>
                 </a:solidFill>
               </a:rPr>
-              <a:t>1. Confirmar el take rate de Ganamos (11% supuesto; –€450K por punto)</a:t>
+              <a:t>1. Ganamos: cerrar take rate (pide 8%, plan 9%) y validar USD 60M y share de Pragmatic</a:t>
             </a:r>
             <a:endParaRPr lang="en-US" sz="2000" dirty="0"/>
           </a:p>
@@ -8247,7 +13180,7 @@
                   <a:schemeClr val="tx2"/>
                 </a:solidFill>
               </a:rPr>
-              <a:t>2027: el negocio LATAM puede multiplicarse por 4,6</a:t>
+              <a:t>2027: el negocio LATAM puede multiplicarse por 4,2</a:t>
             </a:r>
             <a:endParaRPr lang="en-US" sz="3000" dirty="0"/>
           </a:p>
@@ -8313,7 +13246,7 @@
                 <a:ea typeface="Cambria" pitchFamily="34" charset="-122"/>
                 <a:cs typeface="Cambria" pitchFamily="34" charset="-120"/>
               </a:rPr>
-              <a:t>€9,7M</a:t>
+              <a:t>€8,8M</a:t>
             </a:r>
             <a:endParaRPr lang="en-US" sz="4400" dirty="0"/>
           </a:p>
@@ -8429,7 +13362,7 @@
                 <a:ea typeface="Cambria" pitchFamily="34" charset="-122"/>
                 <a:cs typeface="Cambria" pitchFamily="34" charset="-120"/>
               </a:rPr>
-              <a:t>+357%</a:t>
+              <a:t>+319%</a:t>
             </a:r>
             <a:endParaRPr lang="en-US" sz="4400" dirty="0"/>
           </a:p>
@@ -8545,7 +13478,7 @@
                 <a:ea typeface="Cambria" pitchFamily="34" charset="-122"/>
                 <a:cs typeface="Cambria" pitchFamily="34" charset="-120"/>
               </a:rPr>
-              <a:t>62%</a:t>
+              <a:t>59%</a:t>
             </a:r>
             <a:endParaRPr lang="en-US" sz="4400" dirty="0"/>
           </a:p>
@@ -8661,7 +13594,7 @@
                 <a:ea typeface="Cambria" pitchFamily="34" charset="-122"/>
                 <a:cs typeface="Cambria" pitchFamily="34" charset="-120"/>
               </a:rPr>
-              <a:t>51%</a:t>
+              <a:t>46%</a:t>
             </a:r>
             <a:endParaRPr lang="en-US" sz="4400" dirty="0"/>
           </a:p>
@@ -8765,7 +13698,7 @@
                   <a:schemeClr val="tx1"/>
                 </a:solidFill>
               </a:rPr>
-              <a:t>€6,6M (conservador) a €13,0M (ambicioso); sin Ganamos, €4,7M en el escenario base (+123%).</a:t>
+              <a:t>€6,1M (conservador) a €11,9M (ambicioso); sin Ganamos, €4,8M en el escenario base (+127%).</a:t>
             </a:r>
             <a:endParaRPr lang="en-US" sz="1800" dirty="0"/>
           </a:p>
@@ -8966,7 +13899,7 @@
                   <a:schemeClr val="tx2"/>
                 </a:solidFill>
               </a:rPr>
-              <a:t>Tres escenarios: Ganamos explica la mitad del crecimiento</a:t>
+              <a:t>Tres escenarios: Ganamos explica casi la mitad del plan</a:t>
             </a:r>
             <a:endParaRPr lang="en-US" sz="3000" dirty="0"/>
           </a:p>
@@ -9088,7 +14021,7 @@
                   <a:schemeClr val="tx1"/>
                 </a:solidFill>
               </a:rPr>
-              <a:t>Base: €9,7M (+357%) con Ganamos al 75% de su ritmo anual.</a:t>
+              <a:t>Base: €8,8M (+319%) con Ganamos al 9% y al 75% de su ritmo anual.</a:t>
             </a:r>
             <a:endParaRPr lang="en-US" sz="1500" dirty="0"/>
           </a:p>
@@ -9106,7 +14039,7 @@
                   <a:schemeClr val="tx1"/>
                 </a:solidFill>
               </a:rPr>
-              <a:t>Sin Ganamos, el plan igual crece +123% en el escenario base.</a:t>
+              <a:t>Sin Ganamos, el plan igual crece +127% en el escenario base.</a:t>
             </a:r>
             <a:endParaRPr lang="en-US" sz="1500" dirty="0"/>
           </a:p>
@@ -9124,7 +14057,7 @@
                   <a:schemeClr val="tx1"/>
                 </a:solidFill>
               </a:rPr>
-              <a:t>Supuesto clave: GGR del operador × take rate del 11%.</a:t>
+              <a:t>Supuesto clave: GGR del operador × take rate (11%; Ganamos 9%).</a:t>
             </a:r>
             <a:endParaRPr lang="en-US" sz="1500" dirty="0"/>
           </a:p>
@@ -9250,7 +14183,7 @@
                   <a:schemeClr val="tx2"/>
                 </a:solidFill>
               </a:rPr>
-              <a:t>De €2,1M a €9,7M: de dónde sale el crecimiento</a:t>
+              <a:t>De €2,1M a €8,8M: de dónde sale el crecimiento</a:t>
             </a:r>
             <a:endParaRPr lang="en-US" sz="3000" dirty="0"/>
           </a:p>
@@ -9434,7 +14367,7 @@
                 <a:ea typeface="Cambria" pitchFamily="34" charset="-122"/>
                 <a:cs typeface="Cambria" pitchFamily="34" charset="-120"/>
               </a:rPr>
-              <a:t>+€7,54M</a:t>
+              <a:t>+€6,73M</a:t>
             </a:r>
             <a:endParaRPr lang="en-US" sz="3600" dirty="0"/>
           </a:p>
@@ -9470,7 +14403,7 @@
                   <a:schemeClr val="tx1"/>
                 </a:solidFill>
               </a:rPr>
-              <a:t>crecimiento incremental 2027, de los cuales €5,8M vienen de Ganamos y Grupo Royal</a:t>
+              <a:t>crecimiento incremental 2027, de los cuales €4,9M vienen de Ganamos y Grupo Royal</a:t>
             </a:r>
             <a:endParaRPr lang="en-US" sz="1400" dirty="0"/>
           </a:p>
@@ -9578,7 +14511,7 @@
                   <a:schemeClr val="tx2"/>
                 </a:solidFill>
               </a:rPr>
-              <a:t>4 main opportunities: 62% del ingreso 2027</a:t>
+              <a:t>4 main opportunities: 59% del ingreso 2027</a:t>
             </a:r>
             <a:endParaRPr lang="en-US" sz="3000" dirty="0"/>
           </a:p>
@@ -9752,7 +14685,7 @@
                   <a:schemeClr val="bg1"/>
                 </a:solidFill>
               </a:rPr>
-              <a:t>≈ €6,6M ingreso Evo / año</a:t>
+              <a:t>≈ €5,4M ingreso Evo / año (9%)</a:t>
             </a:r>
             <a:endParaRPr lang="en-US" sz="1300" dirty="0"/>
           </a:p>
@@ -9824,7 +14757,7 @@
                   <a:schemeClr val="bg1"/>
                 </a:solidFill>
               </a:rPr>
-              <a:t>Integración; legalmente listo. Próximo a salir en vivo</a:t>
+              <a:t>Próximo a salir en vivo. Pide 8%; hoy solo Ezugi</a:t>
             </a:r>
             <a:endParaRPr lang="en-US" sz="1300" dirty="0"/>
           </a:p>
@@ -9896,7 +14829,7 @@
                   <a:schemeClr val="bg1"/>
                 </a:solidFill>
               </a:rPr>
-              <a:t>Go-live Q4 2026, war-room semanal, tramos de take rate</a:t>
+              <a:t>Validar GGR y share Pragmatic, cerrar take rate y go-live</a:t>
             </a:r>
             <a:endParaRPr lang="en-US" sz="1300" dirty="0"/>
           </a:p>
@@ -10142,7 +15075,7 @@
                   <a:schemeClr val="bg1"/>
                 </a:solidFill>
               </a:rPr>
-              <a:t>Apuestas Royal en DD; GoGo Royal por dar de alta</a:t>
+              <a:t>#1 en Venezuela. Contrato y DD pendientes (Daniel Nunes)</a:t>
             </a:r>
             <a:endParaRPr lang="en-US" sz="1300" dirty="0"/>
           </a:p>
@@ -11024,7 +15957,7 @@
                 <a:ea typeface="Cambria" pitchFamily="34" charset="-122"/>
                 <a:cs typeface="Cambria" pitchFamily="34" charset="-120"/>
               </a:rPr>
-              <a:t>–€550K</a:t>
+              <a:t>–€450K</a:t>
             </a:r>
             <a:endParaRPr lang="en-US" sz="4000" dirty="0"/>
           </a:p>
@@ -11408,7 +16341,7 @@
                   <a:schemeClr val="tx1"/>
                 </a:solidFill>
               </a:rPr>
-              <a:t>por cada punto menos de</a:t>
+              <a:t>por cada punto de take</a:t>
             </a:r>
             <a:endParaRPr lang="en-US" sz="1400" dirty="0"/>
           </a:p>
@@ -11422,7 +16355,7 @@
                   <a:schemeClr val="tx1"/>
                 </a:solidFill>
               </a:rPr>
-              <a:t>take rate en Ganamos</a:t>
+              <a:t>rate en Ganamos</a:t>
             </a:r>
             <a:endParaRPr lang="en-US" sz="1400" dirty="0"/>
           </a:p>
@@ -11537,7 +16470,7 @@
                   <a:schemeClr val="tx1"/>
                 </a:solidFill>
               </a:rPr>
-              <a:t>Diversificar: México, Distra y Cirsa/Sportium sostienen +123% aun sin Ganamos.</a:t>
+              <a:t>Diversificar: México, Distra y Cirsa/Sportium sostienen +127% aun sin Ganamos.</a:t>
             </a:r>
             <a:endParaRPr lang="en-US" sz="1600" dirty="0"/>
           </a:p>
